--- a/slides/Building-Autonomous-AI-Agents-Lecture.pptx
+++ b/slides/Building-Autonomous-AI-Agents-Lecture.pptx
@@ -17792,6 +17792,7 @@
                 <a:spcPts val="600"/>
               </a:spcAft>
               <a:buNone/>
+              <a:defRPr/>
             </a:pPr>
             <a:r>
               <a:rPr sz="4000" b="1" i="0">
@@ -17833,6 +17834,7 @@
                 <a:spcPts val="600"/>
               </a:spcAft>
               <a:buNone/>
+              <a:defRPr/>
             </a:pPr>
             <a:r>
               <a:rPr sz="2600" b="1" i="0">
@@ -17856,9 +17858,10 @@
                 <a:spcPts val="600"/>
               </a:spcAft>
               <a:buNone/>
-            </a:pPr>
-            <a:r>
-              <a:rPr sz="1600" b="0" i="0">
+              <a:defRPr/>
+            </a:pPr>
+            <a:r>
+              <a:rPr sz="1800" b="0" i="0">
                 <a:solidFill>
                   <a:srgbClr val="2B343F"/>
                 </a:solidFill>
@@ -17879,9 +17882,10 @@
                 <a:spcPts val="600"/>
               </a:spcAft>
               <a:buNone/>
-            </a:pPr>
-            <a:r>
-              <a:rPr sz="1300" b="0" i="0">
+              <a:defRPr/>
+            </a:pPr>
+            <a:r>
+              <a:rPr sz="1800" b="0" i="0">
                 <a:solidFill>
                   <a:srgbClr val="7B8898"/>
                 </a:solidFill>
@@ -17933,9 +17937,10 @@
                 <a:spcPts val="1000"/>
               </a:spcAft>
               <a:buNone/>
-            </a:pPr>
-            <a:r>
-              <a:rPr sz="1550" b="1" i="0">
+              <a:defRPr/>
+            </a:pPr>
+            <a:r>
+              <a:rPr sz="1800" b="1" i="0">
                 <a:solidFill>
                   <a:srgbClr val="004282"/>
                 </a:solidFill>
@@ -17957,9 +17962,10 @@
               </a:buClr>
               <a:buFont typeface="Arial"/>
               <a:buChar char="▪"/>
-            </a:pPr>
-            <a:r>
-              <a:rPr sz="1400" b="1" i="0">
+              <a:defRPr/>
+            </a:pPr>
+            <a:r>
+              <a:rPr sz="1800" b="1" i="0">
                 <a:solidFill>
                   <a:srgbClr val="2B343F"/>
                 </a:solidFill>
@@ -17968,7 +17974,7 @@
               <a:t>Cost</a:t>
             </a:r>
             <a:r>
-              <a:rPr sz="1400" b="0" i="0">
+              <a:rPr sz="1800" b="0" i="0">
                 <a:solidFill>
                   <a:srgbClr val="2B343F"/>
                 </a:solidFill>
@@ -17990,9 +17996,10 @@
               </a:buClr>
               <a:buFont typeface="Arial"/>
               <a:buChar char="▪"/>
-            </a:pPr>
-            <a:r>
-              <a:rPr sz="1400" b="1" i="0">
+              <a:defRPr/>
+            </a:pPr>
+            <a:r>
+              <a:rPr sz="1800" b="1" i="0">
                 <a:solidFill>
                   <a:srgbClr val="2B343F"/>
                 </a:solidFill>
@@ -18001,7 +18008,7 @@
               <a:t>Latency</a:t>
             </a:r>
             <a:r>
-              <a:rPr sz="1400" b="0" i="0">
+              <a:rPr sz="1800" b="0" i="0">
                 <a:solidFill>
                   <a:srgbClr val="2B343F"/>
                 </a:solidFill>
@@ -18023,9 +18030,10 @@
               </a:buClr>
               <a:buFont typeface="Arial"/>
               <a:buChar char="▪"/>
-            </a:pPr>
-            <a:r>
-              <a:rPr sz="1400" b="1" i="0">
+              <a:defRPr/>
+            </a:pPr>
+            <a:r>
+              <a:rPr sz="1800" b="1" i="0">
                 <a:solidFill>
                   <a:srgbClr val="2B343F"/>
                 </a:solidFill>
@@ -18034,7 +18042,7 @@
               <a:t>No vendor lock-in</a:t>
             </a:r>
             <a:r>
-              <a:rPr sz="1400" b="0" i="0">
+              <a:rPr sz="1800" b="0" i="0">
                 <a:solidFill>
                   <a:srgbClr val="2B343F"/>
                 </a:solidFill>
@@ -18056,9 +18064,10 @@
               </a:buClr>
               <a:buFont typeface="Arial"/>
               <a:buChar char="▪"/>
-            </a:pPr>
-            <a:r>
-              <a:rPr sz="1400" b="1" i="0">
+              <a:defRPr/>
+            </a:pPr>
+            <a:r>
+              <a:rPr sz="1800" b="1" i="0">
                 <a:solidFill>
                   <a:srgbClr val="2B343F"/>
                 </a:solidFill>
@@ -18067,7 +18076,7 @@
               <a:t>Function calling built in</a:t>
             </a:r>
             <a:r>
-              <a:rPr sz="1400" b="0" i="0">
+              <a:rPr sz="1800" b="0" i="0">
                 <a:solidFill>
                   <a:srgbClr val="2B343F"/>
                 </a:solidFill>
@@ -18101,9 +18110,10 @@
                 <a:spcPts val="1000"/>
               </a:spcAft>
               <a:buNone/>
-            </a:pPr>
-            <a:r>
-              <a:rPr sz="1550" b="1" i="0">
+              <a:defRPr/>
+            </a:pPr>
+            <a:r>
+              <a:rPr sz="1800" b="1" i="0">
                 <a:solidFill>
                   <a:srgbClr val="F99D1F"/>
                 </a:solidFill>
@@ -18125,9 +18135,10 @@
               </a:buClr>
               <a:buFont typeface="Arial"/>
               <a:buChar char="▪"/>
-            </a:pPr>
-            <a:r>
-              <a:rPr sz="1400" b="0" i="0">
+              <a:defRPr/>
+            </a:pPr>
+            <a:r>
+              <a:rPr sz="1800" b="0" i="0">
                 <a:solidFill>
                   <a:srgbClr val="2B343F"/>
                 </a:solidFill>
@@ -18136,7 +18147,7 @@
               <a:t>Compare Hermes' </a:t>
             </a:r>
             <a:r>
-              <a:rPr sz="1400" b="1" i="0">
+              <a:rPr sz="1800" b="1" i="0">
                 <a:solidFill>
                   <a:srgbClr val="2B343F"/>
                 </a:solidFill>
@@ -18145,7 +18156,7 @@
               <a:t>tool-calling output format</a:t>
             </a:r>
             <a:r>
-              <a:rPr sz="1400" b="0" i="0">
+              <a:rPr sz="1800" b="0" i="0">
                 <a:solidFill>
                   <a:srgbClr val="2B343F"/>
                 </a:solidFill>
@@ -18167,9 +18178,10 @@
               </a:buClr>
               <a:buFont typeface="Arial"/>
               <a:buChar char="▪"/>
-            </a:pPr>
-            <a:r>
-              <a:rPr sz="1400" b="0" i="0">
+              <a:defRPr/>
+            </a:pPr>
+            <a:r>
+              <a:rPr sz="1800" b="0" i="0">
                 <a:solidFill>
                   <a:srgbClr val="2B343F"/>
                 </a:solidFill>
@@ -18178,7 +18190,7 @@
               <a:t>Key check: does it emit </a:t>
             </a:r>
             <a:r>
-              <a:rPr sz="1400" b="1" i="0">
+              <a:rPr sz="1800" b="1" i="0">
                 <a:solidFill>
                   <a:srgbClr val="2B343F"/>
                 </a:solidFill>
@@ -18187,7 +18199,7 @@
               <a:t>OpenAI-style `tool_calls`</a:t>
             </a:r>
             <a:r>
-              <a:rPr sz="1400" b="0" i="0">
+              <a:rPr sz="1800" b="0" i="0">
                 <a:solidFill>
                   <a:srgbClr val="2B343F"/>
                 </a:solidFill>
@@ -18209,9 +18221,10 @@
               </a:buClr>
               <a:buFont typeface="Arial"/>
               <a:buChar char="▪"/>
-            </a:pPr>
-            <a:r>
-              <a:rPr sz="1400" b="1" i="0">
+              <a:defRPr/>
+            </a:pPr>
+            <a:r>
+              <a:rPr sz="1800" b="1" i="0">
                 <a:solidFill>
                   <a:srgbClr val="2B343F"/>
                 </a:solidFill>
@@ -18220,7 +18233,7 @@
               <a:t>Hands-on:</a:t>
             </a:r>
             <a:r>
-              <a:rPr sz="1400" b="0" i="0">
+              <a:rPr sz="1800" b="0" i="0">
                 <a:solidFill>
                   <a:srgbClr val="2B343F"/>
                 </a:solidFill>
@@ -18259,6 +18272,7 @@
                 <a:spcPts val="600"/>
               </a:spcAft>
               <a:buNone/>
+              <a:defRPr/>
             </a:pPr>
             <a:r>
               <a:rPr sz="3000" b="1" i="0">
@@ -18302,6 +18316,7 @@
                 <a:spcPts val="600"/>
               </a:spcAft>
               <a:buNone/>
+              <a:defRPr/>
             </a:pPr>
             <a:r>
               <a:rPr sz="1200" b="1" i="0">
@@ -18345,6 +18360,7 @@
                 <a:spcPts val="600"/>
               </a:spcAft>
               <a:buNone/>
+              <a:defRPr/>
             </a:pPr>
             <a:r>
               <a:rPr sz="900" b="0" i="0">
@@ -18388,6 +18404,7 @@
                 <a:spcPts val="600"/>
               </a:spcAft>
               <a:buNone/>
+              <a:defRPr/>
             </a:pPr>
             <a:r>
               <a:rPr sz="900" b="0" i="0">
@@ -18447,6 +18464,7 @@
                 <a:spcPts val="600"/>
               </a:spcAft>
               <a:buNone/>
+              <a:defRPr/>
             </a:pPr>
             <a:r>
               <a:rPr sz="3000" b="1" i="0">
@@ -18492,9 +18510,10 @@
               </a:buClr>
               <a:buFont typeface="Arial"/>
               <a:buChar char="▪"/>
-            </a:pPr>
-            <a:r>
-              <a:rPr sz="1500" b="1" i="0">
+              <a:defRPr/>
+            </a:pPr>
+            <a:r>
+              <a:rPr sz="1800" b="1" i="0">
                 <a:solidFill>
                   <a:srgbClr val="2B343F"/>
                 </a:solidFill>
@@ -18503,7 +18522,7 @@
               <a:t>Natural-language cron</a:t>
             </a:r>
             <a:r>
-              <a:rPr sz="1500" b="0" i="0">
+              <a:rPr sz="1800" b="0" i="0">
                 <a:solidFill>
                   <a:srgbClr val="2B343F"/>
                 </a:solidFill>
@@ -18512,7 +18531,7 @@
               <a:t> — “every weekday at 9am, summarize my inbox and post to Slack” is all it takes; agents can also </a:t>
             </a:r>
             <a:r>
-              <a:rPr sz="1500" b="1" i="0">
+              <a:rPr sz="1800" b="1" i="0">
                 <a:solidFill>
                   <a:srgbClr val="2B343F"/>
                 </a:solidFill>
@@ -18521,7 +18540,7 @@
               <a:t>self-schedule wake-ups</a:t>
             </a:r>
             <a:r>
-              <a:rPr sz="1500" b="0" i="0">
+              <a:rPr sz="1800" b="0" i="0">
                 <a:solidFill>
                   <a:srgbClr val="2B343F"/>
                 </a:solidFill>
@@ -18530,7 +18549,7 @@
               <a:t>; </a:t>
             </a:r>
             <a:r>
-              <a:rPr sz="1500" b="1" i="0">
+              <a:rPr sz="1800" b="1" i="0">
                 <a:solidFill>
                   <a:srgbClr val="2B343F"/>
                 </a:solidFill>
@@ -18539,7 +18558,7 @@
               <a:t>script mode</a:t>
             </a:r>
             <a:r>
-              <a:rPr sz="1500" b="0" i="0">
+              <a:rPr sz="1800" b="0" i="0">
                 <a:solidFill>
                   <a:srgbClr val="2B343F"/>
                 </a:solidFill>
@@ -18548,7 +18567,7 @@
               <a:t> (`--script --no-agent`) runs with </a:t>
             </a:r>
             <a:r>
-              <a:rPr sz="1500" b="1" i="0">
+              <a:rPr sz="1800" b="1" i="0">
                 <a:solidFill>
                   <a:srgbClr val="2B343F"/>
                 </a:solidFill>
@@ -18570,9 +18589,10 @@
               </a:buClr>
               <a:buFont typeface="Arial"/>
               <a:buChar char="▪"/>
-            </a:pPr>
-            <a:r>
-              <a:rPr sz="1500" b="1" i="0">
+              <a:defRPr/>
+            </a:pPr>
+            <a:r>
+              <a:rPr sz="1800" b="1" i="0">
                 <a:solidFill>
                   <a:srgbClr val="2B343F"/>
                 </a:solidFill>
@@ -18581,7 +18601,7 @@
               <a:t>Kanban coordination</a:t>
             </a:r>
             <a:r>
-              <a:rPr sz="1500" b="0" i="0">
+              <a:rPr sz="1800" b="0" i="0">
                 <a:solidFill>
                   <a:srgbClr val="2B343F"/>
                 </a:solidFill>
@@ -18590,7 +18610,7 @@
               <a:t> — a shared Kanban board lets 7+ agents manage themselves: the board reads each profile’s </a:t>
             </a:r>
             <a:r>
-              <a:rPr sz="1500" b="1" i="0">
+              <a:rPr sz="1800" b="1" i="0">
                 <a:solidFill>
                   <a:srgbClr val="2B343F"/>
                 </a:solidFill>
@@ -18599,7 +18619,7 @@
               <a:t>SOUL.md</a:t>
             </a:r>
             <a:r>
-              <a:rPr sz="1500" b="0" i="0">
+              <a:rPr sz="1800" b="0" i="0">
                 <a:solidFill>
                   <a:srgbClr val="2B343F"/>
                 </a:solidFill>
@@ -18621,9 +18641,10 @@
               </a:buClr>
               <a:buFont typeface="Arial"/>
               <a:buChar char="▪"/>
-            </a:pPr>
-            <a:r>
-              <a:rPr sz="1500" b="1" i="0">
+              <a:defRPr/>
+            </a:pPr>
+            <a:r>
+              <a:rPr sz="1800" b="1" i="0">
                 <a:solidFill>
                   <a:srgbClr val="2B343F"/>
                 </a:solidFill>
@@ -18632,7 +18653,7 @@
               <a:t>Subagent delegation</a:t>
             </a:r>
             <a:r>
-              <a:rPr sz="1500" b="0" i="0">
+              <a:rPr sz="1800" b="0" i="0">
                 <a:solidFill>
                   <a:srgbClr val="2B343F"/>
                 </a:solidFill>
@@ -18641,7 +18662,7 @@
               <a:t> — talk to </a:t>
             </a:r>
             <a:r>
-              <a:rPr sz="1500" b="1" i="0">
+              <a:rPr sz="1800" b="1" i="0">
                 <a:solidFill>
                   <a:srgbClr val="2B343F"/>
                 </a:solidFill>
@@ -18650,7 +18671,7 @@
               <a:t>one lead agent</a:t>
             </a:r>
             <a:r>
-              <a:rPr sz="1500" b="0" i="0">
+              <a:rPr sz="1800" b="0" i="0">
                 <a:solidFill>
                   <a:srgbClr val="2B343F"/>
                 </a:solidFill>
@@ -18659,7 +18680,7 @@
               <a:t>; it delegates to specialist subagents (e.g. a 9-role dev team). Authority is enforced by </a:t>
             </a:r>
             <a:r>
-              <a:rPr sz="1500" b="1" i="0">
+              <a:rPr sz="1800" b="1" i="0">
                 <a:solidFill>
                   <a:srgbClr val="2B343F"/>
                 </a:solidFill>
@@ -18668,7 +18689,7 @@
               <a:t>toolset restrictions</a:t>
             </a:r>
             <a:r>
-              <a:rPr sz="1500" b="0" i="0">
+              <a:rPr sz="1800" b="0" i="0">
                 <a:solidFill>
                   <a:srgbClr val="2B343F"/>
                 </a:solidFill>
@@ -18677,7 +18698,7 @@
               <a:t>, not just system prompts; the orchestrator grades work </a:t>
             </a:r>
             <a:r>
-              <a:rPr sz="1500" b="1" i="0">
+              <a:rPr sz="1800" b="1" i="0">
                 <a:solidFill>
                   <a:srgbClr val="2B343F"/>
                 </a:solidFill>
@@ -18699,9 +18720,10 @@
               </a:buClr>
               <a:buFont typeface="Arial"/>
               <a:buChar char="▪"/>
-            </a:pPr>
-            <a:r>
-              <a:rPr sz="1500" b="1" i="0">
+              <a:defRPr/>
+            </a:pPr>
+            <a:r>
+              <a:rPr sz="1800" b="1" i="0">
                 <a:solidFill>
                   <a:srgbClr val="2B343F"/>
                 </a:solidFill>
@@ -18710,7 +18732,7 @@
               <a:t>Self-improving skills</a:t>
             </a:r>
             <a:r>
-              <a:rPr sz="1500" b="0" i="0">
+              <a:rPr sz="1800" b="0" i="0">
                 <a:solidFill>
                   <a:srgbClr val="2B343F"/>
                 </a:solidFill>
@@ -18719,7 +18741,7 @@
               <a:t> — writes its own skill files after solving hard problems; reusing a skill updates it from what it learns </a:t>
             </a:r>
             <a:r>
-              <a:rPr sz="1500" b="1" i="0">
+              <a:rPr sz="1800" b="1" i="0">
                 <a:solidFill>
                   <a:srgbClr val="2B343F"/>
                 </a:solidFill>
@@ -18741,9 +18763,10 @@
               </a:buClr>
               <a:buFont typeface="Arial"/>
               <a:buChar char="▪"/>
-            </a:pPr>
-            <a:r>
-              <a:rPr sz="1500" b="1" i="0">
+              <a:defRPr/>
+            </a:pPr>
+            <a:r>
+              <a:rPr sz="1800" b="1" i="0">
                 <a:solidFill>
                   <a:srgbClr val="2B343F"/>
                 </a:solidFill>
@@ -18752,7 +18775,7 @@
               <a:t>Memory &amp; profiles</a:t>
             </a:r>
             <a:r>
-              <a:rPr sz="1500" b="0" i="0">
+              <a:rPr sz="1800" b="0" i="0">
                 <a:solidFill>
                   <a:srgbClr val="2B343F"/>
                 </a:solidFill>
@@ -18774,9 +18797,10 @@
               </a:buClr>
               <a:buFont typeface="Arial"/>
               <a:buChar char="▪"/>
-            </a:pPr>
-            <a:r>
-              <a:rPr sz="1500" b="1" i="0">
+              <a:defRPr/>
+            </a:pPr>
+            <a:r>
+              <a:rPr sz="1800" b="1" i="0">
                 <a:solidFill>
                   <a:srgbClr val="2B343F"/>
                 </a:solidFill>
@@ -18785,7 +18809,7 @@
               <a:t>Safety &amp; control</a:t>
             </a:r>
             <a:r>
-              <a:rPr sz="1500" b="0" i="0">
+              <a:rPr sz="1800" b="0" i="0">
                 <a:solidFill>
                   <a:srgbClr val="2B343F"/>
                 </a:solidFill>
@@ -18794,7 +18818,7 @@
               <a:t> — approval gates, </a:t>
             </a:r>
             <a:r>
-              <a:rPr sz="1500" b="1" i="0">
+              <a:rPr sz="1800" b="1" i="0">
                 <a:solidFill>
                   <a:srgbClr val="2B343F"/>
                 </a:solidFill>
@@ -18803,7 +18827,7 @@
               <a:t>/rollback</a:t>
             </a:r>
             <a:r>
-              <a:rPr sz="1500" b="0" i="0">
+              <a:rPr sz="1800" b="0" i="0">
                 <a:solidFill>
                   <a:srgbClr val="2B343F"/>
                 </a:solidFill>
@@ -18812,7 +18836,7 @@
               <a:t> (rewind files + context), </a:t>
             </a:r>
             <a:r>
-              <a:rPr sz="1500" b="1" i="0">
+              <a:rPr sz="1800" b="1" i="0">
                 <a:solidFill>
                   <a:srgbClr val="2B343F"/>
                 </a:solidFill>
@@ -18821,7 +18845,7 @@
               <a:t>/steer</a:t>
             </a:r>
             <a:r>
-              <a:rPr sz="1500" b="0" i="0">
+              <a:rPr sz="1800" b="0" i="0">
                 <a:solidFill>
                   <a:srgbClr val="2B343F"/>
                 </a:solidFill>
@@ -18830,7 +18854,7 @@
               <a:t> (inject instructions mid-run) </a:t>
             </a:r>
             <a:r>
-              <a:rPr sz="1500" b="1" i="0">
+              <a:rPr sz="1800" b="1" i="0">
                 <a:solidFill>
                   <a:srgbClr val="2B343F"/>
                 </a:solidFill>
@@ -18871,6 +18895,7 @@
                 <a:spcPts val="600"/>
               </a:spcAft>
               <a:buNone/>
+              <a:defRPr/>
             </a:pPr>
             <a:r>
               <a:rPr sz="1200" b="1" i="0">
@@ -18914,6 +18939,7 @@
                 <a:spcPts val="600"/>
               </a:spcAft>
               <a:buNone/>
+              <a:defRPr/>
             </a:pPr>
             <a:r>
               <a:rPr sz="900" b="0" i="0">
@@ -18957,6 +18983,7 @@
                 <a:spcPts val="600"/>
               </a:spcAft>
               <a:buNone/>
+              <a:defRPr/>
             </a:pPr>
             <a:r>
               <a:rPr sz="900" b="0" i="0">
@@ -19011,9 +19038,10 @@
                 <a:spcPts val="1000"/>
               </a:spcAft>
               <a:buNone/>
-            </a:pPr>
-            <a:r>
-              <a:rPr sz="1550" b="1" i="0">
+              <a:defRPr/>
+            </a:pPr>
+            <a:r>
+              <a:rPr sz="1800" b="1" i="0">
                 <a:solidFill>
                   <a:srgbClr val="004282"/>
                 </a:solidFill>
@@ -19035,9 +19063,10 @@
               </a:buClr>
               <a:buFont typeface="Arial"/>
               <a:buChar char="▪"/>
-            </a:pPr>
-            <a:r>
-              <a:rPr sz="1350" b="1" i="0">
+              <a:defRPr/>
+            </a:pPr>
+            <a:r>
+              <a:rPr sz="1800" b="1" i="0">
                 <a:solidFill>
                   <a:srgbClr val="2B343F"/>
                 </a:solidFill>
@@ -19046,7 +19075,7 @@
               <a:t>3am “Dreaming” job</a:t>
             </a:r>
             <a:r>
-              <a:rPr sz="1350" b="0" i="0">
+              <a:rPr sz="1800" b="0" i="0">
                 <a:solidFill>
                   <a:srgbClr val="2B343F"/>
                 </a:solidFill>
@@ -19068,9 +19097,10 @@
               </a:buClr>
               <a:buFont typeface="Arial"/>
               <a:buChar char="▪"/>
-            </a:pPr>
-            <a:r>
-              <a:rPr sz="1350" b="1" i="0">
+              <a:defRPr/>
+            </a:pPr>
+            <a:r>
+              <a:rPr sz="1800" b="1" i="0">
                 <a:solidFill>
                   <a:srgbClr val="2B343F"/>
                 </a:solidFill>
@@ -19079,7 +19109,7 @@
               <a:t>Gumroad</a:t>
             </a:r>
             <a:r>
-              <a:rPr sz="1350" b="0" i="0">
+              <a:rPr sz="1800" b="0" i="0">
                 <a:solidFill>
                   <a:srgbClr val="2B343F"/>
                 </a:solidFill>
@@ -19088,7 +19118,7 @@
               <a:t> — cron jobs check support tickets, watch X mentions, update finance docs; every mistake becomes a </a:t>
             </a:r>
             <a:r>
-              <a:rPr sz="1350" b="1" i="0">
+              <a:rPr sz="1800" b="1" i="0">
                 <a:solidFill>
                   <a:srgbClr val="2B343F"/>
                 </a:solidFill>
@@ -19097,7 +19127,7 @@
               <a:t>dated policy rule</a:t>
             </a:r>
             <a:r>
-              <a:rPr sz="1350" b="0" i="0">
+              <a:rPr sz="1800" b="0" i="0">
                 <a:solidFill>
                   <a:srgbClr val="2B343F"/>
                 </a:solidFill>
@@ -19119,9 +19149,10 @@
               </a:buClr>
               <a:buFont typeface="Arial"/>
               <a:buChar char="▪"/>
-            </a:pPr>
-            <a:r>
-              <a:rPr sz="1350" b="1" i="0">
+              <a:defRPr/>
+            </a:pPr>
+            <a:r>
+              <a:rPr sz="1800" b="1" i="0">
                 <a:solidFill>
                   <a:srgbClr val="2B343F"/>
                 </a:solidFill>
@@ -19130,7 +19161,7 @@
               <a:t>20 cron “signals”</a:t>
             </a:r>
             <a:r>
-              <a:rPr sz="1350" b="0" i="0">
+              <a:rPr sz="1800" b="0" i="0">
                 <a:solidFill>
                   <a:srgbClr val="2B343F"/>
                 </a:solidFill>
@@ -19164,9 +19195,10 @@
                 <a:spcPts val="1000"/>
               </a:spcAft>
               <a:buNone/>
-            </a:pPr>
-            <a:r>
-              <a:rPr sz="1550" b="1" i="0">
+              <a:defRPr/>
+            </a:pPr>
+            <a:r>
+              <a:rPr sz="1800" b="1" i="0">
                 <a:solidFill>
                   <a:srgbClr val="F99D1F"/>
                 </a:solidFill>
@@ -19188,9 +19220,10 @@
               </a:buClr>
               <a:buFont typeface="Arial"/>
               <a:buChar char="▪"/>
-            </a:pPr>
-            <a:r>
-              <a:rPr sz="1350" b="1" i="0">
+              <a:defRPr/>
+            </a:pPr>
+            <a:r>
+              <a:rPr sz="1800" b="1" i="0">
                 <a:solidFill>
                   <a:srgbClr val="2B343F"/>
                 </a:solidFill>
@@ -19199,7 +19232,7 @@
               <a:t>7 agents, one Kanban</a:t>
             </a:r>
             <a:r>
-              <a:rPr sz="1350" b="0" i="0">
+              <a:rPr sz="1800" b="0" i="0">
                 <a:solidFill>
                   <a:srgbClr val="2B343F"/>
                 </a:solidFill>
@@ -19221,9 +19254,10 @@
               </a:buClr>
               <a:buFont typeface="Arial"/>
               <a:buChar char="▪"/>
-            </a:pPr>
-            <a:r>
-              <a:rPr sz="1350" b="1" i="0">
+              <a:defRPr/>
+            </a:pPr>
+            <a:r>
+              <a:rPr sz="1800" b="1" i="0">
                 <a:solidFill>
                   <a:srgbClr val="2B343F"/>
                 </a:solidFill>
@@ -19232,7 +19266,7 @@
               <a:t>Hermes Swarm</a:t>
             </a:r>
             <a:r>
-              <a:rPr sz="1350" b="0" i="0">
+              <a:rPr sz="1800" b="0" i="0">
                 <a:solidFill>
                   <a:srgbClr val="2B343F"/>
                 </a:solidFill>
@@ -19254,9 +19288,10 @@
               </a:buClr>
               <a:buFont typeface="Arial"/>
               <a:buChar char="▪"/>
-            </a:pPr>
-            <a:r>
-              <a:rPr sz="1350" b="1" i="0">
+              <a:defRPr/>
+            </a:pPr>
+            <a:r>
+              <a:rPr sz="1800" b="1" i="0">
                 <a:solidFill>
                   <a:srgbClr val="2B343F"/>
                 </a:solidFill>
@@ -19265,7 +19300,7 @@
               <a:t>12 instances in parallel</a:t>
             </a:r>
             <a:r>
-              <a:rPr sz="1350" b="0" i="0">
+              <a:rPr sz="1800" b="0" i="0">
                 <a:solidFill>
                   <a:srgbClr val="2B343F"/>
                 </a:solidFill>
@@ -19304,6 +19339,7 @@
                 <a:spcPts val="600"/>
               </a:spcAft>
               <a:buNone/>
+              <a:defRPr/>
             </a:pPr>
             <a:r>
               <a:rPr sz="3000" b="1" i="0">
@@ -19347,6 +19383,7 @@
                 <a:spcPts val="600"/>
               </a:spcAft>
               <a:buNone/>
+              <a:defRPr/>
             </a:pPr>
             <a:r>
               <a:rPr sz="1200" b="1" i="0">
@@ -19390,6 +19427,7 @@
                 <a:spcPts val="600"/>
               </a:spcAft>
               <a:buNone/>
+              <a:defRPr/>
             </a:pPr>
             <a:r>
               <a:rPr sz="900" b="0" i="0">
@@ -19433,6 +19471,7 @@
                 <a:spcPts val="600"/>
               </a:spcAft>
               <a:buNone/>
+              <a:defRPr/>
             </a:pPr>
             <a:r>
               <a:rPr sz="900" b="0" i="0">
@@ -19468,6 +19507,9 @@
           </a:bodyPr>
           <a:lstStyle/>
           <a:p>
+            <a:pPr>
+              <a:defRPr/>
+            </a:pPr>
             <a:r>
               <a:rPr sz="1050">
                 <a:solidFill>
@@ -19536,6 +19578,7 @@
                 <a:spcPts val="600"/>
               </a:spcAft>
               <a:buNone/>
+              <a:defRPr/>
             </a:pPr>
             <a:r>
               <a:rPr sz="3000" b="1" i="0">
@@ -19581,9 +19624,10 @@
               </a:buClr>
               <a:buFont typeface="Arial"/>
               <a:buChar char="▪"/>
-            </a:pPr>
-            <a:r>
-              <a:rPr sz="1450" b="1" i="0">
+              <a:defRPr/>
+            </a:pPr>
+            <a:r>
+              <a:rPr sz="1800" b="1" i="0">
                 <a:solidFill>
                   <a:srgbClr val="2B343F"/>
                 </a:solidFill>
@@ -19592,7 +19636,7 @@
               <a:t>LSP — semantic diagnostics</a:t>
             </a:r>
             <a:r>
-              <a:rPr sz="1450" b="0" i="0">
+              <a:rPr sz="1800" b="0" i="0">
                 <a:solidFill>
                   <a:srgbClr val="2B343F"/>
                 </a:solidFill>
@@ -19601,7 +19645,7 @@
               <a:t> — Hermes runs ~20 real language servers (pyright, typescript-language-server, rust-analyzer, gopls, clangd…) as background subprocesses; after every `write_file` / `patch` the agent sees only the </a:t>
             </a:r>
             <a:r>
-              <a:rPr sz="1450" b="1" i="0">
+              <a:rPr sz="1800" b="1" i="0">
                 <a:solidFill>
                   <a:srgbClr val="2B343F"/>
                 </a:solidFill>
@@ -19610,7 +19654,7 @@
               <a:t>new</a:t>
             </a:r>
             <a:r>
-              <a:rPr sz="1450" b="0" i="0">
+              <a:rPr sz="1800" b="0" i="0">
                 <a:solidFill>
                   <a:srgbClr val="2B343F"/>
                 </a:solidFill>
@@ -19632,9 +19676,10 @@
               </a:buClr>
               <a:buFont typeface="Arial"/>
               <a:buChar char="▪"/>
-            </a:pPr>
-            <a:r>
-              <a:rPr sz="1450" b="1" i="0">
+              <a:defRPr/>
+            </a:pPr>
+            <a:r>
+              <a:rPr sz="1800" b="1" i="0">
                 <a:solidFill>
                   <a:srgbClr val="2B343F"/>
                 </a:solidFill>
@@ -19643,7 +19688,7 @@
               <a:t>Curator</a:t>
             </a:r>
             <a:r>
-              <a:rPr sz="1450" b="0" i="0">
+              <a:rPr sz="1800" b="0" i="0">
                 <a:solidFill>
                   <a:srgbClr val="2B343F"/>
                 </a:solidFill>
@@ -19652,7 +19697,7 @@
               <a:t> — background maintenance for agent-created skills: usage telemetry, </a:t>
             </a:r>
             <a:r>
-              <a:rPr sz="1450" b="1" i="0">
+              <a:rPr sz="1800" b="1" i="0">
                 <a:solidFill>
                   <a:srgbClr val="2B343F"/>
                 </a:solidFill>
@@ -19661,7 +19706,7 @@
               <a:t>active → stale → archived</a:t>
             </a:r>
             <a:r>
-              <a:rPr sz="1450" b="0" i="0">
+              <a:rPr sz="1800" b="0" i="0">
                 <a:solidFill>
                   <a:srgbClr val="2B343F"/>
                 </a:solidFill>
@@ -19670,7 +19715,7 @@
               <a:t> lifecycle, optional LLM consolidation of near-duplicates, snapshots + rollback, </a:t>
             </a:r>
             <a:r>
-              <a:rPr sz="1450" b="1" i="0">
+              <a:rPr sz="1800" b="1" i="0">
                 <a:solidFill>
                   <a:srgbClr val="2B343F"/>
                 </a:solidFill>
@@ -19679,7 +19724,7 @@
               <a:t>pin</a:t>
             </a:r>
             <a:r>
-              <a:rPr sz="1450" b="0" i="0">
+              <a:rPr sz="1800" b="0" i="0">
                 <a:solidFill>
                   <a:srgbClr val="2B343F"/>
                 </a:solidFill>
@@ -19701,9 +19746,10 @@
               </a:buClr>
               <a:buFont typeface="Arial"/>
               <a:buChar char="▪"/>
-            </a:pPr>
-            <a:r>
-              <a:rPr sz="1450" b="1" i="0">
+              <a:defRPr/>
+            </a:pPr>
+            <a:r>
+              <a:rPr sz="1800" b="1" i="0">
                 <a:solidFill>
                   <a:srgbClr val="2B343F"/>
                 </a:solidFill>
@@ -19712,7 +19758,7 @@
               <a:t>Personality &amp; SOUL.md</a:t>
             </a:r>
             <a:r>
-              <a:rPr sz="1450" b="0" i="0">
+              <a:rPr sz="1800" b="0" i="0">
                 <a:solidFill>
                   <a:srgbClr val="2B343F"/>
                 </a:solidFill>
@@ -19721,7 +19767,7 @@
               <a:t> — `SOUL.md` is </a:t>
             </a:r>
             <a:r>
-              <a:rPr sz="1450" b="1" i="0">
+              <a:rPr sz="1800" b="1" i="0">
                 <a:solidFill>
                   <a:srgbClr val="2B343F"/>
                 </a:solidFill>
@@ -19730,7 +19776,7 @@
               <a:t>slot #1 of the system prompt</a:t>
             </a:r>
             <a:r>
-              <a:rPr sz="1450" b="0" i="0">
+              <a:rPr sz="1800" b="0" i="0">
                 <a:solidFill>
                   <a:srgbClr val="2B343F"/>
                 </a:solidFill>
@@ -19739,7 +19785,7 @@
               <a:t> — the agent's identity; loaded only from `~/.hermes` so it stays predictable; `/personality` presets (teacher, technical, creative, pirate…) as session overlays. Rule of thumb: </a:t>
             </a:r>
             <a:r>
-              <a:rPr sz="1450" b="1" i="0">
+              <a:rPr sz="1800" b="1" i="0">
                 <a:solidFill>
                   <a:srgbClr val="2B343F"/>
                 </a:solidFill>
@@ -19761,9 +19807,10 @@
               </a:buClr>
               <a:buFont typeface="Arial"/>
               <a:buChar char="▪"/>
-            </a:pPr>
-            <a:r>
-              <a:rPr sz="1450" b="1" i="0">
+              <a:defRPr/>
+            </a:pPr>
+            <a:r>
+              <a:rPr sz="1800" b="1" i="0">
                 <a:solidFill>
                   <a:srgbClr val="2B343F"/>
                 </a:solidFill>
@@ -19772,7 +19819,7 @@
               <a:t>Image &amp; video generation</a:t>
             </a:r>
             <a:r>
-              <a:rPr sz="1450" b="0" i="0">
+              <a:rPr sz="1800" b="0" i="0">
                 <a:solidFill>
                   <a:srgbClr val="2B343F"/>
                 </a:solidFill>
@@ -19781,7 +19828,7 @@
               <a:t> — </a:t>
             </a:r>
             <a:r>
-              <a:rPr sz="1450" b="1" i="0">
+              <a:rPr sz="1800" b="1" i="0">
                 <a:solidFill>
                   <a:srgbClr val="2B343F"/>
                 </a:solidFill>
@@ -19790,7 +19837,7 @@
               <a:t>image generation built in</a:t>
             </a:r>
             <a:r>
-              <a:rPr sz="1450" b="0" i="0">
+              <a:rPr sz="1800" b="0" i="0">
                 <a:solidFill>
                   <a:srgbClr val="2B343F"/>
                 </a:solidFill>
@@ -19799,7 +19846,7 @@
               <a:t> via FAL.ai (11 models: FLUX 2, GPT-Image, Ideogram V3, Recraft V4…); </a:t>
             </a:r>
             <a:r>
-              <a:rPr sz="1450" b="1" i="0">
+              <a:rPr sz="1800" b="1" i="0">
                 <a:solidFill>
                   <a:srgbClr val="2B343F"/>
                 </a:solidFill>
@@ -19808,7 +19855,7 @@
               <a:t>video generation</a:t>
             </a:r>
             <a:r>
-              <a:rPr sz="1450" b="0" i="0">
+              <a:rPr sz="1800" b="0" i="0">
                 <a:solidFill>
                   <a:srgbClr val="2B343F"/>
                 </a:solidFill>
@@ -19849,6 +19896,7 @@
                 <a:spcPts val="600"/>
               </a:spcAft>
               <a:buNone/>
+              <a:defRPr/>
             </a:pPr>
             <a:r>
               <a:rPr sz="1200" b="1" i="0">
@@ -19892,6 +19940,7 @@
                 <a:spcPts val="600"/>
               </a:spcAft>
               <a:buNone/>
+              <a:defRPr/>
             </a:pPr>
             <a:r>
               <a:rPr sz="900" b="0" i="0">
@@ -19935,6 +19984,7 @@
                 <a:spcPts val="600"/>
               </a:spcAft>
               <a:buNone/>
+              <a:defRPr/>
             </a:pPr>
             <a:r>
               <a:rPr sz="900" b="0" i="0">
@@ -19956,8 +20006,8 @@
         </p:nvSpPr>
         <p:spPr>
           <a:xfrm>
-            <a:off x="841248" y="6217920"/>
-            <a:ext cx="10607040" cy="274320"/>
+            <a:off x="841248" y="5846065"/>
+            <a:ext cx="10607040" cy="609599"/>
           </a:xfrm>
           <a:prstGeom prst="rect">
             <a:avLst/>
@@ -19970,6 +20020,9 @@
           </a:bodyPr>
           <a:lstStyle/>
           <a:p>
+            <a:pPr>
+              <a:defRPr/>
+            </a:pPr>
             <a:r>
               <a:rPr sz="1050">
                 <a:solidFill>
@@ -20034,6 +20087,7 @@
                 <a:spcPts val="600"/>
               </a:spcAft>
               <a:buNone/>
+              <a:defRPr/>
             </a:pPr>
             <a:r>
               <a:rPr sz="3000" b="1" i="0">
@@ -20079,9 +20133,10 @@
               </a:buClr>
               <a:buFont typeface="Arial"/>
               <a:buChar char="▪"/>
-            </a:pPr>
-            <a:r>
-              <a:rPr sz="1450" b="1" i="0">
+              <a:defRPr/>
+            </a:pPr>
+            <a:r>
+              <a:rPr sz="1800" b="1" i="0">
                 <a:solidFill>
                   <a:srgbClr val="2B343F"/>
                 </a:solidFill>
@@ -20090,7 +20145,7 @@
               <a:t>Two curated files</a:t>
             </a:r>
             <a:r>
-              <a:rPr sz="1450" b="0" i="0">
+              <a:rPr sz="1800" b="0" i="0">
                 <a:solidFill>
                   <a:srgbClr val="2B343F"/>
                 </a:solidFill>
@@ -20112,9 +20167,10 @@
               </a:buClr>
               <a:buFont typeface="Arial"/>
               <a:buChar char="▪"/>
-            </a:pPr>
-            <a:r>
-              <a:rPr sz="1450" b="1" i="0">
+              <a:defRPr/>
+            </a:pPr>
+            <a:r>
+              <a:rPr sz="1800" b="1" i="0">
                 <a:solidFill>
                   <a:srgbClr val="2B343F"/>
                 </a:solidFill>
@@ -20123,7 +20179,7 @@
               <a:t>Frozen snapshot</a:t>
             </a:r>
             <a:r>
-              <a:rPr sz="1450" b="0" i="0">
+              <a:rPr sz="1800" b="0" i="0">
                 <a:solidFill>
                   <a:srgbClr val="2B343F"/>
                 </a:solidFill>
@@ -20132,7 +20188,7 @@
               <a:t> — injected into the system prompt once at session start (preserves the prefix cache); the `memory` tool (</a:t>
             </a:r>
             <a:r>
-              <a:rPr sz="1450" b="1" i="0">
+              <a:rPr sz="1800" b="1" i="0">
                 <a:solidFill>
                   <a:srgbClr val="2B343F"/>
                 </a:solidFill>
@@ -20141,7 +20197,7 @@
               <a:t>add / replace / remove</a:t>
             </a:r>
             <a:r>
-              <a:rPr sz="1450" b="0" i="0">
+              <a:rPr sz="1800" b="0" i="0">
                 <a:solidFill>
                   <a:srgbClr val="2B343F"/>
                 </a:solidFill>
@@ -20163,9 +20219,10 @@
               </a:buClr>
               <a:buFont typeface="Arial"/>
               <a:buChar char="▪"/>
-            </a:pPr>
-            <a:r>
-              <a:rPr sz="1450" b="1" i="0">
+              <a:defRPr/>
+            </a:pPr>
+            <a:r>
+              <a:rPr sz="1800" b="1" i="0">
                 <a:solidFill>
                   <a:srgbClr val="2B343F"/>
                 </a:solidFill>
@@ -20174,7 +20231,7 @@
               <a:t>Bounded by design</a:t>
             </a:r>
             <a:r>
-              <a:rPr sz="1450" b="0" i="0">
+              <a:rPr sz="1800" b="0" i="0">
                 <a:solidFill>
                   <a:srgbClr val="2B343F"/>
                 </a:solidFill>
@@ -20183,7 +20240,7 @@
               <a:t> — hard char limits; when full, the agent </a:t>
             </a:r>
             <a:r>
-              <a:rPr sz="1450" b="1" i="0">
+              <a:rPr sz="1800" b="1" i="0">
                 <a:solidFill>
                   <a:srgbClr val="2B343F"/>
                 </a:solidFill>
@@ -20192,7 +20249,7 @@
               <a:t>consolidates entries in the same turn</a:t>
             </a:r>
             <a:r>
-              <a:rPr sz="1450" b="0" i="0">
+              <a:rPr sz="1800" b="0" i="0">
                 <a:solidFill>
                   <a:srgbClr val="2B343F"/>
                 </a:solidFill>
@@ -20214,9 +20271,10 @@
               </a:buClr>
               <a:buFont typeface="Arial"/>
               <a:buChar char="▪"/>
-            </a:pPr>
-            <a:r>
-              <a:rPr sz="1450" b="1" i="0">
+              <a:defRPr/>
+            </a:pPr>
+            <a:r>
+              <a:rPr sz="1800" b="1" i="0">
                 <a:solidFill>
                   <a:srgbClr val="2B343F"/>
                 </a:solidFill>
@@ -20225,7 +20283,7 @@
               <a:t>`session_search`</a:t>
             </a:r>
             <a:r>
-              <a:rPr sz="1450" b="0" i="0">
+              <a:rPr sz="1800" b="0" i="0">
                 <a:solidFill>
                   <a:srgbClr val="2B343F"/>
                 </a:solidFill>
@@ -20234,7 +20292,7 @@
               <a:t> — FTS5 full-text search over </a:t>
             </a:r>
             <a:r>
-              <a:rPr sz="1450" b="1" i="0">
+              <a:rPr sz="1800" b="1" i="0">
                 <a:solidFill>
                   <a:srgbClr val="2B343F"/>
                 </a:solidFill>
@@ -20243,7 +20301,7 @@
               <a:t>all past sessions</a:t>
             </a:r>
             <a:r>
-              <a:rPr sz="1450" b="0" i="0">
+              <a:rPr sz="1800" b="0" i="0">
                 <a:solidFill>
                   <a:srgbClr val="2B343F"/>
                 </a:solidFill>
@@ -20265,9 +20323,10 @@
               </a:buClr>
               <a:buFont typeface="Arial"/>
               <a:buChar char="▪"/>
-            </a:pPr>
-            <a:r>
-              <a:rPr sz="1450" b="1" i="0">
+              <a:defRPr/>
+            </a:pPr>
+            <a:r>
+              <a:rPr sz="1800" b="1" i="0">
                 <a:solidFill>
                   <a:srgbClr val="2B343F"/>
                 </a:solidFill>
@@ -20276,7 +20335,7 @@
               <a:t>Consent controls</a:t>
             </a:r>
             <a:r>
-              <a:rPr sz="1450" b="0" i="0">
+              <a:rPr sz="1800" b="0" i="0">
                 <a:solidFill>
                   <a:srgbClr val="2B343F"/>
                 </a:solidFill>
@@ -20317,6 +20376,7 @@
                 <a:spcPts val="600"/>
               </a:spcAft>
               <a:buNone/>
+              <a:defRPr/>
             </a:pPr>
             <a:r>
               <a:rPr sz="1200" b="1" i="0">
@@ -20360,6 +20420,7 @@
                 <a:spcPts val="600"/>
               </a:spcAft>
               <a:buNone/>
+              <a:defRPr/>
             </a:pPr>
             <a:r>
               <a:rPr sz="900" b="0" i="0">
@@ -20403,6 +20464,7 @@
                 <a:spcPts val="600"/>
               </a:spcAft>
               <a:buNone/>
+              <a:defRPr/>
             </a:pPr>
             <a:r>
               <a:rPr sz="900" b="0" i="0">
@@ -20462,6 +20524,7 @@
                 <a:spcPts val="600"/>
               </a:spcAft>
               <a:buNone/>
+              <a:defRPr/>
             </a:pPr>
             <a:r>
               <a:rPr sz="3000" b="1" i="0">
@@ -20507,9 +20570,10 @@
               </a:buClr>
               <a:buFont typeface="Arial"/>
               <a:buChar char="▪"/>
-            </a:pPr>
-            <a:r>
-              <a:rPr sz="1450" b="1" i="0">
+              <a:defRPr/>
+            </a:pPr>
+            <a:r>
+              <a:rPr sz="1800" b="1" i="0">
                 <a:solidFill>
                   <a:srgbClr val="2B343F"/>
                 </a:solidFill>
@@ -20518,7 +20582,7 @@
               <a:t>Beyond key-value memory</a:t>
             </a:r>
             <a:r>
-              <a:rPr sz="1450" b="0" i="0">
+              <a:rPr sz="1800" b="0" i="0">
                 <a:solidFill>
                   <a:srgbClr val="2B343F"/>
                 </a:solidFill>
@@ -20527,7 +20591,7 @@
               <a:t> — Honcho is an AI-native memory backend (a memory-provider plugin) that </a:t>
             </a:r>
             <a:r>
-              <a:rPr sz="1450" b="1" i="0">
+              <a:rPr sz="1800" b="1" i="0">
                 <a:solidFill>
                   <a:srgbClr val="2B343F"/>
                 </a:solidFill>
@@ -20536,7 +20600,7 @@
               <a:t>reasons about conversations after they happen</a:t>
             </a:r>
             <a:r>
-              <a:rPr sz="1450" b="0" i="0">
+              <a:rPr sz="1800" b="0" i="0">
                 <a:solidFill>
                   <a:srgbClr val="2B343F"/>
                 </a:solidFill>
@@ -20558,9 +20622,10 @@
               </a:buClr>
               <a:buFont typeface="Arial"/>
               <a:buChar char="▪"/>
-            </a:pPr>
-            <a:r>
-              <a:rPr sz="1450" b="1" i="0">
+              <a:defRPr/>
+            </a:pPr>
+            <a:r>
+              <a:rPr sz="1800" b="1" i="0">
                 <a:solidFill>
                   <a:srgbClr val="2B343F"/>
                 </a:solidFill>
@@ -20569,7 +20634,7 @@
               <a:t>Dialectic reasoning</a:t>
             </a:r>
             <a:r>
-              <a:rPr sz="1450" b="0" i="0">
+              <a:rPr sz="1800" b="0" i="0">
                 <a:solidFill>
                   <a:srgbClr val="2B343F"/>
                 </a:solidFill>
@@ -20578,7 +20643,7 @@
               <a:t> — after each turn (cadence-gated), Honcho derives insights; optional </a:t>
             </a:r>
             <a:r>
-              <a:rPr sz="1450" b="1" i="0">
+              <a:rPr sz="1800" b="1" i="0">
                 <a:solidFill>
                   <a:srgbClr val="2B343F"/>
                 </a:solidFill>
@@ -20587,7 +20652,7 @@
               <a:t>multi-pass depth (1–3): assess → self-audit → reconcile</a:t>
             </a:r>
             <a:r>
-              <a:rPr sz="1450" b="0" i="0">
+              <a:rPr sz="1800" b="0" i="0">
                 <a:solidFill>
                   <a:srgbClr val="2B343F"/>
                 </a:solidFill>
@@ -20609,9 +20674,10 @@
               </a:buClr>
               <a:buFont typeface="Arial"/>
               <a:buChar char="▪"/>
-            </a:pPr>
-            <a:r>
-              <a:rPr sz="1450" b="1" i="0">
+              <a:defRPr/>
+            </a:pPr>
+            <a:r>
+              <a:rPr sz="1800" b="1" i="0">
                 <a:solidFill>
                   <a:srgbClr val="2B343F"/>
                 </a:solidFill>
@@ -20620,7 +20686,7 @@
               <a:t>Two-layer context injection</a:t>
             </a:r>
             <a:r>
-              <a:rPr sz="1450" b="0" i="0">
+              <a:rPr sz="1800" b="0" i="0">
                 <a:solidFill>
                   <a:srgbClr val="2B343F"/>
                 </a:solidFill>
@@ -20642,9 +20708,10 @@
               </a:buClr>
               <a:buFont typeface="Arial"/>
               <a:buChar char="▪"/>
-            </a:pPr>
-            <a:r>
-              <a:rPr sz="1450" b="1" i="0">
+              <a:defRPr/>
+            </a:pPr>
+            <a:r>
+              <a:rPr sz="1800" b="1" i="0">
                 <a:solidFill>
                   <a:srgbClr val="2B343F"/>
                 </a:solidFill>
@@ -20653,7 +20720,7 @@
               <a:t>Multi-agent isolation</a:t>
             </a:r>
             <a:r>
-              <a:rPr sz="1450" b="0" i="0">
+              <a:rPr sz="1800" b="0" i="0">
                 <a:solidFill>
                   <a:srgbClr val="2B343F"/>
                 </a:solidFill>
@@ -20662,7 +20729,7 @@
               <a:t> — per-peer profiles: your coding assistant and your personal assistant each see only their own observations — </a:t>
             </a:r>
             <a:r>
-              <a:rPr sz="1450" b="1" i="0">
+              <a:rPr sz="1800" b="1" i="0">
                 <a:solidFill>
                   <a:srgbClr val="2B343F"/>
                 </a:solidFill>
@@ -20684,9 +20751,10 @@
               </a:buClr>
               <a:buFont typeface="Arial"/>
               <a:buChar char="▪"/>
-            </a:pPr>
-            <a:r>
-              <a:rPr sz="1450" b="1" i="0">
+              <a:defRPr/>
+            </a:pPr>
+            <a:r>
+              <a:rPr sz="1800" b="1" i="0">
                 <a:solidFill>
                   <a:srgbClr val="2B343F"/>
                 </a:solidFill>
@@ -20695,7 +20763,7 @@
               <a:t>One of 8 memory providers</a:t>
             </a:r>
             <a:r>
-              <a:rPr sz="1450" b="0" i="0">
+              <a:rPr sz="1800" b="0" i="0">
                 <a:solidFill>
                   <a:srgbClr val="2B343F"/>
                 </a:solidFill>
@@ -20704,7 +20772,7 @@
               <a:t> — Honcho, Mem0, Hindsight, Supermemory, OpenViking, RetainDB, ByteRover, Holographic — all run </a:t>
             </a:r>
             <a:r>
-              <a:rPr sz="1450" b="1" i="0">
+              <a:rPr sz="1800" b="1" i="0">
                 <a:solidFill>
                   <a:srgbClr val="2B343F"/>
                 </a:solidFill>
@@ -20713,7 +20781,7 @@
               <a:t>alongside</a:t>
             </a:r>
             <a:r>
-              <a:rPr sz="1450" b="0" i="0">
+              <a:rPr sz="1800" b="0" i="0">
                 <a:solidFill>
                   <a:srgbClr val="2B343F"/>
                 </a:solidFill>
@@ -20754,6 +20822,7 @@
                 <a:spcPts val="600"/>
               </a:spcAft>
               <a:buNone/>
+              <a:defRPr/>
             </a:pPr>
             <a:r>
               <a:rPr sz="1200" b="1" i="0">
@@ -20797,6 +20866,7 @@
                 <a:spcPts val="600"/>
               </a:spcAft>
               <a:buNone/>
+              <a:defRPr/>
             </a:pPr>
             <a:r>
               <a:rPr sz="900" b="0" i="0">
@@ -20840,6 +20910,7 @@
                 <a:spcPts val="600"/>
               </a:spcAft>
               <a:buNone/>
+              <a:defRPr/>
             </a:pPr>
             <a:r>
               <a:rPr sz="900" b="0" i="0">
@@ -20899,6 +20970,7 @@
                 <a:spcPts val="600"/>
               </a:spcAft>
               <a:buNone/>
+              <a:defRPr/>
             </a:pPr>
             <a:r>
               <a:rPr sz="3000" b="1" i="0">
@@ -20944,9 +21016,10 @@
               </a:buClr>
               <a:buFont typeface="Arial"/>
               <a:buChar char="▪"/>
-            </a:pPr>
-            <a:r>
-              <a:rPr sz="1450" b="1" i="0">
+              <a:defRPr/>
+            </a:pPr>
+            <a:r>
+              <a:rPr sz="1800" b="1" i="0">
                 <a:solidFill>
                   <a:srgbClr val="2B343F"/>
                 </a:solidFill>
@@ -20955,7 +21028,7 @@
               <a:t>Drop-in extensibility</a:t>
             </a:r>
             <a:r>
-              <a:rPr sz="1450" b="0" i="0">
+              <a:rPr sz="1800" b="0" i="0">
                 <a:solidFill>
                   <a:srgbClr val="2B343F"/>
                 </a:solidFill>
@@ -20977,9 +21050,10 @@
               </a:buClr>
               <a:buFont typeface="Arial"/>
               <a:buChar char="▪"/>
-            </a:pPr>
-            <a:r>
-              <a:rPr sz="1450" b="1" i="0">
+              <a:defRPr/>
+            </a:pPr>
+            <a:r>
+              <a:rPr sz="1800" b="1" i="0">
                 <a:solidFill>
                   <a:srgbClr val="2B343F"/>
                 </a:solidFill>
@@ -20988,7 +21062,7 @@
               <a:t>Wide surface</a:t>
             </a:r>
             <a:r>
-              <a:rPr sz="1450" b="0" i="0">
+              <a:rPr sz="1800" b="0" i="0">
                 <a:solidFill>
                   <a:srgbClr val="2B343F"/>
                 </a:solidFill>
@@ -20997,7 +21071,7 @@
               <a:t> — tools, </a:t>
             </a:r>
             <a:r>
-              <a:rPr sz="1450" b="1" i="0">
+              <a:rPr sz="1800" b="1" i="0">
                 <a:solidFill>
                   <a:srgbClr val="2B343F"/>
                 </a:solidFill>
@@ -21006,7 +21080,7 @@
               <a:t>27 lifecycle hooks</a:t>
             </a:r>
             <a:r>
-              <a:rPr sz="1450" b="0" i="0">
+              <a:rPr sz="1800" b="0" i="0">
                 <a:solidFill>
                   <a:srgbClr val="2B343F"/>
                 </a:solidFill>
@@ -21015,7 +21089,7 @@
               <a:t> (pre/post tool call, kanban events…), slash + CLI commands, bundled skills, gateway platforms, </a:t>
             </a:r>
             <a:r>
-              <a:rPr sz="1450" b="1" i="0">
+              <a:rPr sz="1800" b="1" i="0">
                 <a:solidFill>
                   <a:srgbClr val="2B343F"/>
                 </a:solidFill>
@@ -21024,7 +21098,7 @@
               <a:t>image-gen &amp; video-gen backends</a:t>
             </a:r>
             <a:r>
-              <a:rPr sz="1450" b="0" i="0">
+              <a:rPr sz="1800" b="0" i="0">
                 <a:solidFill>
                   <a:srgbClr val="2B343F"/>
                 </a:solidFill>
@@ -21046,9 +21120,10 @@
               </a:buClr>
               <a:buFont typeface="Arial"/>
               <a:buChar char="▪"/>
-            </a:pPr>
-            <a:r>
-              <a:rPr sz="1450" b="1" i="0">
+              <a:defRPr/>
+            </a:pPr>
+            <a:r>
+              <a:rPr sz="1800" b="1" i="0">
                 <a:solidFill>
                   <a:srgbClr val="2B343F"/>
                 </a:solidFill>
@@ -21057,7 +21132,7 @@
               <a:t>Four plugin types</a:t>
             </a:r>
             <a:r>
-              <a:rPr sz="1450" b="0" i="0">
+              <a:rPr sz="1800" b="0" i="0">
                 <a:solidFill>
                   <a:srgbClr val="2B343F"/>
                 </a:solidFill>
@@ -21079,9 +21154,10 @@
               </a:buClr>
               <a:buFont typeface="Arial"/>
               <a:buChar char="▪"/>
-            </a:pPr>
-            <a:r>
-              <a:rPr sz="1450" b="1" i="0">
+              <a:defRPr/>
+            </a:pPr>
+            <a:r>
+              <a:rPr sz="1800" b="1" i="0">
                 <a:solidFill>
                   <a:srgbClr val="2B343F"/>
                 </a:solidFill>
@@ -21090,7 +21166,7 @@
               <a:t>Opt-in by default</a:t>
             </a:r>
             <a:r>
-              <a:rPr sz="1450" b="0" i="0">
+              <a:rPr sz="1800" b="0" i="0">
                 <a:solidFill>
                   <a:srgbClr val="2B343F"/>
                 </a:solidFill>
@@ -21112,9 +21188,10 @@
               </a:buClr>
               <a:buFont typeface="Arial"/>
               <a:buChar char="▪"/>
-            </a:pPr>
-            <a:r>
-              <a:rPr sz="1450" b="1" i="0">
+              <a:defRPr/>
+            </a:pPr>
+            <a:r>
+              <a:rPr sz="1800" b="1" i="0">
                 <a:solidFill>
                   <a:srgbClr val="2B343F"/>
                 </a:solidFill>
@@ -21123,7 +21200,7 @@
               <a:t>Supply-chain security</a:t>
             </a:r>
             <a:r>
-              <a:rPr sz="1450" b="0" i="0">
+              <a:rPr sz="1800" b="0" i="0">
                 <a:solidFill>
                   <a:srgbClr val="2B343F"/>
                 </a:solidFill>
@@ -21132,7 +21209,7 @@
               <a:t> — install-time static scanning (safe / caution / </a:t>
             </a:r>
             <a:r>
-              <a:rPr sz="1450" b="1" i="0">
+              <a:rPr sz="1800" b="1" i="0">
                 <a:solidFill>
                   <a:srgbClr val="2B343F"/>
                 </a:solidFill>
@@ -21141,7 +21218,7 @@
               <a:t>dangerous = blocked</a:t>
             </a:r>
             <a:r>
-              <a:rPr sz="1450" b="0" i="0">
+              <a:rPr sz="1800" b="0" i="0">
                 <a:solidFill>
                   <a:srgbClr val="2B343F"/>
                 </a:solidFill>
@@ -21150,7 +21227,7 @@
               <a:t>), SHA-pinned installs + curated catalog, </a:t>
             </a:r>
             <a:r>
-              <a:rPr sz="1450" b="1" i="0">
+              <a:rPr sz="1800" b="1" i="0">
                 <a:solidFill>
                   <a:srgbClr val="2B343F"/>
                 </a:solidFill>
@@ -21159,7 +21236,7 @@
               <a:t>capability consent</a:t>
             </a:r>
             <a:r>
-              <a:rPr sz="1450" b="0" i="0">
+              <a:rPr sz="1800" b="0" i="0">
                 <a:solidFill>
                   <a:srgbClr val="2B343F"/>
                 </a:solidFill>
@@ -21200,6 +21277,7 @@
                 <a:spcPts val="600"/>
               </a:spcAft>
               <a:buNone/>
+              <a:defRPr/>
             </a:pPr>
             <a:r>
               <a:rPr sz="1200" b="1" i="0">
@@ -21243,6 +21321,7 @@
                 <a:spcPts val="600"/>
               </a:spcAft>
               <a:buNone/>
+              <a:defRPr/>
             </a:pPr>
             <a:r>
               <a:rPr sz="900" b="0" i="0">
@@ -21286,6 +21365,7 @@
                 <a:spcPts val="600"/>
               </a:spcAft>
               <a:buNone/>
+              <a:defRPr/>
             </a:pPr>
             <a:r>
               <a:rPr sz="900" b="0" i="0">
@@ -21340,6 +21420,7 @@
                 <a:spcPts val="600"/>
               </a:spcAft>
               <a:buNone/>
+              <a:defRPr/>
             </a:pPr>
             <a:r>
               <a:rPr sz="4000" b="1" i="0">
@@ -21376,9 +21457,10 @@
                 <a:spcPts val="600"/>
               </a:spcAft>
               <a:buNone/>
-            </a:pPr>
-            <a:r>
-              <a:rPr sz="1700" b="0" i="0">
+              <a:defRPr/>
+            </a:pPr>
+            <a:r>
+              <a:rPr sz="1800" b="0" i="0">
                 <a:solidFill>
                   <a:srgbClr val="E8EEF5"/>
                 </a:solidFill>
@@ -21419,9 +21501,10 @@
                 <a:spcPts val="600"/>
               </a:spcAft>
               <a:buNone/>
-            </a:pPr>
-            <a:r>
-              <a:rPr sz="1500" b="1" i="0">
+              <a:defRPr/>
+            </a:pPr>
+            <a:r>
+              <a:rPr sz="1800" b="1" i="0">
                 <a:solidFill>
                   <a:srgbClr val="FFFFFF"/>
                 </a:solidFill>
@@ -21473,9 +21556,10 @@
                 <a:spcPts val="1000"/>
               </a:spcAft>
               <a:buNone/>
-            </a:pPr>
-            <a:r>
-              <a:rPr sz="1550" b="1" i="0">
+              <a:defRPr/>
+            </a:pPr>
+            <a:r>
+              <a:rPr sz="1800" b="1" i="0">
                 <a:solidFill>
                   <a:srgbClr val="004282"/>
                 </a:solidFill>
@@ -21497,9 +21581,10 @@
               </a:buClr>
               <a:buFont typeface="Arial"/>
               <a:buChar char="▪"/>
-            </a:pPr>
-            <a:r>
-              <a:rPr sz="1400" b="1" i="0">
+              <a:defRPr/>
+            </a:pPr>
+            <a:r>
+              <a:rPr sz="1800" b="1" i="0">
                 <a:solidFill>
                   <a:srgbClr val="2B343F"/>
                 </a:solidFill>
@@ -21508,7 +21593,7 @@
               <a:t>Memory</a:t>
             </a:r>
             <a:r>
-              <a:rPr sz="1400" b="0" i="0">
+              <a:rPr sz="1800" b="0" i="0">
                 <a:solidFill>
                   <a:srgbClr val="2B343F"/>
                 </a:solidFill>
@@ -21530,9 +21615,10 @@
               </a:buClr>
               <a:buFont typeface="Arial"/>
               <a:buChar char="▪"/>
-            </a:pPr>
-            <a:r>
-              <a:rPr sz="1400" b="1" i="0">
+              <a:defRPr/>
+            </a:pPr>
+            <a:r>
+              <a:rPr sz="1800" b="1" i="0">
                 <a:solidFill>
                   <a:srgbClr val="2B343F"/>
                 </a:solidFill>
@@ -21541,7 +21627,7 @@
               <a:t>Quantization</a:t>
             </a:r>
             <a:r>
-              <a:rPr sz="1400" b="0" i="0">
+              <a:rPr sz="1800" b="0" i="0">
                 <a:solidFill>
                   <a:srgbClr val="2B343F"/>
                 </a:solidFill>
@@ -21563,9 +21649,10 @@
               </a:buClr>
               <a:buFont typeface="Arial"/>
               <a:buChar char="▪"/>
-            </a:pPr>
-            <a:r>
-              <a:rPr sz="1400" b="1" i="0">
+              <a:defRPr/>
+            </a:pPr>
+            <a:r>
+              <a:rPr sz="1800" b="1" i="0">
                 <a:solidFill>
                   <a:srgbClr val="2B343F"/>
                 </a:solidFill>
@@ -21574,7 +21661,7 @@
               <a:t>Latency</a:t>
             </a:r>
             <a:r>
-              <a:rPr sz="1400" b="0" i="0">
+              <a:rPr sz="1800" b="0" i="0">
                 <a:solidFill>
                   <a:srgbClr val="2B343F"/>
                 </a:solidFill>
@@ -21596,9 +21683,10 @@
               </a:buClr>
               <a:buFont typeface="Arial"/>
               <a:buChar char="▪"/>
-            </a:pPr>
-            <a:r>
-              <a:rPr sz="1400" b="1" i="0">
+              <a:defRPr/>
+            </a:pPr>
+            <a:r>
+              <a:rPr sz="1800" b="1" i="0">
                 <a:solidFill>
                   <a:srgbClr val="2B343F"/>
                 </a:solidFill>
@@ -21607,7 +21695,7 @@
               <a:t>Demo:</a:t>
             </a:r>
             <a:r>
-              <a:rPr sz="1400" b="0" i="0">
+              <a:rPr sz="1800" b="0" i="0">
                 <a:solidFill>
                   <a:srgbClr val="2B343F"/>
                 </a:solidFill>
@@ -21641,9 +21729,10 @@
                 <a:spcPts val="1000"/>
               </a:spcAft>
               <a:buNone/>
-            </a:pPr>
-            <a:r>
-              <a:rPr sz="1550" b="1" i="0">
+              <a:defRPr/>
+            </a:pPr>
+            <a:r>
+              <a:rPr sz="1800" b="1" i="0">
                 <a:solidFill>
                   <a:srgbClr val="F99D1F"/>
                 </a:solidFill>
@@ -21665,9 +21754,10 @@
               </a:buClr>
               <a:buFont typeface="Arial"/>
               <a:buChar char="▪"/>
-            </a:pPr>
-            <a:r>
-              <a:rPr sz="1400" b="1" i="0">
+              <a:defRPr/>
+            </a:pPr>
+            <a:r>
+              <a:rPr sz="1800" b="1" i="0">
                 <a:solidFill>
                   <a:srgbClr val="2B343F"/>
                 </a:solidFill>
@@ -21676,7 +21766,7 @@
               <a:t>Edge wins:</a:t>
             </a:r>
             <a:r>
-              <a:rPr sz="1400" b="0" i="0">
+              <a:rPr sz="1800" b="0" i="0">
                 <a:solidFill>
                   <a:srgbClr val="2B343F"/>
                 </a:solidFill>
@@ -21698,9 +21788,10 @@
               </a:buClr>
               <a:buFont typeface="Arial"/>
               <a:buChar char="▪"/>
-            </a:pPr>
-            <a:r>
-              <a:rPr sz="1400" b="1" i="0">
+              <a:defRPr/>
+            </a:pPr>
+            <a:r>
+              <a:rPr sz="1800" b="1" i="0">
                 <a:solidFill>
                   <a:srgbClr val="2B343F"/>
                 </a:solidFill>
@@ -21709,7 +21800,7 @@
               <a:t>Cloud wins:</a:t>
             </a:r>
             <a:r>
-              <a:rPr sz="1400" b="0" i="0">
+              <a:rPr sz="1800" b="0" i="0">
                 <a:solidFill>
                   <a:srgbClr val="2B343F"/>
                 </a:solidFill>
@@ -21731,9 +21822,10 @@
               </a:buClr>
               <a:buFont typeface="Arial"/>
               <a:buChar char="▪"/>
-            </a:pPr>
-            <a:r>
-              <a:rPr sz="1400" b="0" i="0">
+              <a:defRPr/>
+            </a:pPr>
+            <a:r>
+              <a:rPr sz="1800" b="0" i="0">
                 <a:solidFill>
                   <a:srgbClr val="2B343F"/>
                 </a:solidFill>
@@ -21742,7 +21834,7 @@
               <a:t>This trade-off returns in </a:t>
             </a:r>
             <a:r>
-              <a:rPr sz="1400" b="1" i="0">
+              <a:rPr sz="1800" b="1" i="0">
                 <a:solidFill>
                   <a:srgbClr val="2B343F"/>
                 </a:solidFill>
@@ -21751,7 +21843,7 @@
               <a:t>Part 6</a:t>
             </a:r>
             <a:r>
-              <a:rPr sz="1400" b="0" i="0">
+              <a:rPr sz="1800" b="0" i="0">
                 <a:solidFill>
                   <a:srgbClr val="2B343F"/>
                 </a:solidFill>
@@ -21773,9 +21865,10 @@
               </a:buClr>
               <a:buFont typeface="Arial"/>
               <a:buChar char="▪"/>
-            </a:pPr>
-            <a:r>
-              <a:rPr sz="1400" b="0" i="0">
+              <a:defRPr/>
+            </a:pPr>
+            <a:r>
+              <a:rPr sz="1800" b="0" i="0">
                 <a:solidFill>
                   <a:srgbClr val="2B343F"/>
                 </a:solidFill>
@@ -21784,7 +21877,7 @@
               <a:t>And in </a:t>
             </a:r>
             <a:r>
-              <a:rPr sz="1400" b="1" i="0">
+              <a:rPr sz="1800" b="1" i="0">
                 <a:solidFill>
                   <a:srgbClr val="2B343F"/>
                 </a:solidFill>
@@ -21793,7 +21886,7 @@
               <a:t>Part 4</a:t>
             </a:r>
             <a:r>
-              <a:rPr sz="1400" b="0" i="0">
+              <a:rPr sz="1800" b="0" i="0">
                 <a:solidFill>
                   <a:srgbClr val="2B343F"/>
                 </a:solidFill>
@@ -21832,6 +21925,7 @@
                 <a:spcPts val="600"/>
               </a:spcAft>
               <a:buNone/>
+              <a:defRPr/>
             </a:pPr>
             <a:r>
               <a:rPr sz="3000" b="1" i="0">
@@ -21875,6 +21969,7 @@
                 <a:spcPts val="600"/>
               </a:spcAft>
               <a:buNone/>
+              <a:defRPr/>
             </a:pPr>
             <a:r>
               <a:rPr sz="1200" b="1" i="0">
@@ -21918,6 +22013,7 @@
                 <a:spcPts val="600"/>
               </a:spcAft>
               <a:buNone/>
+              <a:defRPr/>
             </a:pPr>
             <a:r>
               <a:rPr sz="900" b="0" i="0">
@@ -21961,6 +22057,7 @@
                 <a:spcPts val="600"/>
               </a:spcAft>
               <a:buNone/>
+              <a:defRPr/>
             </a:pPr>
             <a:r>
               <a:rPr sz="900" b="0" i="0">
@@ -22015,6 +22112,7 @@
                 <a:spcPts val="600"/>
               </a:spcAft>
               <a:buNone/>
+              <a:defRPr/>
             </a:pPr>
             <a:r>
               <a:rPr sz="4000" b="1" i="0">
@@ -22051,9 +22149,10 @@
                 <a:spcPts val="600"/>
               </a:spcAft>
               <a:buNone/>
-            </a:pPr>
-            <a:r>
-              <a:rPr sz="1700" b="0" i="0">
+              <a:defRPr/>
+            </a:pPr>
+            <a:r>
+              <a:rPr sz="1800" b="0" i="0">
                 <a:solidFill>
                   <a:srgbClr val="E8EEF5"/>
                 </a:solidFill>
@@ -22094,9 +22193,10 @@
                 <a:spcPts val="600"/>
               </a:spcAft>
               <a:buNone/>
-            </a:pPr>
-            <a:r>
-              <a:rPr sz="1500" b="1" i="0">
+              <a:defRPr/>
+            </a:pPr>
+            <a:r>
+              <a:rPr sz="1800" b="1" i="0">
                 <a:solidFill>
                   <a:srgbClr val="FFFFFF"/>
                 </a:solidFill>
@@ -22153,6 +22253,7 @@
                 <a:spcPts val="600"/>
               </a:spcAft>
               <a:buNone/>
+              <a:defRPr/>
             </a:pPr>
             <a:r>
               <a:rPr sz="3000" b="1" i="0">
@@ -22196,6 +22297,7 @@
                 <a:spcPts val="600"/>
               </a:spcAft>
               <a:buNone/>
+              <a:defRPr/>
             </a:pPr>
             <a:r>
               <a:rPr sz="1200" b="1" i="0">
@@ -22239,6 +22341,7 @@
                 <a:spcPts val="600"/>
               </a:spcAft>
               <a:buNone/>
+              <a:defRPr/>
             </a:pPr>
             <a:r>
               <a:rPr sz="900" b="0" i="0">
@@ -22282,6 +22385,7 @@
                 <a:spcPts val="600"/>
               </a:spcAft>
               <a:buNone/>
+              <a:defRPr/>
             </a:pPr>
             <a:r>
               <a:rPr sz="900" b="0" i="0">
@@ -22345,9 +22449,10 @@
                 <a:spcPts val="0"/>
               </a:spcAft>
               <a:buNone/>
-            </a:pPr>
-            <a:r>
-              <a:rPr sz="1600" b="1" i="0">
+              <a:defRPr/>
+            </a:pPr>
+            <a:r>
+              <a:rPr sz="1800" b="1" i="0">
                 <a:solidFill>
                   <a:srgbClr val="1F2A36"/>
                 </a:solidFill>
@@ -22365,6 +22470,7 @@
                 <a:spcPts val="0"/>
               </a:spcAft>
               <a:buNone/>
+              <a:defRPr/>
             </a:pPr>
             <a:r>
               <a:rPr sz="1250" b="0" i="0">
@@ -22418,7 +22524,9 @@
           <a:bodyPr rtlCol="0" anchor="ctr"/>
           <a:lstStyle/>
           <a:p>
-            <a:pPr algn="ctr"/>
+            <a:pPr algn="ctr">
+              <a:defRPr/>
+            </a:pPr>
           </a:p>
         </p:txBody>
       </p:sp>
@@ -22472,9 +22580,10 @@
                 <a:spcPts val="0"/>
               </a:spcAft>
               <a:buNone/>
-            </a:pPr>
-            <a:r>
-              <a:rPr sz="1600" b="1" i="0">
+              <a:defRPr/>
+            </a:pPr>
+            <a:r>
+              <a:rPr sz="1800" b="1" i="0">
                 <a:solidFill>
                   <a:srgbClr val="FFFFFF"/>
                 </a:solidFill>
@@ -22492,6 +22601,7 @@
                 <a:spcPts val="0"/>
               </a:spcAft>
               <a:buNone/>
+              <a:defRPr/>
             </a:pPr>
             <a:r>
               <a:rPr sz="1250" b="0" i="0">
@@ -22545,7 +22655,9 @@
           <a:bodyPr rtlCol="0" anchor="ctr"/>
           <a:lstStyle/>
           <a:p>
-            <a:pPr algn="ctr"/>
+            <a:pPr algn="ctr">
+              <a:defRPr/>
+            </a:pPr>
           </a:p>
         </p:txBody>
       </p:sp>
@@ -22599,9 +22711,10 @@
                 <a:spcPts val="0"/>
               </a:spcAft>
               <a:buNone/>
-            </a:pPr>
-            <a:r>
-              <a:rPr sz="1600" b="1" i="0">
+              <a:defRPr/>
+            </a:pPr>
+            <a:r>
+              <a:rPr sz="1800" b="1" i="0">
                 <a:solidFill>
                   <a:srgbClr val="1F2A36"/>
                 </a:solidFill>
@@ -22619,6 +22732,7 @@
                 <a:spcPts val="0"/>
               </a:spcAft>
               <a:buNone/>
+              <a:defRPr/>
             </a:pPr>
             <a:r>
               <a:rPr sz="1250" b="0" i="0">
@@ -22662,9 +22776,10 @@
                 <a:spcPts val="600"/>
               </a:spcAft>
               <a:buNone/>
-            </a:pPr>
-            <a:r>
-              <a:rPr sz="1500" b="1" i="0">
+              <a:defRPr/>
+            </a:pPr>
+            <a:r>
+              <a:rPr sz="1800" b="1" i="0">
                 <a:solidFill>
                   <a:srgbClr val="2B343F"/>
                 </a:solidFill>
@@ -22673,7 +22788,7 @@
               <a:t>Day 3 (today):</a:t>
             </a:r>
             <a:r>
-              <a:rPr sz="1500" b="0" i="0">
+              <a:rPr sz="1800" b="0" i="0">
                 <a:solidFill>
                   <a:srgbClr val="2B343F"/>
                 </a:solidFill>
@@ -22682,7 +22797,7 @@
               <a:t> build </a:t>
             </a:r>
             <a:r>
-              <a:rPr sz="1500" b="1" i="0">
+              <a:rPr sz="1800" b="1" i="0">
                 <a:solidFill>
                   <a:srgbClr val="2B343F"/>
                 </a:solidFill>
@@ -22691,7 +22806,7 @@
               <a:t>MyShopper</a:t>
             </a:r>
             <a:r>
-              <a:rPr sz="1500" b="0" i="0">
+              <a:rPr sz="1800" b="0" i="0">
                 <a:solidFill>
                   <a:srgbClr val="2B343F"/>
                 </a:solidFill>
@@ -22700,7 +22815,7 @@
               <a:t>, a personal buying agent owned by the customer — it represents the </a:t>
             </a:r>
             <a:r>
-              <a:rPr sz="1500" b="1" i="0">
+              <a:rPr sz="1800" b="1" i="0">
                 <a:solidFill>
                   <a:srgbClr val="2B343F"/>
                 </a:solidFill>
@@ -22709,7 +22824,7 @@
               <a:t>customer</a:t>
             </a:r>
             <a:r>
-              <a:rPr sz="1500" b="0" i="0">
+              <a:rPr sz="1800" b="0" i="0">
                 <a:solidFill>
                   <a:srgbClr val="2B343F"/>
                 </a:solidFill>
@@ -22770,9 +22885,10 @@
                 <a:spcPts val="0"/>
               </a:spcAft>
               <a:buNone/>
-            </a:pPr>
-            <a:r>
-              <a:rPr sz="1450" b="1" i="0">
+              <a:defRPr/>
+            </a:pPr>
+            <a:r>
+              <a:rPr sz="1800" b="1" i="0">
                 <a:solidFill>
                   <a:srgbClr val="1F2A36"/>
                 </a:solidFill>
@@ -22813,9 +22929,10 @@
                 <a:spcPts val="600"/>
               </a:spcAft>
               <a:buNone/>
-            </a:pPr>
-            <a:r>
-              <a:rPr sz="1350" b="0" i="0">
+              <a:defRPr/>
+            </a:pPr>
+            <a:r>
+              <a:rPr sz="1800" b="0" i="0">
                 <a:solidFill>
                   <a:srgbClr val="2B343F"/>
                 </a:solidFill>
@@ -22866,7 +22983,9 @@
           <a:bodyPr rtlCol="0" anchor="ctr"/>
           <a:lstStyle/>
           <a:p>
-            <a:pPr algn="ctr"/>
+            <a:pPr algn="ctr">
+              <a:defRPr/>
+            </a:pPr>
           </a:p>
         </p:txBody>
       </p:sp>
@@ -22920,9 +23039,10 @@
                 <a:spcPts val="0"/>
               </a:spcAft>
               <a:buNone/>
-            </a:pPr>
-            <a:r>
-              <a:rPr sz="1450" b="1" i="0">
+              <a:defRPr/>
+            </a:pPr>
+            <a:r>
+              <a:rPr sz="1800" b="1" i="0">
                 <a:solidFill>
                   <a:srgbClr val="FFFFFF"/>
                 </a:solidFill>
@@ -22963,9 +23083,10 @@
                 <a:spcPts val="600"/>
               </a:spcAft>
               <a:buNone/>
-            </a:pPr>
-            <a:r>
-              <a:rPr sz="1350" b="0" i="0">
+              <a:defRPr/>
+            </a:pPr>
+            <a:r>
+              <a:rPr sz="1800" b="0" i="0">
                 <a:solidFill>
                   <a:srgbClr val="2B343F"/>
                 </a:solidFill>
@@ -23016,7 +23137,9 @@
           <a:bodyPr rtlCol="0" anchor="ctr"/>
           <a:lstStyle/>
           <a:p>
-            <a:pPr algn="ctr"/>
+            <a:pPr algn="ctr">
+              <a:defRPr/>
+            </a:pPr>
           </a:p>
         </p:txBody>
       </p:sp>
@@ -23070,9 +23193,10 @@
                 <a:spcPts val="0"/>
               </a:spcAft>
               <a:buNone/>
-            </a:pPr>
-            <a:r>
-              <a:rPr sz="1450" b="1" i="0">
+              <a:defRPr/>
+            </a:pPr>
+            <a:r>
+              <a:rPr sz="1800" b="1" i="0">
                 <a:solidFill>
                   <a:srgbClr val="1F2A36"/>
                 </a:solidFill>
@@ -23113,9 +23237,10 @@
                 <a:spcPts val="600"/>
               </a:spcAft>
               <a:buNone/>
-            </a:pPr>
-            <a:r>
-              <a:rPr sz="1350" b="0" i="0">
+              <a:defRPr/>
+            </a:pPr>
+            <a:r>
+              <a:rPr sz="1800" b="0" i="0">
                 <a:solidFill>
                   <a:srgbClr val="2B343F"/>
                 </a:solidFill>
@@ -23172,6 +23297,7 @@
                 <a:spcPts val="600"/>
               </a:spcAft>
               <a:buNone/>
+              <a:defRPr/>
             </a:pPr>
             <a:r>
               <a:rPr sz="3000" b="1" i="0">
@@ -23217,9 +23343,10 @@
               </a:buClr>
               <a:buFont typeface="Arial"/>
               <a:buChar char="▪"/>
-            </a:pPr>
-            <a:r>
-              <a:rPr sz="1750" b="1" i="0">
+              <a:defRPr/>
+            </a:pPr>
+            <a:r>
+              <a:rPr sz="1800" b="1" i="0">
                 <a:solidFill>
                   <a:srgbClr val="2B343F"/>
                 </a:solidFill>
@@ -23228,7 +23355,7 @@
               <a:t>Liveness</a:t>
             </a:r>
             <a:r>
-              <a:rPr sz="1750" b="0" i="0">
+              <a:rPr sz="1800" b="0" i="0">
                 <a:solidFill>
                   <a:srgbClr val="2B343F"/>
                 </a:solidFill>
@@ -23250,9 +23377,10 @@
               </a:buClr>
               <a:buFont typeface="Arial"/>
               <a:buChar char="▪"/>
-            </a:pPr>
-            <a:r>
-              <a:rPr sz="1750" b="1" i="0">
+              <a:defRPr/>
+            </a:pPr>
+            <a:r>
+              <a:rPr sz="1800" b="1" i="0">
                 <a:solidFill>
                   <a:srgbClr val="2B343F"/>
                 </a:solidFill>
@@ -23261,7 +23389,7 @@
               <a:t>Readiness</a:t>
             </a:r>
             <a:r>
-              <a:rPr sz="1750" b="0" i="0">
+              <a:rPr sz="1800" b="0" i="0">
                 <a:solidFill>
                   <a:srgbClr val="2B343F"/>
                 </a:solidFill>
@@ -23283,9 +23411,10 @@
               </a:buClr>
               <a:buFont typeface="Arial"/>
               <a:buChar char="▪"/>
-            </a:pPr>
-            <a:r>
-              <a:rPr sz="1750" b="1" i="0">
+              <a:defRPr/>
+            </a:pPr>
+            <a:r>
+              <a:rPr sz="1800" b="1" i="0">
                 <a:solidFill>
                   <a:srgbClr val="2B343F"/>
                 </a:solidFill>
@@ -23294,7 +23423,7 @@
               <a:t>Health</a:t>
             </a:r>
             <a:r>
-              <a:rPr sz="1750" b="0" i="0">
+              <a:rPr sz="1800" b="0" i="0">
                 <a:solidFill>
                   <a:srgbClr val="2B343F"/>
                 </a:solidFill>
@@ -23315,9 +23444,10 @@
                 <a:spcPts val="800"/>
               </a:spcAft>
               <a:buNone/>
-            </a:pPr>
-            <a:r>
-              <a:rPr sz="1450" b="0" i="1">
+              <a:defRPr/>
+            </a:pPr>
+            <a:r>
+              <a:rPr sz="1800" b="0" i="1">
                 <a:solidFill>
                   <a:srgbClr val="7B8898"/>
                 </a:solidFill>
@@ -23358,6 +23488,7 @@
                 <a:spcPts val="600"/>
               </a:spcAft>
               <a:buNone/>
+              <a:defRPr/>
             </a:pPr>
             <a:r>
               <a:rPr sz="1200" b="1" i="0">
@@ -23401,6 +23532,7 @@
                 <a:spcPts val="600"/>
               </a:spcAft>
               <a:buNone/>
+              <a:defRPr/>
             </a:pPr>
             <a:r>
               <a:rPr sz="900" b="0" i="0">
@@ -23444,6 +23576,7 @@
                 <a:spcPts val="600"/>
               </a:spcAft>
               <a:buNone/>
+              <a:defRPr/>
             </a:pPr>
             <a:r>
               <a:rPr sz="900" b="0" i="0">
@@ -23498,9 +23631,10 @@
                 <a:spcPts val="1000"/>
               </a:spcAft>
               <a:buNone/>
-            </a:pPr>
-            <a:r>
-              <a:rPr sz="1550" b="1" i="0">
+              <a:defRPr/>
+            </a:pPr>
+            <a:r>
+              <a:rPr sz="1800" b="1" i="0">
                 <a:solidFill>
                   <a:srgbClr val="004282"/>
                 </a:solidFill>
@@ -23522,9 +23656,10 @@
               </a:buClr>
               <a:buFont typeface="Arial"/>
               <a:buChar char="▪"/>
-            </a:pPr>
-            <a:r>
-              <a:rPr sz="1400" b="0" i="0">
+              <a:defRPr/>
+            </a:pPr>
+            <a:r>
+              <a:rPr sz="1800" b="0" i="0">
                 <a:solidFill>
                   <a:srgbClr val="2B343F"/>
                 </a:solidFill>
@@ -23546,9 +23681,10 @@
               </a:buClr>
               <a:buFont typeface="Arial"/>
               <a:buChar char="▪"/>
-            </a:pPr>
-            <a:r>
-              <a:rPr sz="1400" b="1" i="0">
+              <a:defRPr/>
+            </a:pPr>
+            <a:r>
+              <a:rPr sz="1800" b="1" i="0">
                 <a:solidFill>
                   <a:srgbClr val="2B343F"/>
                 </a:solidFill>
@@ -23557,7 +23693,7 @@
               <a:t>+</a:t>
             </a:r>
             <a:r>
-              <a:rPr sz="1400" b="0" i="0">
+              <a:rPr sz="1800" b="0" i="0">
                 <a:solidFill>
                   <a:srgbClr val="2B343F"/>
                 </a:solidFill>
@@ -23579,9 +23715,10 @@
               </a:buClr>
               <a:buFont typeface="Arial"/>
               <a:buChar char="▪"/>
-            </a:pPr>
-            <a:r>
-              <a:rPr sz="1400" b="1" i="0">
+              <a:defRPr/>
+            </a:pPr>
+            <a:r>
+              <a:rPr sz="1800" b="1" i="0">
                 <a:solidFill>
                   <a:srgbClr val="2B343F"/>
                 </a:solidFill>
@@ -23590,7 +23727,7 @@
               <a:t>−</a:t>
             </a:r>
             <a:r>
-              <a:rPr sz="1400" b="0" i="0">
+              <a:rPr sz="1800" b="0" i="0">
                 <a:solidFill>
                   <a:srgbClr val="2B343F"/>
                 </a:solidFill>
@@ -23624,9 +23761,10 @@
                 <a:spcPts val="1000"/>
               </a:spcAft>
               <a:buNone/>
-            </a:pPr>
-            <a:r>
-              <a:rPr sz="1550" b="1" i="0">
+              <a:defRPr/>
+            </a:pPr>
+            <a:r>
+              <a:rPr sz="1800" b="1" i="0">
                 <a:solidFill>
                   <a:srgbClr val="F99D1F"/>
                 </a:solidFill>
@@ -23648,9 +23786,10 @@
               </a:buClr>
               <a:buFont typeface="Arial"/>
               <a:buChar char="▪"/>
-            </a:pPr>
-            <a:r>
-              <a:rPr sz="1400" b="0" i="0">
+              <a:defRPr/>
+            </a:pPr>
+            <a:r>
+              <a:rPr sz="1800" b="0" i="0">
                 <a:solidFill>
                   <a:srgbClr val="2B343F"/>
                 </a:solidFill>
@@ -23672,9 +23811,10 @@
               </a:buClr>
               <a:buFont typeface="Arial"/>
               <a:buChar char="▪"/>
-            </a:pPr>
-            <a:r>
-              <a:rPr sz="1400" b="1" i="0">
+              <a:defRPr/>
+            </a:pPr>
+            <a:r>
+              <a:rPr sz="1800" b="1" i="0">
                 <a:solidFill>
                   <a:srgbClr val="2B343F"/>
                 </a:solidFill>
@@ -23683,7 +23823,7 @@
               <a:t>+</a:t>
             </a:r>
             <a:r>
-              <a:rPr sz="1400" b="0" i="0">
+              <a:rPr sz="1800" b="0" i="0">
                 <a:solidFill>
                   <a:srgbClr val="2B343F"/>
                 </a:solidFill>
@@ -23705,9 +23845,10 @@
               </a:buClr>
               <a:buFont typeface="Arial"/>
               <a:buChar char="▪"/>
-            </a:pPr>
-            <a:r>
-              <a:rPr sz="1400" b="1" i="0">
+              <a:defRPr/>
+            </a:pPr>
+            <a:r>
+              <a:rPr sz="1800" b="1" i="0">
                 <a:solidFill>
                   <a:srgbClr val="2B343F"/>
                 </a:solidFill>
@@ -23716,7 +23857,7 @@
               <a:t>−</a:t>
             </a:r>
             <a:r>
-              <a:rPr sz="1400" b="0" i="0">
+              <a:rPr sz="1800" b="0" i="0">
                 <a:solidFill>
                   <a:srgbClr val="2B343F"/>
                 </a:solidFill>
@@ -23755,6 +23896,7 @@
                 <a:spcPts val="600"/>
               </a:spcAft>
               <a:buNone/>
+              <a:defRPr/>
             </a:pPr>
             <a:r>
               <a:rPr sz="3000" b="1" i="0">
@@ -23798,6 +23940,7 @@
                 <a:spcPts val="600"/>
               </a:spcAft>
               <a:buNone/>
+              <a:defRPr/>
             </a:pPr>
             <a:r>
               <a:rPr sz="1200" b="1" i="0">
@@ -23841,6 +23984,7 @@
                 <a:spcPts val="600"/>
               </a:spcAft>
               <a:buNone/>
+              <a:defRPr/>
             </a:pPr>
             <a:r>
               <a:rPr sz="900" b="0" i="0">
@@ -23884,6 +24028,7 @@
                 <a:spcPts val="600"/>
               </a:spcAft>
               <a:buNone/>
+              <a:defRPr/>
             </a:pPr>
             <a:r>
               <a:rPr sz="900" b="0" i="0">
@@ -23943,6 +24088,7 @@
                 <a:spcPts val="600"/>
               </a:spcAft>
               <a:buNone/>
+              <a:defRPr/>
             </a:pPr>
             <a:r>
               <a:rPr sz="3000" b="1" i="0">
@@ -23988,9 +24134,10 @@
               </a:buClr>
               <a:buFont typeface="Arial"/>
               <a:buChar char="▪"/>
-            </a:pPr>
-            <a:r>
-              <a:rPr sz="1650" b="1" i="0">
+              <a:defRPr/>
+            </a:pPr>
+            <a:r>
+              <a:rPr sz="1800" b="1" i="0">
                 <a:solidFill>
                   <a:srgbClr val="2B343F"/>
                 </a:solidFill>
@@ -23999,7 +24146,7 @@
               <a:t>Too frequent</a:t>
             </a:r>
             <a:r>
-              <a:rPr sz="1650" b="0" i="0">
+              <a:rPr sz="1800" b="0" i="0">
                 <a:solidFill>
                   <a:srgbClr val="2B343F"/>
                 </a:solidFill>
@@ -24021,9 +24168,10 @@
               </a:buClr>
               <a:buFont typeface="Arial"/>
               <a:buChar char="▪"/>
-            </a:pPr>
-            <a:r>
-              <a:rPr sz="1650" b="1" i="0">
+              <a:defRPr/>
+            </a:pPr>
+            <a:r>
+              <a:rPr sz="1800" b="1" i="0">
                 <a:solidFill>
                   <a:srgbClr val="2B343F"/>
                 </a:solidFill>
@@ -24032,7 +24180,7 @@
               <a:t>Too infrequent</a:t>
             </a:r>
             <a:r>
-              <a:rPr sz="1650" b="0" i="0">
+              <a:rPr sz="1800" b="0" i="0">
                 <a:solidFill>
                   <a:srgbClr val="2B343F"/>
                 </a:solidFill>
@@ -24057,9 +24205,10 @@
               </a:buClr>
               <a:buFont typeface="Arial"/>
               <a:buChar char="▪"/>
-            </a:pPr>
-            <a:r>
-              <a:rPr sz="1700" b="1" i="0">
+              <a:defRPr/>
+            </a:pPr>
+            <a:r>
+              <a:rPr sz="1800" b="1" i="0">
                 <a:solidFill>
                   <a:srgbClr val="004282"/>
                 </a:solidFill>
@@ -24068,7 +24217,7 @@
               <a:t>Rule of thumb: TTL ≈ 2–3× the heartbeat interval</a:t>
             </a:r>
             <a:r>
-              <a:rPr sz="1700" b="0" i="0">
+              <a:rPr sz="1800" b="0" i="0">
                 <a:solidFill>
                   <a:srgbClr val="004282"/>
                 </a:solidFill>
@@ -24090,9 +24239,10 @@
               </a:buClr>
               <a:buFont typeface="Arial"/>
               <a:buChar char="–"/>
-            </a:pPr>
-            <a:r>
-              <a:rPr sz="1600" b="0" i="0">
+              <a:defRPr/>
+            </a:pPr>
+            <a:r>
+              <a:rPr sz="1800" b="0" i="0">
                 <a:solidFill>
                   <a:srgbClr val="2B343F"/>
                 </a:solidFill>
@@ -24114,9 +24264,10 @@
               </a:buClr>
               <a:buFont typeface="Arial"/>
               <a:buChar char="–"/>
-            </a:pPr>
-            <a:r>
-              <a:rPr sz="1600" b="0" i="0">
+              <a:defRPr/>
+            </a:pPr>
+            <a:r>
+              <a:rPr sz="1800" b="0" i="0">
                 <a:solidFill>
                   <a:srgbClr val="2B343F"/>
                 </a:solidFill>
@@ -24157,6 +24308,7 @@
                 <a:spcPts val="600"/>
               </a:spcAft>
               <a:buNone/>
+              <a:defRPr/>
             </a:pPr>
             <a:r>
               <a:rPr sz="1200" b="1" i="0">
@@ -24200,6 +24352,7 @@
                 <a:spcPts val="600"/>
               </a:spcAft>
               <a:buNone/>
+              <a:defRPr/>
             </a:pPr>
             <a:r>
               <a:rPr sz="900" b="0" i="0">
@@ -24243,6 +24396,7 @@
                 <a:spcPts val="600"/>
               </a:spcAft>
               <a:buNone/>
+              <a:defRPr/>
             </a:pPr>
             <a:r>
               <a:rPr sz="900" b="0" i="0">
@@ -24302,6 +24456,7 @@
                 <a:spcPts val="600"/>
               </a:spcAft>
               <a:buNone/>
+              <a:defRPr/>
             </a:pPr>
             <a:r>
               <a:rPr sz="3000" b="1" i="0">
@@ -24347,9 +24502,10 @@
               </a:buClr>
               <a:buFont typeface="Arial"/>
               <a:buChar char="▪"/>
-            </a:pPr>
-            <a:r>
-              <a:rPr sz="1600" b="1" i="0">
+              <a:defRPr/>
+            </a:pPr>
+            <a:r>
+              <a:rPr sz="1800" b="1" i="0">
                 <a:solidFill>
                   <a:srgbClr val="2B343F"/>
                 </a:solidFill>
@@ -24358,7 +24514,7 @@
               <a:t>Transport:</a:t>
             </a:r>
             <a:r>
-              <a:rPr sz="1600" b="0" i="0">
+              <a:rPr sz="1800" b="0" i="0">
                 <a:solidFill>
                   <a:srgbClr val="2B343F"/>
                 </a:solidFill>
@@ -24367,7 +24523,7 @@
               <a:t> dedicated Redis Stream per agent, or a </a:t>
             </a:r>
             <a:r>
-              <a:rPr sz="1600" b="1" i="0">
+              <a:rPr sz="1800" b="1" i="0">
                 <a:solidFill>
                   <a:srgbClr val="2B343F"/>
                 </a:solidFill>
@@ -24376,7 +24532,7 @@
               <a:t>TTL'd key per agent</a:t>
             </a:r>
             <a:r>
-              <a:rPr sz="1600" b="0" i="0">
+              <a:rPr sz="1800" b="0" i="0">
                 <a:solidFill>
                   <a:srgbClr val="2B343F"/>
                 </a:solidFill>
@@ -24398,9 +24554,10 @@
               </a:buClr>
               <a:buFont typeface="Arial"/>
               <a:buChar char="▪"/>
-            </a:pPr>
-            <a:r>
-              <a:rPr sz="1600" b="1" i="0">
+              <a:defRPr/>
+            </a:pPr>
+            <a:r>
+              <a:rPr sz="1800" b="1" i="0">
                 <a:solidFill>
                   <a:srgbClr val="2B343F"/>
                 </a:solidFill>
@@ -24409,7 +24566,7 @@
               <a:t>Detection loop (orchestrator side):</a:t>
             </a:r>
             <a:r>
-              <a:rPr sz="1600" b="0" i="0">
+              <a:rPr sz="1800" b="0" i="0">
                 <a:solidFill>
                   <a:srgbClr val="2B343F"/>
                 </a:solidFill>
@@ -24434,9 +24591,10 @@
               </a:buClr>
               <a:buFont typeface="Arial"/>
               <a:buChar char="▪"/>
-            </a:pPr>
-            <a:r>
-              <a:rPr sz="1600" b="1" i="0">
+              <a:defRPr/>
+            </a:pPr>
+            <a:r>
+              <a:rPr sz="1800" b="1" i="0">
                 <a:solidFill>
                   <a:srgbClr val="2B343F"/>
                 </a:solidFill>
@@ -24458,9 +24616,10 @@
               </a:buClr>
               <a:buFont typeface="Arial"/>
               <a:buChar char="–"/>
-            </a:pPr>
-            <a:r>
-              <a:rPr sz="1600" b="0" i="0">
+              <a:defRPr/>
+            </a:pPr>
+            <a:r>
+              <a:rPr sz="1800" b="0" i="0">
                 <a:solidFill>
                   <a:srgbClr val="2B343F"/>
                 </a:solidFill>
@@ -24469,7 +24628,7 @@
               <a:t>Require </a:t>
             </a:r>
             <a:r>
-              <a:rPr sz="1600" b="1" i="0">
+              <a:rPr sz="1800" b="1" i="0">
                 <a:solidFill>
                   <a:srgbClr val="2B343F"/>
                 </a:solidFill>
@@ -24478,7 +24637,7 @@
               <a:t>N consecutive misses</a:t>
             </a:r>
             <a:r>
-              <a:rPr sz="1600" b="0" i="0">
+              <a:rPr sz="1800" b="0" i="0">
                 <a:solidFill>
                   <a:srgbClr val="2B343F"/>
                 </a:solidFill>
@@ -24500,9 +24659,10 @@
               </a:buClr>
               <a:buFont typeface="Arial"/>
               <a:buChar char="–"/>
-            </a:pPr>
-            <a:r>
-              <a:rPr sz="1600" b="0" i="0">
+              <a:defRPr/>
+            </a:pPr>
+            <a:r>
+              <a:rPr sz="1800" b="0" i="0">
                 <a:solidFill>
                   <a:srgbClr val="2B343F"/>
                 </a:solidFill>
@@ -24511,7 +24671,7 @@
               <a:t>Single-miss detection causes </a:t>
             </a:r>
             <a:r>
-              <a:rPr sz="1600" b="1" i="0">
+              <a:rPr sz="1800" b="1" i="0">
                 <a:solidFill>
                   <a:srgbClr val="2B343F"/>
                 </a:solidFill>
@@ -24520,7 +24680,7 @@
               <a:t>thrashing</a:t>
             </a:r>
             <a:r>
-              <a:rPr sz="1600" b="0" i="0">
+              <a:rPr sz="1800" b="0" i="0">
                 <a:solidFill>
                   <a:srgbClr val="2B343F"/>
                 </a:solidFill>
@@ -24561,6 +24721,7 @@
                 <a:spcPts val="600"/>
               </a:spcAft>
               <a:buNone/>
+              <a:defRPr/>
             </a:pPr>
             <a:r>
               <a:rPr sz="1200" b="1" i="0">
@@ -24604,6 +24765,7 @@
                 <a:spcPts val="600"/>
               </a:spcAft>
               <a:buNone/>
+              <a:defRPr/>
             </a:pPr>
             <a:r>
               <a:rPr sz="900" b="0" i="0">
@@ -24647,6 +24809,7 @@
                 <a:spcPts val="600"/>
               </a:spcAft>
               <a:buNone/>
+              <a:defRPr/>
             </a:pPr>
             <a:r>
               <a:rPr sz="900" b="0" i="0">
@@ -24706,6 +24869,7 @@
                 <a:spcPts val="600"/>
               </a:spcAft>
               <a:buNone/>
+              <a:defRPr/>
             </a:pPr>
             <a:r>
               <a:rPr sz="3000" b="1" i="0">
@@ -24751,9 +24915,10 @@
               </a:buClr>
               <a:buFont typeface="Arial"/>
               <a:buChar char="▪"/>
-            </a:pPr>
-            <a:r>
-              <a:rPr sz="1600" b="1" i="0">
+              <a:defRPr/>
+            </a:pPr>
+            <a:r>
+              <a:rPr sz="1800" b="1" i="0">
                 <a:solidFill>
                   <a:srgbClr val="2B343F"/>
                 </a:solidFill>
@@ -24762,7 +24927,7 @@
               <a:t>Intermittent connectivity</a:t>
             </a:r>
             <a:r>
-              <a:rPr sz="1600" b="0" i="0">
+              <a:rPr sz="1800" b="0" i="0">
                 <a:solidFill>
                   <a:srgbClr val="2B343F"/>
                 </a:solidFill>
@@ -24784,9 +24949,10 @@
               </a:buClr>
               <a:buFont typeface="Arial"/>
               <a:buChar char="▪"/>
-            </a:pPr>
-            <a:r>
-              <a:rPr sz="1600" b="1" i="0">
+              <a:defRPr/>
+            </a:pPr>
+            <a:r>
+              <a:rPr sz="1800" b="1" i="0">
                 <a:solidFill>
                   <a:srgbClr val="2B343F"/>
                 </a:solidFill>
@@ -24795,7 +24961,7 @@
               <a:t>Exponential backoff</a:t>
             </a:r>
             <a:r>
-              <a:rPr sz="1600" b="0" i="0">
+              <a:rPr sz="1800" b="0" i="0">
                 <a:solidFill>
                   <a:srgbClr val="2B343F"/>
                 </a:solidFill>
@@ -24817,9 +24983,10 @@
               </a:buClr>
               <a:buFont typeface="Arial"/>
               <a:buChar char="▪"/>
-            </a:pPr>
-            <a:r>
-              <a:rPr sz="1600" b="1" i="0">
+              <a:defRPr/>
+            </a:pPr>
+            <a:r>
+              <a:rPr sz="1800" b="1" i="0">
                 <a:solidFill>
                   <a:srgbClr val="2B343F"/>
                 </a:solidFill>
@@ -24828,7 +24995,7 @@
               <a:t>Last-known-state caching</a:t>
             </a:r>
             <a:r>
-              <a:rPr sz="1600" b="0" i="0">
+              <a:rPr sz="1800" b="0" i="0">
                 <a:solidFill>
                   <a:srgbClr val="2B343F"/>
                 </a:solidFill>
@@ -24853,9 +25020,10 @@
               </a:buClr>
               <a:buFont typeface="Arial"/>
               <a:buChar char="▪"/>
-            </a:pPr>
-            <a:r>
-              <a:rPr sz="1600" b="1" i="0">
+              <a:defRPr/>
+            </a:pPr>
+            <a:r>
+              <a:rPr sz="1800" b="1" i="0">
                 <a:solidFill>
                   <a:srgbClr val="2B343F"/>
                 </a:solidFill>
@@ -24877,9 +25045,10 @@
               </a:buClr>
               <a:buFont typeface="Arial"/>
               <a:buChar char="–"/>
-            </a:pPr>
-            <a:r>
-              <a:rPr sz="1600" b="1" i="0">
+              <a:defRPr/>
+            </a:pPr>
+            <a:r>
+              <a:rPr sz="1800" b="1" i="0">
                 <a:solidFill>
                   <a:srgbClr val="2B343F"/>
                 </a:solidFill>
@@ -24888,7 +25057,7 @@
               <a:t>Aggressive detection</a:t>
             </a:r>
             <a:r>
-              <a:rPr sz="1600" b="0" i="0">
+              <a:rPr sz="1800" b="0" i="0">
                 <a:solidFill>
                   <a:srgbClr val="2B343F"/>
                 </a:solidFill>
@@ -24910,9 +25079,10 @@
               </a:buClr>
               <a:buFont typeface="Arial"/>
               <a:buChar char="–"/>
-            </a:pPr>
-            <a:r>
-              <a:rPr sz="1600" b="1" i="0">
+              <a:defRPr/>
+            </a:pPr>
+            <a:r>
+              <a:rPr sz="1800" b="1" i="0">
                 <a:solidFill>
                   <a:srgbClr val="2B343F"/>
                 </a:solidFill>
@@ -24921,7 +25091,7 @@
               <a:t>Lenient detection</a:t>
             </a:r>
             <a:r>
-              <a:rPr sz="1600" b="0" i="0">
+              <a:rPr sz="1800" b="0" i="0">
                 <a:solidFill>
                   <a:srgbClr val="2B343F"/>
                 </a:solidFill>
@@ -24962,6 +25132,7 @@
                 <a:spcPts val="600"/>
               </a:spcAft>
               <a:buNone/>
+              <a:defRPr/>
             </a:pPr>
             <a:r>
               <a:rPr sz="1200" b="1" i="0">
@@ -25005,6 +25176,7 @@
                 <a:spcPts val="600"/>
               </a:spcAft>
               <a:buNone/>
+              <a:defRPr/>
             </a:pPr>
             <a:r>
               <a:rPr sz="900" b="0" i="0">
@@ -25048,6 +25220,7 @@
                 <a:spcPts val="600"/>
               </a:spcAft>
               <a:buNone/>
+              <a:defRPr/>
             </a:pPr>
             <a:r>
               <a:rPr sz="900" b="0" i="0">
@@ -25107,6 +25280,7 @@
                 <a:spcPts val="600"/>
               </a:spcAft>
               <a:buNone/>
+              <a:defRPr/>
             </a:pPr>
             <a:r>
               <a:rPr sz="3000" b="1" i="0">
@@ -25152,9 +25326,10 @@
               </a:buClr>
               <a:buFont typeface="Arial"/>
               <a:buChar char="▪"/>
-            </a:pPr>
-            <a:r>
-              <a:rPr sz="1600" b="1" i="0">
+              <a:defRPr/>
+            </a:pPr>
+            <a:r>
+              <a:rPr sz="1800" b="1" i="0">
                 <a:solidFill>
                   <a:srgbClr val="2B343F"/>
                 </a:solidFill>
@@ -25163,7 +25338,7 @@
               <a:t>1.</a:t>
             </a:r>
             <a:r>
-              <a:rPr sz="1600" b="0" i="0">
+              <a:rPr sz="1800" b="0" i="0">
                 <a:solidFill>
                   <a:srgbClr val="2B343F"/>
                 </a:solidFill>
@@ -25172,7 +25347,7 @@
               <a:t> Write an agent process that pushes a heartbeat entry every </a:t>
             </a:r>
             <a:r>
-              <a:rPr sz="1600" b="1" i="0">
+              <a:rPr sz="1800" b="1" i="0">
                 <a:solidFill>
                   <a:srgbClr val="2B343F"/>
                 </a:solidFill>
@@ -25181,7 +25356,7 @@
               <a:t>N</a:t>
             </a:r>
             <a:r>
-              <a:rPr sz="1600" b="0" i="0">
+              <a:rPr sz="1800" b="0" i="0">
                 <a:solidFill>
                   <a:srgbClr val="2B343F"/>
                 </a:solidFill>
@@ -25203,9 +25378,10 @@
               </a:buClr>
               <a:buFont typeface="Arial"/>
               <a:buChar char="▪"/>
-            </a:pPr>
-            <a:r>
-              <a:rPr sz="1600" b="1" i="0">
+              <a:defRPr/>
+            </a:pPr>
+            <a:r>
+              <a:rPr sz="1800" b="1" i="0">
                 <a:solidFill>
                   <a:srgbClr val="2B343F"/>
                 </a:solidFill>
@@ -25214,7 +25390,7 @@
               <a:t>2.</a:t>
             </a:r>
             <a:r>
-              <a:rPr sz="1600" b="0" i="0">
+              <a:rPr sz="1800" b="0" i="0">
                 <a:solidFill>
                   <a:srgbClr val="2B343F"/>
                 </a:solidFill>
@@ -25223,7 +25399,7 @@
               <a:t> Write an orchestrator loop that flags an agent “down” after </a:t>
             </a:r>
             <a:r>
-              <a:rPr sz="1600" b="1" i="0">
+              <a:rPr sz="1800" b="1" i="0">
                 <a:solidFill>
                   <a:srgbClr val="2B343F"/>
                 </a:solidFill>
@@ -25232,7 +25408,7 @@
               <a:t>M</a:t>
             </a:r>
             <a:r>
-              <a:rPr sz="1600" b="0" i="0">
+              <a:rPr sz="1800" b="0" i="0">
                 <a:solidFill>
                   <a:srgbClr val="2B343F"/>
                 </a:solidFill>
@@ -25254,9 +25430,10 @@
               </a:buClr>
               <a:buFont typeface="Arial"/>
               <a:buChar char="▪"/>
-            </a:pPr>
-            <a:r>
-              <a:rPr sz="1600" b="1" i="0">
+              <a:defRPr/>
+            </a:pPr>
+            <a:r>
+              <a:rPr sz="1800" b="1" i="0">
                 <a:solidFill>
                   <a:srgbClr val="2B343F"/>
                 </a:solidFill>
@@ -25265,7 +25442,7 @@
               <a:t>3.</a:t>
             </a:r>
             <a:r>
-              <a:rPr sz="1600" b="0" i="0">
+              <a:rPr sz="1800" b="0" i="0">
                 <a:solidFill>
                   <a:srgbClr val="2B343F"/>
                 </a:solidFill>
@@ -25274,7 +25451,7 @@
               <a:t> Kill the agent process mid-session and </a:t>
             </a:r>
             <a:r>
-              <a:rPr sz="1600" b="1" i="0">
+              <a:rPr sz="1800" b="1" i="0">
                 <a:solidFill>
                   <a:srgbClr val="2B343F"/>
                 </a:solidFill>
@@ -25296,9 +25473,10 @@
               </a:buClr>
               <a:buFont typeface="Arial"/>
               <a:buChar char="▪"/>
-            </a:pPr>
-            <a:r>
-              <a:rPr sz="1600" b="1" i="0">
+              <a:defRPr/>
+            </a:pPr>
+            <a:r>
+              <a:rPr sz="1800" b="1" i="0">
                 <a:solidFill>
                   <a:srgbClr val="2B343F"/>
                 </a:solidFill>
@@ -25307,7 +25485,7 @@
               <a:t>4.</a:t>
             </a:r>
             <a:r>
-              <a:rPr sz="1600" b="0" i="0">
+              <a:rPr sz="1800" b="0" i="0">
                 <a:solidFill>
                   <a:srgbClr val="2B343F"/>
                 </a:solidFill>
@@ -25316,7 +25494,7 @@
               <a:t> Adjust N and M, re-test — discuss the resulting </a:t>
             </a:r>
             <a:r>
-              <a:rPr sz="1600" b="1" i="0">
+              <a:rPr sz="1800" b="1" i="0">
                 <a:solidFill>
                   <a:srgbClr val="2B343F"/>
                 </a:solidFill>
@@ -25337,9 +25515,10 @@
                 <a:spcPts val="800"/>
               </a:spcAft>
               <a:buNone/>
-            </a:pPr>
-            <a:r>
-              <a:rPr sz="1500" b="1" i="0">
+              <a:defRPr/>
+            </a:pPr>
+            <a:r>
+              <a:rPr sz="1800" b="1" i="0">
                 <a:solidFill>
                   <a:srgbClr val="004282"/>
                 </a:solidFill>
@@ -25348,7 +25527,7 @@
               <a:t>Discussion: what N / M values would you choose for a </a:t>
             </a:r>
             <a:r>
-              <a:rPr sz="1500" b="1" i="0">
+              <a:rPr sz="1800" b="1" i="0">
                 <a:solidFill>
                   <a:srgbClr val="004282"/>
                 </a:solidFill>
@@ -25357,7 +25536,7 @@
               <a:t>cloud-hosted agent</a:t>
             </a:r>
             <a:r>
-              <a:rPr sz="1500" b="1" i="0">
+              <a:rPr sz="1800" b="1" i="0">
                 <a:solidFill>
                   <a:srgbClr val="004282"/>
                 </a:solidFill>
@@ -25366,7 +25545,7 @@
               <a:t> vs a </a:t>
             </a:r>
             <a:r>
-              <a:rPr sz="1500" b="1" i="0">
+              <a:rPr sz="1800" b="1" i="0">
                 <a:solidFill>
                   <a:srgbClr val="004282"/>
                 </a:solidFill>
@@ -25375,7 +25554,7 @@
               <a:t>NanoClaw edge agent</a:t>
             </a:r>
             <a:r>
-              <a:rPr sz="1500" b="1" i="0">
+              <a:rPr sz="1800" b="1" i="0">
                 <a:solidFill>
                   <a:srgbClr val="004282"/>
                 </a:solidFill>
@@ -25416,6 +25595,7 @@
                 <a:spcPts val="600"/>
               </a:spcAft>
               <a:buNone/>
+              <a:defRPr/>
             </a:pPr>
             <a:r>
               <a:rPr sz="1200" b="1" i="0">
@@ -25459,6 +25639,7 @@
                 <a:spcPts val="600"/>
               </a:spcAft>
               <a:buNone/>
+              <a:defRPr/>
             </a:pPr>
             <a:r>
               <a:rPr sz="900" b="0" i="0">
@@ -25502,6 +25683,7 @@
                 <a:spcPts val="600"/>
               </a:spcAft>
               <a:buNone/>
+              <a:defRPr/>
             </a:pPr>
             <a:r>
               <a:rPr sz="900" b="0" i="0">
@@ -25556,6 +25738,7 @@
                 <a:spcPts val="600"/>
               </a:spcAft>
               <a:buNone/>
+              <a:defRPr/>
             </a:pPr>
             <a:r>
               <a:rPr sz="4000" b="1" i="0">
@@ -25592,9 +25775,10 @@
                 <a:spcPts val="600"/>
               </a:spcAft>
               <a:buNone/>
-            </a:pPr>
-            <a:r>
-              <a:rPr sz="1700" b="0" i="0">
+              <a:defRPr/>
+            </a:pPr>
+            <a:r>
+              <a:rPr sz="1800" b="0" i="0">
                 <a:solidFill>
                   <a:srgbClr val="E8EEF5"/>
                 </a:solidFill>
@@ -25635,9 +25819,10 @@
                 <a:spcPts val="600"/>
               </a:spcAft>
               <a:buNone/>
-            </a:pPr>
-            <a:r>
-              <a:rPr sz="1500" b="1" i="0">
+              <a:defRPr/>
+            </a:pPr>
+            <a:r>
+              <a:rPr sz="1800" b="1" i="0">
                 <a:solidFill>
                   <a:srgbClr val="FFFFFF"/>
                 </a:solidFill>
@@ -25694,6 +25879,7 @@
                 <a:spcPts val="600"/>
               </a:spcAft>
               <a:buNone/>
+              <a:defRPr/>
             </a:pPr>
             <a:r>
               <a:rPr sz="3000" b="1" i="0">
@@ -25739,9 +25925,10 @@
               </a:buClr>
               <a:buFont typeface="Arial"/>
               <a:buChar char="▪"/>
-            </a:pPr>
-            <a:r>
-              <a:rPr sz="1650" b="0" i="0">
+              <a:defRPr/>
+            </a:pPr>
+            <a:r>
+              <a:rPr sz="1800" b="0" i="0">
                 <a:solidFill>
                   <a:srgbClr val="2B343F"/>
                 </a:solidFill>
@@ -25750,7 +25937,7 @@
               <a:t>Every skill has </a:t>
             </a:r>
             <a:r>
-              <a:rPr sz="1650" b="1" i="0">
+              <a:rPr sz="1800" b="1" i="0">
                 <a:solidFill>
                   <a:srgbClr val="2B343F"/>
                 </a:solidFill>
@@ -25772,9 +25959,10 @@
               </a:buClr>
               <a:buFont typeface="Arial"/>
               <a:buChar char="–"/>
-            </a:pPr>
-            <a:r>
-              <a:rPr sz="1600" b="1" i="0">
+              <a:defRPr/>
+            </a:pPr>
+            <a:r>
+              <a:rPr sz="1800" b="1" i="0">
                 <a:solidFill>
                   <a:srgbClr val="2B343F"/>
                 </a:solidFill>
@@ -25783,7 +25971,7 @@
               <a:t>Metadata</a:t>
             </a:r>
             <a:r>
-              <a:rPr sz="1600" b="0" i="0">
+              <a:rPr sz="1800" b="0" i="0">
                 <a:solidFill>
                   <a:srgbClr val="2B343F"/>
                 </a:solidFill>
@@ -25805,9 +25993,10 @@
               </a:buClr>
               <a:buFont typeface="Arial"/>
               <a:buChar char="–"/>
-            </a:pPr>
-            <a:r>
-              <a:rPr sz="1600" b="1" i="0">
+              <a:defRPr/>
+            </a:pPr>
+            <a:r>
+              <a:rPr sz="1800" b="1" i="0">
                 <a:solidFill>
                   <a:srgbClr val="2B343F"/>
                 </a:solidFill>
@@ -25816,7 +26005,7 @@
               <a:t>Execution logic</a:t>
             </a:r>
             <a:r>
-              <a:rPr sz="1600" b="0" i="0">
+              <a:rPr sz="1800" b="0" i="0">
                 <a:solidFill>
                   <a:srgbClr val="2B343F"/>
                 </a:solidFill>
@@ -25837,6 +26026,7 @@
                 <a:spcPts val="800"/>
               </a:spcAft>
               <a:buNone/>
+              <a:defRPr/>
             </a:pPr>
             <a:r>
               <a:rPr sz="1900" b="1" i="0">
@@ -25878,9 +26068,10 @@
                 <a:spcPts val="800"/>
               </a:spcAft>
               <a:buNone/>
-            </a:pPr>
-            <a:r>
-              <a:rPr sz="1450" b="0" i="1">
+              <a:defRPr/>
+            </a:pPr>
+            <a:r>
+              <a:rPr sz="1800" b="0" i="1">
                 <a:solidFill>
                   <a:srgbClr val="7B8898"/>
                 </a:solidFill>
@@ -25921,6 +26112,7 @@
                 <a:spcPts val="600"/>
               </a:spcAft>
               <a:buNone/>
+              <a:defRPr/>
             </a:pPr>
             <a:r>
               <a:rPr sz="1200" b="1" i="0">
@@ -25964,6 +26156,7 @@
                 <a:spcPts val="600"/>
               </a:spcAft>
               <a:buNone/>
+              <a:defRPr/>
             </a:pPr>
             <a:r>
               <a:rPr sz="900" b="0" i="0">
@@ -26007,6 +26200,7 @@
                 <a:spcPts val="600"/>
               </a:spcAft>
               <a:buNone/>
+              <a:defRPr/>
             </a:pPr>
             <a:r>
               <a:rPr sz="900" b="0" i="0">
@@ -26066,6 +26260,7 @@
                 <a:spcPts val="600"/>
               </a:spcAft>
               <a:buNone/>
+              <a:defRPr/>
             </a:pPr>
             <a:r>
               <a:rPr sz="3000" b="1" i="0">
@@ -26109,6 +26304,7 @@
                 <a:spcPts val="600"/>
               </a:spcAft>
               <a:buNone/>
+              <a:defRPr/>
             </a:pPr>
             <a:r>
               <a:rPr sz="1200" b="1" i="0">
@@ -26152,6 +26348,7 @@
                 <a:spcPts val="600"/>
               </a:spcAft>
               <a:buNone/>
+              <a:defRPr/>
             </a:pPr>
             <a:r>
               <a:rPr sz="900" b="0" i="0">
@@ -26195,6 +26392,7 @@
                 <a:spcPts val="600"/>
               </a:spcAft>
               <a:buNone/>
+              <a:defRPr/>
             </a:pPr>
             <a:r>
               <a:rPr sz="900" b="0" i="0">
@@ -26250,7 +26448,9 @@
           <a:bodyPr rtlCol="0" anchor="ctr"/>
           <a:lstStyle/>
           <a:p>
-            <a:pPr algn="ctr"/>
+            <a:pPr algn="ctr">
+              <a:defRPr/>
+            </a:pPr>
           </a:p>
         </p:txBody>
       </p:sp>
@@ -26284,9 +26484,10 @@
                 <a:spcPts val="600"/>
               </a:spcAft>
               <a:buNone/>
-            </a:pPr>
-            <a:r>
-              <a:rPr sz="1300" b="1" i="0">
+              <a:defRPr/>
+            </a:pPr>
+            <a:r>
+              <a:rPr sz="1800" b="1" i="0">
                 <a:solidFill>
                   <a:srgbClr val="A3321E"/>
                 </a:solidFill>
@@ -26307,6 +26508,7 @@
                 <a:spcPts val="600"/>
               </a:spcAft>
               <a:buNone/>
+              <a:defRPr/>
             </a:pPr>
             <a:r>
               <a:rPr sz="2000" b="1" i="0">
@@ -26330,9 +26532,10 @@
                 <a:spcPts val="600"/>
               </a:spcAft>
               <a:buNone/>
-            </a:pPr>
-            <a:r>
-              <a:rPr sz="1350" b="0" i="0">
+              <a:defRPr/>
+            </a:pPr>
+            <a:r>
+              <a:rPr sz="1800" b="0" i="0">
                 <a:solidFill>
                   <a:srgbClr val="2B343F"/>
                 </a:solidFill>
@@ -26341,7 +26544,7 @@
               <a:t>Vague descriptions cause </a:t>
             </a:r>
             <a:r>
-              <a:rPr sz="1350" b="1" i="0">
+              <a:rPr sz="1800" b="1" i="0">
                 <a:solidFill>
                   <a:srgbClr val="2B343F"/>
                 </a:solidFill>
@@ -26350,7 +26553,7 @@
               <a:t>missed or misfired</a:t>
             </a:r>
             <a:r>
-              <a:rPr sz="1350" b="0" i="0">
+              <a:rPr sz="1800" b="0" i="0">
                 <a:solidFill>
                   <a:srgbClr val="2B343F"/>
                 </a:solidFill>
@@ -26403,7 +26606,9 @@
           <a:bodyPr rtlCol="0" anchor="ctr"/>
           <a:lstStyle/>
           <a:p>
-            <a:pPr algn="ctr"/>
+            <a:pPr algn="ctr">
+              <a:defRPr/>
+            </a:pPr>
           </a:p>
         </p:txBody>
       </p:sp>
@@ -26415,8 +26620,8 @@
         </p:nvSpPr>
         <p:spPr>
           <a:xfrm>
-            <a:off x="6537960" y="1691640"/>
-            <a:ext cx="4617720" cy="1920240"/>
+            <a:off x="6537960" y="1536192"/>
+            <a:ext cx="4617720" cy="2176272"/>
           </a:xfrm>
           <a:prstGeom prst="rect">
             <a:avLst/>
@@ -26437,9 +26642,10 @@
                 <a:spcPts val="600"/>
               </a:spcAft>
               <a:buNone/>
-            </a:pPr>
-            <a:r>
-              <a:rPr sz="1300" b="1" i="0">
+              <a:defRPr/>
+            </a:pPr>
+            <a:r>
+              <a:rPr sz="1800" b="1" i="0">
                 <a:solidFill>
                   <a:srgbClr val="1E5E3A"/>
                 </a:solidFill>
@@ -26460,9 +26666,10 @@
                 <a:spcPts val="600"/>
               </a:spcAft>
               <a:buNone/>
-            </a:pPr>
-            <a:r>
-              <a:rPr sz="1500" b="1" i="0">
+              <a:defRPr/>
+            </a:pPr>
+            <a:r>
+              <a:rPr sz="1800" b="1" i="0">
                 <a:solidFill>
                   <a:srgbClr val="1E5E3A"/>
                 </a:solidFill>
@@ -26483,9 +26690,10 @@
                 <a:spcPts val="600"/>
               </a:spcAft>
               <a:buNone/>
-            </a:pPr>
-            <a:r>
-              <a:rPr sz="1350" b="0" i="0">
+              <a:defRPr/>
+            </a:pPr>
+            <a:r>
+              <a:rPr sz="1800" b="0" i="0">
                 <a:solidFill>
                   <a:srgbClr val="2B343F"/>
                 </a:solidFill>
@@ -26494,7 +26702,7 @@
               <a:t>Specific scope + explicit </a:t>
             </a:r>
             <a:r>
-              <a:rPr sz="1350" b="1" i="0">
+              <a:rPr sz="1800" b="1" i="0">
                 <a:solidFill>
                   <a:srgbClr val="2B343F"/>
                 </a:solidFill>
@@ -26503,7 +26711,7 @@
               <a:t>when-to-use / when-not-to-use</a:t>
             </a:r>
             <a:r>
-              <a:rPr sz="1350" b="0" i="0">
+              <a:rPr sz="1800" b="0" i="0">
                 <a:solidFill>
                   <a:srgbClr val="2B343F"/>
                 </a:solidFill>
@@ -26522,7 +26730,7 @@
         </p:nvSpPr>
         <p:spPr>
           <a:xfrm>
-            <a:off x="841248" y="4069080"/>
+            <a:off x="841248" y="4122363"/>
             <a:ext cx="10607040" cy="2011680"/>
           </a:xfrm>
           <a:prstGeom prst="rect">
@@ -26548,9 +26756,10 @@
               </a:buClr>
               <a:buFont typeface="Arial"/>
               <a:buChar char="▪"/>
-            </a:pPr>
-            <a:r>
-              <a:rPr sz="1600" b="1" i="0">
+              <a:defRPr/>
+            </a:pPr>
+            <a:r>
+              <a:rPr sz="1800" b="1" i="0">
                 <a:solidFill>
                   <a:srgbClr val="2B343F"/>
                 </a:solidFill>
@@ -26559,7 +26768,7 @@
               <a:t>Exercise:</a:t>
             </a:r>
             <a:r>
-              <a:rPr sz="1600" b="0" i="0">
+              <a:rPr sz="1800" b="0" i="0">
                 <a:solidFill>
                   <a:srgbClr val="2B343F"/>
                 </a:solidFill>
@@ -26580,9 +26789,10 @@
                 <a:spcPts val="600"/>
               </a:spcAft>
               <a:buNone/>
-            </a:pPr>
-            <a:r>
-              <a:rPr sz="1450" b="0" i="0">
+              <a:defRPr/>
+            </a:pPr>
+            <a:r>
+              <a:rPr sz="1800" b="0" i="0">
                 <a:solidFill>
                   <a:srgbClr val="7B8898"/>
                 </a:solidFill>
@@ -26639,6 +26849,7 @@
                 <a:spcPts val="600"/>
               </a:spcAft>
               <a:buNone/>
+              <a:defRPr/>
             </a:pPr>
             <a:r>
               <a:rPr sz="3000" b="1" i="0">
@@ -26684,9 +26895,10 @@
               </a:buClr>
               <a:buFont typeface="Arial"/>
               <a:buChar char="▪"/>
-            </a:pPr>
-            <a:r>
-              <a:rPr sz="1600" b="1" i="0">
+              <a:defRPr/>
+            </a:pPr>
+            <a:r>
+              <a:rPr sz="1800" b="1" i="0">
                 <a:solidFill>
                   <a:srgbClr val="2B343F"/>
                 </a:solidFill>
@@ -26695,7 +26907,7 @@
               <a:t>Sandboxing execution</a:t>
             </a:r>
             <a:r>
-              <a:rPr sz="1600" b="0" i="0">
+              <a:rPr sz="1800" b="0" i="0">
                 <a:solidFill>
                   <a:srgbClr val="2B343F"/>
                 </a:solidFill>
@@ -26717,9 +26929,10 @@
               </a:buClr>
               <a:buFont typeface="Arial"/>
               <a:buChar char="▪"/>
-            </a:pPr>
-            <a:r>
-              <a:rPr sz="1600" b="1" i="0">
+              <a:defRPr/>
+            </a:pPr>
+            <a:r>
+              <a:rPr sz="1800" b="1" i="0">
                 <a:solidFill>
                   <a:srgbClr val="2B343F"/>
                 </a:solidFill>
@@ -26728,7 +26941,7 @@
               <a:t>Input validation</a:t>
             </a:r>
             <a:r>
-              <a:rPr sz="1600" b="0" i="0">
+              <a:rPr sz="1800" b="0" i="0">
                 <a:solidFill>
                   <a:srgbClr val="2B343F"/>
                 </a:solidFill>
@@ -26737,7 +26950,7 @@
               <a:t> — validate </a:t>
             </a:r>
             <a:r>
-              <a:rPr sz="1600" b="1" i="0">
+              <a:rPr sz="1800" b="1" i="0">
                 <a:solidFill>
                   <a:srgbClr val="2B343F"/>
                 </a:solidFill>
@@ -26746,7 +26959,7 @@
               <a:t>agent-generated parameters</a:t>
             </a:r>
             <a:r>
-              <a:rPr sz="1600" b="0" i="0">
+              <a:rPr sz="1800" b="0" i="0">
                 <a:solidFill>
                   <a:srgbClr val="2B343F"/>
                 </a:solidFill>
@@ -26768,9 +26981,10 @@
               </a:buClr>
               <a:buFont typeface="Arial"/>
               <a:buChar char="▪"/>
-            </a:pPr>
-            <a:r>
-              <a:rPr sz="1600" b="1" i="0">
+              <a:defRPr/>
+            </a:pPr>
+            <a:r>
+              <a:rPr sz="1800" b="1" i="0">
                 <a:solidFill>
                   <a:srgbClr val="2B343F"/>
                 </a:solidFill>
@@ -26779,7 +26993,7 @@
               <a:t>Output validation</a:t>
             </a:r>
             <a:r>
-              <a:rPr sz="1600" b="0" i="0">
+              <a:rPr sz="1800" b="0" i="0">
                 <a:solidFill>
                   <a:srgbClr val="2B343F"/>
                 </a:solidFill>
@@ -26788,7 +27002,7 @@
               <a:t> — sanitize skill output </a:t>
             </a:r>
             <a:r>
-              <a:rPr sz="1600" b="1" i="0">
+              <a:rPr sz="1800" b="1" i="0">
                 <a:solidFill>
                   <a:srgbClr val="2B343F"/>
                 </a:solidFill>
@@ -26809,9 +27023,10 @@
                 <a:spcPts val="800"/>
               </a:spcAft>
               <a:buNone/>
-            </a:pPr>
-            <a:r>
-              <a:rPr sz="1400" b="0" i="1">
+              <a:defRPr/>
+            </a:pPr>
+            <a:r>
+              <a:rPr sz="1800" b="0" i="1">
                 <a:solidFill>
                   <a:srgbClr val="7B8898"/>
                 </a:solidFill>
@@ -26820,7 +27035,7 @@
               <a:t>Reference: </a:t>
             </a:r>
             <a:r>
-              <a:rPr sz="1400" b="1" i="1">
+              <a:rPr sz="1800" b="1" i="1">
                 <a:solidFill>
                   <a:srgbClr val="7B8898"/>
                 </a:solidFill>
@@ -26861,6 +27076,7 @@
                 <a:spcPts val="600"/>
               </a:spcAft>
               <a:buNone/>
+              <a:defRPr/>
             </a:pPr>
             <a:r>
               <a:rPr sz="1200" b="1" i="0">
@@ -26904,6 +27120,7 @@
                 <a:spcPts val="600"/>
               </a:spcAft>
               <a:buNone/>
+              <a:defRPr/>
             </a:pPr>
             <a:r>
               <a:rPr sz="900" b="0" i="0">
@@ -26947,6 +27164,7 @@
                 <a:spcPts val="600"/>
               </a:spcAft>
               <a:buNone/>
+              <a:defRPr/>
             </a:pPr>
             <a:r>
               <a:rPr sz="900" b="0" i="0">
@@ -27006,6 +27224,7 @@
                 <a:spcPts val="600"/>
               </a:spcAft>
               <a:buNone/>
+              <a:defRPr/>
             </a:pPr>
             <a:r>
               <a:rPr sz="3000" b="1" i="0">
@@ -27049,6 +27268,7 @@
                 <a:spcPts val="600"/>
               </a:spcAft>
               <a:buNone/>
+              <a:defRPr/>
             </a:pPr>
             <a:r>
               <a:rPr sz="1200" b="1" i="0">
@@ -27092,6 +27312,7 @@
                 <a:spcPts val="600"/>
               </a:spcAft>
               <a:buNone/>
+              <a:defRPr/>
             </a:pPr>
             <a:r>
               <a:rPr sz="900" b="0" i="0">
@@ -27135,6 +27356,7 @@
                 <a:spcPts val="600"/>
               </a:spcAft>
               <a:buNone/>
+              <a:defRPr/>
             </a:pPr>
             <a:r>
               <a:rPr sz="900" b="0" i="0">
@@ -27158,7 +27380,7 @@
         </p:nvGraphicFramePr>
         <p:xfrm>
           <a:off x="841248" y="1371600"/>
-          <a:ext cx="10515600" cy="4709160"/>
+          <a:ext cx="10515600" cy="5120626"/>
         </p:xfrm>
         <a:graphic>
           <a:graphicData uri="http://schemas.openxmlformats.org/drawingml/2006/table">
@@ -27170,14 +27392,17 @@
                 <a:gridCol w="1828800"/>
                 <a:gridCol w="8686800"/>
               </a:tblGrid>
-              <a:tr h="336368">
+              <a:tr h="365759">
                 <a:tc>
                   <a:txBody>
                     <a:bodyPr/>
                     <a:lstStyle/>
                     <a:p>
+                      <a:pPr>
+                        <a:defRPr/>
+                      </a:pPr>
                       <a:r>
-                        <a:rPr b="1" sz="1300">
+                        <a:rPr b="1" sz="1800">
                           <a:solidFill>
                             <a:srgbClr val="FFFFFF"/>
                           </a:solidFill>
@@ -27198,8 +27423,11 @@
                     <a:bodyPr/>
                     <a:lstStyle/>
                     <a:p>
+                      <a:pPr>
+                        <a:defRPr/>
+                      </a:pPr>
                       <a:r>
-                        <a:rPr b="1" sz="1300">
+                        <a:rPr b="1" sz="1800">
                           <a:solidFill>
                             <a:srgbClr val="FFFFFF"/>
                           </a:solidFill>
@@ -27216,14 +27444,17 @@
                   </a:tcPr>
                 </a:tc>
               </a:tr>
-              <a:tr h="336368">
+              <a:tr h="365759">
                 <a:tc>
                   <a:txBody>
                     <a:bodyPr/>
                     <a:lstStyle/>
                     <a:p>
+                      <a:pPr>
+                        <a:defRPr/>
+                      </a:pPr>
                       <a:r>
-                        <a:rPr sz="1200" b="0">
+                        <a:rPr sz="1800" b="0">
                           <a:solidFill>
                             <a:srgbClr val="2B343F"/>
                           </a:solidFill>
@@ -27244,8 +27475,11 @@
                     <a:bodyPr/>
                     <a:lstStyle/>
                     <a:p>
+                      <a:pPr>
+                        <a:defRPr/>
+                      </a:pPr>
                       <a:r>
-                        <a:rPr sz="1200" b="0">
+                        <a:rPr sz="1800" b="0">
                           <a:solidFill>
                             <a:srgbClr val="2B343F"/>
                           </a:solidFill>
@@ -27262,14 +27496,17 @@
                   </a:tcPr>
                 </a:tc>
               </a:tr>
-              <a:tr h="336368">
+              <a:tr h="365759">
                 <a:tc>
                   <a:txBody>
                     <a:bodyPr/>
                     <a:lstStyle/>
                     <a:p>
+                      <a:pPr>
+                        <a:defRPr/>
+                      </a:pPr>
                       <a:r>
-                        <a:rPr sz="1200" b="0">
+                        <a:rPr sz="1800" b="0">
                           <a:solidFill>
                             <a:srgbClr val="2B343F"/>
                           </a:solidFill>
@@ -27290,8 +27527,11 @@
                     <a:bodyPr/>
                     <a:lstStyle/>
                     <a:p>
+                      <a:pPr>
+                        <a:defRPr/>
+                      </a:pPr>
                       <a:r>
-                        <a:rPr sz="1200" b="1">
+                        <a:rPr sz="1800" b="1">
                           <a:solidFill>
                             <a:srgbClr val="2B343F"/>
                           </a:solidFill>
@@ -27308,14 +27548,17 @@
                   </a:tcPr>
                 </a:tc>
               </a:tr>
-              <a:tr h="336368">
+              <a:tr h="365759">
                 <a:tc>
                   <a:txBody>
                     <a:bodyPr/>
                     <a:lstStyle/>
                     <a:p>
+                      <a:pPr>
+                        <a:defRPr/>
+                      </a:pPr>
                       <a:r>
-                        <a:rPr sz="1200" b="0">
+                        <a:rPr sz="1800" b="0">
                           <a:solidFill>
                             <a:srgbClr val="2B343F"/>
                           </a:solidFill>
@@ -27336,8 +27579,11 @@
                     <a:bodyPr/>
                     <a:lstStyle/>
                     <a:p>
+                      <a:pPr>
+                        <a:defRPr/>
+                      </a:pPr>
                       <a:r>
-                        <a:rPr sz="1200" b="1">
+                        <a:rPr sz="1800" b="1">
                           <a:solidFill>
                             <a:srgbClr val="2B343F"/>
                           </a:solidFill>
@@ -27354,14 +27600,17 @@
                   </a:tcPr>
                 </a:tc>
               </a:tr>
-              <a:tr h="336368">
+              <a:tr h="365759">
                 <a:tc>
                   <a:txBody>
                     <a:bodyPr/>
                     <a:lstStyle/>
                     <a:p>
+                      <a:pPr>
+                        <a:defRPr/>
+                      </a:pPr>
                       <a:r>
-                        <a:rPr sz="1200" b="0">
+                        <a:rPr sz="1800" b="0">
                           <a:solidFill>
                             <a:srgbClr val="2B343F"/>
                           </a:solidFill>
@@ -27382,8 +27631,11 @@
                     <a:bodyPr/>
                     <a:lstStyle/>
                     <a:p>
+                      <a:pPr>
+                        <a:defRPr/>
+                      </a:pPr>
                       <a:r>
-                        <a:rPr sz="1200" b="0">
+                        <a:rPr sz="1800" b="0">
                           <a:solidFill>
                             <a:srgbClr val="2B343F"/>
                           </a:solidFill>
@@ -27400,14 +27652,17 @@
                   </a:tcPr>
                 </a:tc>
               </a:tr>
-              <a:tr h="336368">
+              <a:tr h="365759">
                 <a:tc>
                   <a:txBody>
                     <a:bodyPr/>
                     <a:lstStyle/>
                     <a:p>
+                      <a:pPr>
+                        <a:defRPr/>
+                      </a:pPr>
                       <a:r>
-                        <a:rPr sz="1200" b="0">
+                        <a:rPr sz="1800" b="0">
                           <a:solidFill>
                             <a:srgbClr val="2B343F"/>
                           </a:solidFill>
@@ -27428,8 +27683,11 @@
                     <a:bodyPr/>
                     <a:lstStyle/>
                     <a:p>
+                      <a:pPr>
+                        <a:defRPr/>
+                      </a:pPr>
                       <a:r>
-                        <a:rPr sz="1200" b="1">
+                        <a:rPr sz="1800" b="1">
                           <a:solidFill>
                             <a:srgbClr val="2B343F"/>
                           </a:solidFill>
@@ -27446,14 +27704,17 @@
                   </a:tcPr>
                 </a:tc>
               </a:tr>
-              <a:tr h="336368">
+              <a:tr h="365759">
                 <a:tc>
                   <a:txBody>
                     <a:bodyPr/>
                     <a:lstStyle/>
                     <a:p>
+                      <a:pPr>
+                        <a:defRPr/>
+                      </a:pPr>
                       <a:r>
-                        <a:rPr sz="1200" b="0">
+                        <a:rPr sz="1800" b="0">
                           <a:solidFill>
                             <a:srgbClr val="2B343F"/>
                           </a:solidFill>
@@ -27474,8 +27735,11 @@
                     <a:bodyPr/>
                     <a:lstStyle/>
                     <a:p>
+                      <a:pPr>
+                        <a:defRPr/>
+                      </a:pPr>
                       <a:r>
-                        <a:rPr sz="1200" b="1">
+                        <a:rPr sz="1800" b="1">
                           <a:solidFill>
                             <a:srgbClr val="2B343F"/>
                           </a:solidFill>
@@ -27492,14 +27756,17 @@
                   </a:tcPr>
                 </a:tc>
               </a:tr>
-              <a:tr h="336368">
+              <a:tr h="365759">
                 <a:tc>
                   <a:txBody>
                     <a:bodyPr/>
                     <a:lstStyle/>
                     <a:p>
+                      <a:pPr>
+                        <a:defRPr/>
+                      </a:pPr>
                       <a:r>
-                        <a:rPr sz="1200" b="0">
+                        <a:rPr sz="1800" b="0">
                           <a:solidFill>
                             <a:srgbClr val="2B343F"/>
                           </a:solidFill>
@@ -27520,8 +27787,11 @@
                     <a:bodyPr/>
                     <a:lstStyle/>
                     <a:p>
+                      <a:pPr>
+                        <a:defRPr/>
+                      </a:pPr>
                       <a:r>
-                        <a:rPr sz="1200" b="0">
+                        <a:rPr sz="1800" b="0">
                           <a:solidFill>
                             <a:srgbClr val="2B343F"/>
                           </a:solidFill>
@@ -27538,14 +27808,17 @@
                   </a:tcPr>
                 </a:tc>
               </a:tr>
-              <a:tr h="336368">
+              <a:tr h="365759">
                 <a:tc>
                   <a:txBody>
                     <a:bodyPr/>
                     <a:lstStyle/>
                     <a:p>
+                      <a:pPr>
+                        <a:defRPr/>
+                      </a:pPr>
                       <a:r>
-                        <a:rPr sz="1200" b="0">
+                        <a:rPr sz="1800" b="0">
                           <a:solidFill>
                             <a:srgbClr val="2B343F"/>
                           </a:solidFill>
@@ -27566,8 +27839,11 @@
                     <a:bodyPr/>
                     <a:lstStyle/>
                     <a:p>
+                      <a:pPr>
+                        <a:defRPr/>
+                      </a:pPr>
                       <a:r>
-                        <a:rPr sz="1200" b="1">
+                        <a:rPr sz="1800" b="1">
                           <a:solidFill>
                             <a:srgbClr val="2B343F"/>
                           </a:solidFill>
@@ -27584,14 +27860,17 @@
                   </a:tcPr>
                 </a:tc>
               </a:tr>
-              <a:tr h="336368">
+              <a:tr h="365759">
                 <a:tc>
                   <a:txBody>
                     <a:bodyPr/>
                     <a:lstStyle/>
                     <a:p>
+                      <a:pPr>
+                        <a:defRPr/>
+                      </a:pPr>
                       <a:r>
-                        <a:rPr sz="1200" b="0">
+                        <a:rPr sz="1800" b="0">
                           <a:solidFill>
                             <a:srgbClr val="2B343F"/>
                           </a:solidFill>
@@ -27612,8 +27891,11 @@
                     <a:bodyPr/>
                     <a:lstStyle/>
                     <a:p>
+                      <a:pPr>
+                        <a:defRPr/>
+                      </a:pPr>
                       <a:r>
-                        <a:rPr sz="1200" b="0">
+                        <a:rPr sz="1800" b="0">
                           <a:solidFill>
                             <a:srgbClr val="2B343F"/>
                           </a:solidFill>
@@ -27630,14 +27912,17 @@
                   </a:tcPr>
                 </a:tc>
               </a:tr>
-              <a:tr h="336368">
+              <a:tr h="365759">
                 <a:tc>
                   <a:txBody>
                     <a:bodyPr/>
                     <a:lstStyle/>
                     <a:p>
+                      <a:pPr>
+                        <a:defRPr/>
+                      </a:pPr>
                       <a:r>
-                        <a:rPr sz="1200" b="0">
+                        <a:rPr sz="1800" b="0">
                           <a:solidFill>
                             <a:srgbClr val="2B343F"/>
                           </a:solidFill>
@@ -27658,8 +27943,11 @@
                     <a:bodyPr/>
                     <a:lstStyle/>
                     <a:p>
+                      <a:pPr>
+                        <a:defRPr/>
+                      </a:pPr>
                       <a:r>
-                        <a:rPr sz="1200" b="1">
+                        <a:rPr sz="1800" b="1">
                           <a:solidFill>
                             <a:srgbClr val="2B343F"/>
                           </a:solidFill>
@@ -27676,14 +27964,17 @@
                   </a:tcPr>
                 </a:tc>
               </a:tr>
-              <a:tr h="336368">
+              <a:tr h="365759">
                 <a:tc>
                   <a:txBody>
                     <a:bodyPr/>
                     <a:lstStyle/>
                     <a:p>
+                      <a:pPr>
+                        <a:defRPr/>
+                      </a:pPr>
                       <a:r>
-                        <a:rPr sz="1200" b="0">
+                        <a:rPr sz="1800" b="0">
                           <a:solidFill>
                             <a:srgbClr val="2B343F"/>
                           </a:solidFill>
@@ -27704,8 +27995,11 @@
                     <a:bodyPr/>
                     <a:lstStyle/>
                     <a:p>
+                      <a:pPr>
+                        <a:defRPr/>
+                      </a:pPr>
                       <a:r>
-                        <a:rPr sz="1200" b="1">
+                        <a:rPr sz="1800" b="1">
                           <a:solidFill>
                             <a:srgbClr val="2B343F"/>
                           </a:solidFill>
@@ -27722,14 +28016,17 @@
                   </a:tcPr>
                 </a:tc>
               </a:tr>
-              <a:tr h="336368">
+              <a:tr h="365759">
                 <a:tc>
                   <a:txBody>
                     <a:bodyPr/>
                     <a:lstStyle/>
                     <a:p>
+                      <a:pPr>
+                        <a:defRPr/>
+                      </a:pPr>
                       <a:r>
-                        <a:rPr sz="1200" b="0">
+                        <a:rPr sz="1800" b="0">
                           <a:solidFill>
                             <a:srgbClr val="2B343F"/>
                           </a:solidFill>
@@ -27750,8 +28047,11 @@
                     <a:bodyPr/>
                     <a:lstStyle/>
                     <a:p>
+                      <a:pPr>
+                        <a:defRPr/>
+                      </a:pPr>
                       <a:r>
-                        <a:rPr sz="1200" b="1">
+                        <a:rPr sz="1800" b="1">
                           <a:solidFill>
                             <a:srgbClr val="2B343F"/>
                           </a:solidFill>
@@ -27768,14 +28068,17 @@
                   </a:tcPr>
                 </a:tc>
               </a:tr>
-              <a:tr h="336376">
+              <a:tr h="365759">
                 <a:tc>
                   <a:txBody>
                     <a:bodyPr/>
                     <a:lstStyle/>
                     <a:p>
+                      <a:pPr>
+                        <a:defRPr/>
+                      </a:pPr>
                       <a:r>
-                        <a:rPr sz="1200" b="0">
+                        <a:rPr sz="1800" b="0">
                           <a:solidFill>
                             <a:srgbClr val="2B343F"/>
                           </a:solidFill>
@@ -27796,8 +28099,11 @@
                     <a:bodyPr/>
                     <a:lstStyle/>
                     <a:p>
+                      <a:pPr>
+                        <a:defRPr/>
+                      </a:pPr>
                       <a:r>
-                        <a:rPr sz="1200" b="0">
+                        <a:rPr sz="1800" b="0">
                           <a:solidFill>
                             <a:srgbClr val="2B343F"/>
                           </a:solidFill>
@@ -27848,6 +28154,7 @@
                 <a:spcPts val="600"/>
               </a:spcAft>
               <a:buNone/>
+              <a:defRPr/>
             </a:pPr>
             <a:r>
               <a:rPr sz="1100" b="0" i="1">
@@ -27891,8 +28198,8 @@
         </p:nvSpPr>
         <p:spPr>
           <a:xfrm>
-            <a:off x="841248" y="502920"/>
-            <a:ext cx="10607040" cy="822960"/>
+            <a:off x="841248" y="548640"/>
+            <a:ext cx="10607040" cy="977053"/>
           </a:xfrm>
         </p:spPr>
         <p:txBody>
@@ -27907,6 +28214,7 @@
                 <a:spcPts val="600"/>
               </a:spcAft>
               <a:buNone/>
+              <a:defRPr/>
             </a:pPr>
             <a:r>
               <a:rPr sz="3000" b="1" i="0">
@@ -27932,8 +28240,8 @@
         </p:nvSpPr>
         <p:spPr>
           <a:xfrm>
-            <a:off x="841248" y="1481328"/>
-            <a:ext cx="10607040" cy="4846320"/>
+            <a:off x="841248" y="1626277"/>
+            <a:ext cx="10607040" cy="4765379"/>
           </a:xfrm>
         </p:spPr>
         <p:txBody>
@@ -27952,9 +28260,10 @@
               </a:buClr>
               <a:buFont typeface="Arial"/>
               <a:buChar char="▪"/>
-            </a:pPr>
-            <a:r>
-              <a:rPr sz="1600" b="1" i="0">
+              <a:defRPr/>
+            </a:pPr>
+            <a:r>
+              <a:rPr sz="1800" b="1" i="0">
                 <a:solidFill>
                   <a:srgbClr val="2B343F"/>
                 </a:solidFill>
@@ -27963,7 +28272,7 @@
               <a:t>1.</a:t>
             </a:r>
             <a:r>
-              <a:rPr sz="1600" b="0" i="0">
+              <a:rPr sz="1800" b="0" i="0">
                 <a:solidFill>
                   <a:srgbClr val="2B343F"/>
                 </a:solidFill>
@@ -27985,9 +28294,10 @@
               </a:buClr>
               <a:buFont typeface="Arial"/>
               <a:buChar char="▪"/>
-            </a:pPr>
-            <a:r>
-              <a:rPr sz="1600" b="1" i="0">
+              <a:defRPr/>
+            </a:pPr>
+            <a:r>
+              <a:rPr sz="1800" b="1" i="0">
                 <a:solidFill>
                   <a:srgbClr val="2B343F"/>
                 </a:solidFill>
@@ -27996,7 +28306,7 @@
               <a:t>2.</a:t>
             </a:r>
             <a:r>
-              <a:rPr sz="1600" b="0" i="0">
+              <a:rPr sz="1800" b="0" i="0">
                 <a:solidFill>
                   <a:srgbClr val="2B343F"/>
                 </a:solidFill>
@@ -28005,7 +28315,7 @@
               <a:t> Register it and confirm </a:t>
             </a:r>
             <a:r>
-              <a:rPr sz="1600" b="1" i="0">
+              <a:rPr sz="1800" b="1" i="0">
                 <a:solidFill>
                   <a:srgbClr val="2B343F"/>
                 </a:solidFill>
@@ -28014,7 +28324,7 @@
               <a:t>correct invocation</a:t>
             </a:r>
             <a:r>
-              <a:rPr sz="1600" b="0" i="0">
+              <a:rPr sz="1800" b="0" i="0">
                 <a:solidFill>
                   <a:srgbClr val="2B343F"/>
                 </a:solidFill>
@@ -28036,9 +28346,10 @@
               </a:buClr>
               <a:buFont typeface="Arial"/>
               <a:buChar char="▪"/>
-            </a:pPr>
-            <a:r>
-              <a:rPr sz="1600" b="1" i="0">
+              <a:defRPr/>
+            </a:pPr>
+            <a:r>
+              <a:rPr sz="1800" b="1" i="0">
                 <a:solidFill>
                   <a:srgbClr val="2B343F"/>
                 </a:solidFill>
@@ -28047,7 +28358,7 @@
               <a:t>3.</a:t>
             </a:r>
             <a:r>
-              <a:rPr sz="1600" b="0" i="0">
+              <a:rPr sz="1800" b="0" i="0">
                 <a:solidFill>
                   <a:srgbClr val="2B343F"/>
                 </a:solidFill>
@@ -28056,7 +28367,7 @@
               <a:t> “Vague-ify” the description and re-test — observe </a:t>
             </a:r>
             <a:r>
-              <a:rPr sz="1600" b="1" i="0">
+              <a:rPr sz="1800" b="1" i="0">
                 <a:solidFill>
                   <a:srgbClr val="2B343F"/>
                 </a:solidFill>
@@ -28078,9 +28389,10 @@
               </a:buClr>
               <a:buFont typeface="Arial"/>
               <a:buChar char="▪"/>
-            </a:pPr>
-            <a:r>
-              <a:rPr sz="1600" b="1" i="0">
+              <a:defRPr/>
+            </a:pPr>
+            <a:r>
+              <a:rPr sz="1800" b="1" i="0">
                 <a:solidFill>
                   <a:srgbClr val="2B343F"/>
                 </a:solidFill>
@@ -28089,7 +28401,7 @@
               <a:t>4.</a:t>
             </a:r>
             <a:r>
-              <a:rPr sz="1600" b="0" i="0">
+              <a:rPr sz="1800" b="0" i="0">
                 <a:solidFill>
                   <a:srgbClr val="2B343F"/>
                 </a:solidFill>
@@ -28098,7 +28410,7 @@
               <a:t> Restore the description, add basic </a:t>
             </a:r>
             <a:r>
-              <a:rPr sz="1600" b="1" i="0">
+              <a:rPr sz="1800" b="1" i="0">
                 <a:solidFill>
                   <a:srgbClr val="2B343F"/>
                 </a:solidFill>
@@ -28107,7 +28419,7 @@
               <a:t>input validation</a:t>
             </a:r>
             <a:r>
-              <a:rPr sz="1600" b="0" i="0">
+              <a:rPr sz="1800" b="0" i="0">
                 <a:solidFill>
                   <a:srgbClr val="2B343F"/>
                 </a:solidFill>
@@ -28148,6 +28460,7 @@
                 <a:spcPts val="600"/>
               </a:spcAft>
               <a:buNone/>
+              <a:defRPr/>
             </a:pPr>
             <a:r>
               <a:rPr sz="1200" b="1" i="0">
@@ -28191,6 +28504,7 @@
                 <a:spcPts val="600"/>
               </a:spcAft>
               <a:buNone/>
+              <a:defRPr/>
             </a:pPr>
             <a:r>
               <a:rPr sz="900" b="0" i="0">
@@ -28234,6 +28548,7 @@
                 <a:spcPts val="600"/>
               </a:spcAft>
               <a:buNone/>
+              <a:defRPr/>
             </a:pPr>
             <a:r>
               <a:rPr sz="900" b="0" i="0">
@@ -28275,7 +28590,12 @@
             <p:ph type="title"/>
           </p:nvPr>
         </p:nvSpPr>
-        <p:spPr/>
+        <p:spPr>
+          <a:xfrm>
+            <a:off x="0" y="2468880"/>
+            <a:ext cx="0" cy="1304995"/>
+          </a:xfrm>
+        </p:spPr>
         <p:txBody>
           <a:bodyPr wrap="square"/>
           <a:lstStyle/>
@@ -28288,6 +28608,7 @@
                 <a:spcPts val="600"/>
               </a:spcAft>
               <a:buNone/>
+              <a:defRPr/>
             </a:pPr>
             <a:r>
               <a:rPr sz="4000" b="1" i="0">
@@ -28311,7 +28632,11 @@
             <p:ph type="body" idx="10" sz="quarter"/>
           </p:nvPr>
         </p:nvSpPr>
-        <p:spPr/>
+        <p:spPr>
+          <a:xfrm>
+            <a:off x="0" y="3828739"/>
+          </a:xfrm>
+        </p:spPr>
         <p:txBody>
           <a:bodyPr wrap="square"/>
           <a:lstStyle/>
@@ -28324,9 +28649,10 @@
                 <a:spcPts val="600"/>
               </a:spcAft>
               <a:buNone/>
-            </a:pPr>
-            <a:r>
-              <a:rPr sz="1700" b="0" i="0">
+              <a:defRPr/>
+            </a:pPr>
+            <a:r>
+              <a:rPr sz="1800" b="0" i="0">
                 <a:solidFill>
                   <a:srgbClr val="E8EEF5"/>
                 </a:solidFill>
@@ -28367,9 +28693,10 @@
                 <a:spcPts val="600"/>
               </a:spcAft>
               <a:buNone/>
-            </a:pPr>
-            <a:r>
-              <a:rPr sz="1500" b="1" i="0">
+              <a:defRPr/>
+            </a:pPr>
+            <a:r>
+              <a:rPr sz="1800" b="1" i="0">
                 <a:solidFill>
                   <a:srgbClr val="FFFFFF"/>
                 </a:solidFill>
@@ -28426,6 +28753,7 @@
                 <a:spcPts val="600"/>
               </a:spcAft>
               <a:buNone/>
+              <a:defRPr/>
             </a:pPr>
             <a:r>
               <a:rPr sz="3000" b="1" i="0">
@@ -28471,9 +28799,10 @@
               </a:buClr>
               <a:buFont typeface="Arial"/>
               <a:buChar char="▪"/>
-            </a:pPr>
-            <a:r>
-              <a:rPr sz="1550" b="1" i="0">
+              <a:defRPr/>
+            </a:pPr>
+            <a:r>
+              <a:rPr sz="1800" b="1" i="0">
                 <a:solidFill>
                   <a:srgbClr val="2B343F"/>
                 </a:solidFill>
@@ -28482,7 +28811,7 @@
               <a:t>Webhook vs long-polling ingestion</a:t>
             </a:r>
             <a:r>
-              <a:rPr sz="1550" b="0" i="0">
+              <a:rPr sz="1800" b="0" i="0">
                 <a:solidFill>
                   <a:srgbClr val="2B343F"/>
                 </a:solidFill>
@@ -28504,9 +28833,10 @@
               </a:buClr>
               <a:buFont typeface="Arial"/>
               <a:buChar char="▪"/>
-            </a:pPr>
-            <a:r>
-              <a:rPr sz="1550" b="1" i="0">
+              <a:defRPr/>
+            </a:pPr>
+            <a:r>
+              <a:rPr sz="1800" b="1" i="0">
                 <a:solidFill>
                   <a:srgbClr val="2B343F"/>
                 </a:solidFill>
@@ -28515,7 +28845,7 @@
               <a:t>Session mapping</a:t>
             </a:r>
             <a:r>
-              <a:rPr sz="1550" b="0" i="0">
+              <a:rPr sz="1800" b="0" i="0">
                 <a:solidFill>
                   <a:srgbClr val="2B343F"/>
                 </a:solidFill>
@@ -28537,9 +28867,10 @@
               </a:buClr>
               <a:buFont typeface="Arial"/>
               <a:buChar char="▪"/>
-            </a:pPr>
-            <a:r>
-              <a:rPr sz="1550" b="1" i="0">
+              <a:defRPr/>
+            </a:pPr>
+            <a:r>
+              <a:rPr sz="1800" b="1" i="0">
                 <a:solidFill>
                   <a:srgbClr val="2B343F"/>
                 </a:solidFill>
@@ -28548,7 +28879,7 @@
               <a:t>Channel-specific quirks</a:t>
             </a:r>
             <a:r>
-              <a:rPr sz="1550" b="0" i="0">
+              <a:rPr sz="1800" b="0" i="0">
                 <a:solidFill>
                   <a:srgbClr val="2B343F"/>
                 </a:solidFill>
@@ -28570,9 +28901,10 @@
               </a:buClr>
               <a:buFont typeface="Arial"/>
               <a:buChar char="▪"/>
-            </a:pPr>
-            <a:r>
-              <a:rPr sz="1550" b="1" i="0">
+              <a:defRPr/>
+            </a:pPr>
+            <a:r>
+              <a:rPr sz="1800" b="1" i="0">
                 <a:solidFill>
                   <a:srgbClr val="2B343F"/>
                 </a:solidFill>
@@ -28581,7 +28913,7 @@
               <a:t>Rate limits</a:t>
             </a:r>
             <a:r>
-              <a:rPr sz="1550" b="0" i="0">
+              <a:rPr sz="1800" b="0" i="0">
                 <a:solidFill>
                   <a:srgbClr val="2B343F"/>
                 </a:solidFill>
@@ -28606,9 +28938,10 @@
               </a:buClr>
               <a:buFont typeface="Arial"/>
               <a:buChar char="▪"/>
-            </a:pPr>
-            <a:r>
-              <a:rPr sz="1550" b="1" i="0">
+              <a:defRPr/>
+            </a:pPr>
+            <a:r>
+              <a:rPr sz="1800" b="1" i="0">
                 <a:solidFill>
                   <a:srgbClr val="004282"/>
                 </a:solidFill>
@@ -28617,7 +28950,7 @@
               <a:t>Demo:</a:t>
             </a:r>
             <a:r>
-              <a:rPr sz="1550" b="0" i="0">
+              <a:rPr sz="1800" b="0" i="0">
                 <a:solidFill>
                   <a:srgbClr val="004282"/>
                 </a:solidFill>
@@ -28658,6 +28991,7 @@
                 <a:spcPts val="600"/>
               </a:spcAft>
               <a:buNone/>
+              <a:defRPr/>
             </a:pPr>
             <a:r>
               <a:rPr sz="1200" b="1" i="0">
@@ -28701,6 +29035,7 @@
                 <a:spcPts val="600"/>
               </a:spcAft>
               <a:buNone/>
+              <a:defRPr/>
             </a:pPr>
             <a:r>
               <a:rPr sz="900" b="0" i="0">
@@ -28744,6 +29079,7 @@
                 <a:spcPts val="600"/>
               </a:spcAft>
               <a:buNone/>
+              <a:defRPr/>
             </a:pPr>
             <a:r>
               <a:rPr sz="900" b="0" i="0">
@@ -28803,6 +29139,7 @@
                 <a:spcPts val="600"/>
               </a:spcAft>
               <a:buNone/>
+              <a:defRPr/>
             </a:pPr>
             <a:r>
               <a:rPr sz="3000" b="1" i="0">
@@ -28848,9 +29185,10 @@
               </a:buClr>
               <a:buFont typeface="Arial"/>
               <a:buChar char="▪"/>
-            </a:pPr>
-            <a:r>
-              <a:rPr sz="1600" b="1" i="0">
+              <a:defRPr/>
+            </a:pPr>
+            <a:r>
+              <a:rPr sz="1800" b="1" i="0">
                 <a:solidFill>
                   <a:srgbClr val="2B343F"/>
                 </a:solidFill>
@@ -28872,9 +29210,10 @@
               </a:buClr>
               <a:buFont typeface="Arial"/>
               <a:buChar char="–"/>
-            </a:pPr>
-            <a:r>
-              <a:rPr sz="1550" b="1" i="0">
+              <a:defRPr/>
+            </a:pPr>
+            <a:r>
+              <a:rPr sz="1800" b="1" i="0">
                 <a:solidFill>
                   <a:srgbClr val="2B343F"/>
                 </a:solidFill>
@@ -28883,7 +29222,7 @@
               <a:t>Turn-based:</a:t>
             </a:r>
             <a:r>
-              <a:rPr sz="1550" b="0" i="0">
+              <a:rPr sz="1800" b="0" i="0">
                 <a:solidFill>
                   <a:srgbClr val="2B343F"/>
                 </a:solidFill>
@@ -28905,9 +29244,10 @@
               </a:buClr>
               <a:buFont typeface="Arial"/>
               <a:buChar char="–"/>
-            </a:pPr>
-            <a:r>
-              <a:rPr sz="1550" b="1" i="0">
+              <a:defRPr/>
+            </a:pPr>
+            <a:r>
+              <a:rPr sz="1800" b="1" i="0">
                 <a:solidFill>
                   <a:srgbClr val="2B343F"/>
                 </a:solidFill>
@@ -28916,7 +29256,7 @@
               <a:t>Streaming:</a:t>
             </a:r>
             <a:r>
-              <a:rPr sz="1550" b="0" i="0">
+              <a:rPr sz="1800" b="0" i="0">
                 <a:solidFill>
                   <a:srgbClr val="2B343F"/>
                 </a:solidFill>
@@ -28925,7 +29265,7 @@
               <a:t> continuous ASR / TTS with </a:t>
             </a:r>
             <a:r>
-              <a:rPr sz="1550" b="1" i="0">
+              <a:rPr sz="1800" b="1" i="0">
                 <a:solidFill>
                   <a:srgbClr val="2B343F"/>
                 </a:solidFill>
@@ -28934,7 +29274,7 @@
               <a:t>barge-in</a:t>
             </a:r>
             <a:r>
-              <a:rPr sz="1550" b="0" i="0">
+              <a:rPr sz="1800" b="0" i="0">
                 <a:solidFill>
                   <a:srgbClr val="2B343F"/>
                 </a:solidFill>
@@ -28959,9 +29299,10 @@
               </a:buClr>
               <a:buFont typeface="Arial"/>
               <a:buChar char="▪"/>
-            </a:pPr>
-            <a:r>
-              <a:rPr sz="1600" b="1" i="0">
+              <a:defRPr/>
+            </a:pPr>
+            <a:r>
+              <a:rPr sz="1800" b="1" i="0">
                 <a:solidFill>
                   <a:srgbClr val="2B343F"/>
                 </a:solidFill>
@@ -28970,7 +29311,7 @@
               <a:t>ASR / TTS sit outside Hermes</a:t>
             </a:r>
             <a:r>
-              <a:rPr sz="1600" b="0" i="0">
+              <a:rPr sz="1800" b="0" i="0">
                 <a:solidFill>
                   <a:srgbClr val="2B343F"/>
                 </a:solidFill>
@@ -28992,9 +29333,10 @@
               </a:buClr>
               <a:buFont typeface="Arial"/>
               <a:buChar char="▪"/>
-            </a:pPr>
-            <a:r>
-              <a:rPr sz="1600" b="1" i="0">
+              <a:defRPr/>
+            </a:pPr>
+            <a:r>
+              <a:rPr sz="1800" b="1" i="0">
                 <a:solidFill>
                   <a:srgbClr val="2B343F"/>
                 </a:solidFill>
@@ -29003,7 +29345,7 @@
               <a:t>Latency budget</a:t>
             </a:r>
             <a:r>
-              <a:rPr sz="1600" b="0" i="0">
+              <a:rPr sz="1800" b="0" i="0">
                 <a:solidFill>
                   <a:srgbClr val="2B343F"/>
                 </a:solidFill>
@@ -29012,7 +29354,7 @@
               <a:t> — voice has a much tighter round-trip tolerance than messaging; this drives the </a:t>
             </a:r>
             <a:r>
-              <a:rPr sz="1600" b="1" i="0">
+              <a:rPr sz="1800" b="1" i="0">
                 <a:solidFill>
                   <a:srgbClr val="2B343F"/>
                 </a:solidFill>
@@ -29021,7 +29363,7 @@
               <a:t>cloud vs NanoClaw-local inference</a:t>
             </a:r>
             <a:r>
-              <a:rPr sz="1600" b="0" i="0">
+              <a:rPr sz="1800" b="0" i="0">
                 <a:solidFill>
                   <a:srgbClr val="2B343F"/>
                 </a:solidFill>
@@ -29043,9 +29385,10 @@
               </a:buClr>
               <a:buFont typeface="Arial"/>
               <a:buChar char="▪"/>
-            </a:pPr>
-            <a:r>
-              <a:rPr sz="1600" b="1" i="0">
+              <a:defRPr/>
+            </a:pPr>
+            <a:r>
+              <a:rPr sz="1800" b="1" i="0">
                 <a:solidFill>
                   <a:srgbClr val="2B343F"/>
                 </a:solidFill>
@@ -29054,7 +29397,7 @@
               <a:t>Interruptions / barge-in and silence detection</a:t>
             </a:r>
             <a:r>
-              <a:rPr sz="1600" b="0" i="0">
+              <a:rPr sz="1800" b="0" i="0">
                 <a:solidFill>
                   <a:srgbClr val="2B343F"/>
                 </a:solidFill>
@@ -29079,9 +29422,10 @@
               </a:buClr>
               <a:buFont typeface="Arial"/>
               <a:buChar char="▪"/>
-            </a:pPr>
-            <a:r>
-              <a:rPr sz="1500" b="1" i="0">
+              <a:defRPr/>
+            </a:pPr>
+            <a:r>
+              <a:rPr sz="1800" b="1" i="0">
                 <a:solidFill>
                   <a:srgbClr val="004282"/>
                 </a:solidFill>
@@ -29090,7 +29434,7 @@
               <a:t>Demo / walkthrough:</a:t>
             </a:r>
             <a:r>
-              <a:rPr sz="1500" b="0" i="0">
+              <a:rPr sz="1800" b="0" i="0">
                 <a:solidFill>
                   <a:srgbClr val="004282"/>
                 </a:solidFill>
@@ -29131,6 +29475,7 @@
                 <a:spcPts val="600"/>
               </a:spcAft>
               <a:buNone/>
+              <a:defRPr/>
             </a:pPr>
             <a:r>
               <a:rPr sz="1200" b="1" i="0">
@@ -29174,6 +29519,7 @@
                 <a:spcPts val="600"/>
               </a:spcAft>
               <a:buNone/>
+              <a:defRPr/>
             </a:pPr>
             <a:r>
               <a:rPr sz="900" b="0" i="0">
@@ -29217,6 +29563,7 @@
                 <a:spcPts val="600"/>
               </a:spcAft>
               <a:buNone/>
+              <a:defRPr/>
             </a:pPr>
             <a:r>
               <a:rPr sz="900" b="0" i="0">
@@ -29276,6 +29623,7 @@
                 <a:spcPts val="600"/>
               </a:spcAft>
               <a:buNone/>
+              <a:defRPr/>
             </a:pPr>
             <a:r>
               <a:rPr sz="3000" b="1" i="0">
@@ -29321,9 +29669,10 @@
               </a:buClr>
               <a:buFont typeface="Arial"/>
               <a:buChar char="▪"/>
-            </a:pPr>
-            <a:r>
-              <a:rPr sz="1600" b="0" i="0">
+              <a:defRPr/>
+            </a:pPr>
+            <a:r>
+              <a:rPr sz="1800" b="0" i="0">
                 <a:solidFill>
                   <a:srgbClr val="2B343F"/>
                 </a:solidFill>
@@ -29332,7 +29681,7 @@
               <a:t>Channels are a </a:t>
             </a:r>
             <a:r>
-              <a:rPr sz="1600" b="1" i="0">
+              <a:rPr sz="1800" b="1" i="0">
                 <a:solidFill>
                   <a:srgbClr val="2B343F"/>
                 </a:solidFill>
@@ -29341,7 +29690,7 @@
               <a:t>thin adapter layer</a:t>
             </a:r>
             <a:r>
-              <a:rPr sz="1600" b="0" i="0">
+              <a:rPr sz="1800" b="0" i="0">
                 <a:solidFill>
                   <a:srgbClr val="2B343F"/>
                 </a:solidFill>
@@ -29363,9 +29712,10 @@
               </a:buClr>
               <a:buFont typeface="Arial"/>
               <a:buChar char="▪"/>
-            </a:pPr>
-            <a:r>
-              <a:rPr sz="1600" b="1" i="0">
+              <a:defRPr/>
+            </a:pPr>
+            <a:r>
+              <a:rPr sz="1800" b="1" i="0">
                 <a:solidFill>
                   <a:srgbClr val="2B343F"/>
                 </a:solidFill>
@@ -29374,7 +29724,7 @@
               <a:t>Normalize inbound events</a:t>
             </a:r>
             <a:r>
-              <a:rPr sz="1600" b="0" i="0">
+              <a:rPr sz="1800" b="0" i="0">
                 <a:solidFill>
                   <a:srgbClr val="2B343F"/>
                 </a:solidFill>
@@ -29383,7 +29733,7 @@
               <a:t> (text, voice-transcribed-to-text, media) into </a:t>
             </a:r>
             <a:r>
-              <a:rPr sz="1600" b="1" i="0">
+              <a:rPr sz="1800" b="1" i="0">
                 <a:solidFill>
                   <a:srgbClr val="2B343F"/>
                 </a:solidFill>
@@ -29392,7 +29742,7 @@
               <a:t>one internal message format</a:t>
             </a:r>
             <a:r>
-              <a:rPr sz="1600" b="0" i="0">
+              <a:rPr sz="1800" b="0" i="0">
                 <a:solidFill>
                   <a:srgbClr val="2B343F"/>
                 </a:solidFill>
@@ -29414,9 +29764,10 @@
               </a:buClr>
               <a:buFont typeface="Arial"/>
               <a:buChar char="▪"/>
-            </a:pPr>
-            <a:r>
-              <a:rPr sz="1600" b="1" i="0">
+              <a:defRPr/>
+            </a:pPr>
+            <a:r>
+              <a:rPr sz="1800" b="1" i="0">
                 <a:solidFill>
                   <a:srgbClr val="2B343F"/>
                 </a:solidFill>
@@ -29425,7 +29776,7 @@
               <a:t>Intersection with heartbeats (Part 4):</a:t>
             </a:r>
             <a:r>
-              <a:rPr sz="1600" b="0" i="0">
+              <a:rPr sz="1800" b="0" i="0">
                 <a:solidFill>
                   <a:srgbClr val="2B343F"/>
                 </a:solidFill>
@@ -29466,6 +29817,7 @@
                 <a:spcPts val="600"/>
               </a:spcAft>
               <a:buNone/>
+              <a:defRPr/>
             </a:pPr>
             <a:r>
               <a:rPr sz="1200" b="1" i="0">
@@ -29509,6 +29861,7 @@
                 <a:spcPts val="600"/>
               </a:spcAft>
               <a:buNone/>
+              <a:defRPr/>
             </a:pPr>
             <a:r>
               <a:rPr sz="900" b="0" i="0">
@@ -29552,6 +29905,7 @@
                 <a:spcPts val="600"/>
               </a:spcAft>
               <a:buNone/>
+              <a:defRPr/>
             </a:pPr>
             <a:r>
               <a:rPr sz="900" b="0" i="0">
@@ -29611,6 +29965,7 @@
                 <a:spcPts val="600"/>
               </a:spcAft>
               <a:buNone/>
+              <a:defRPr/>
             </a:pPr>
             <a:r>
               <a:rPr sz="3000" b="1" i="0">
@@ -29656,9 +30011,10 @@
               </a:buClr>
               <a:buFont typeface="Arial"/>
               <a:buChar char="▪"/>
-            </a:pPr>
-            <a:r>
-              <a:rPr sz="1600" b="1" i="0">
+              <a:defRPr/>
+            </a:pPr>
+            <a:r>
+              <a:rPr sz="1800" b="1" i="0">
                 <a:solidFill>
                   <a:srgbClr val="2B343F"/>
                 </a:solidFill>
@@ -29667,7 +30023,7 @@
               <a:t>1.</a:t>
             </a:r>
             <a:r>
-              <a:rPr sz="1600" b="0" i="0">
+              <a:rPr sz="1800" b="0" i="0">
                 <a:solidFill>
                   <a:srgbClr val="2B343F"/>
                 </a:solidFill>
@@ -29689,9 +30045,10 @@
               </a:buClr>
               <a:buFont typeface="Arial"/>
               <a:buChar char="▪"/>
-            </a:pPr>
-            <a:r>
-              <a:rPr sz="1600" b="1" i="0">
+              <a:defRPr/>
+            </a:pPr>
+            <a:r>
+              <a:rPr sz="1800" b="1" i="0">
                 <a:solidFill>
                   <a:srgbClr val="2B343F"/>
                 </a:solidFill>
@@ -29700,7 +30057,7 @@
               <a:t>2.</a:t>
             </a:r>
             <a:r>
-              <a:rPr sz="1600" b="0" i="0">
+              <a:rPr sz="1800" b="0" i="0">
                 <a:solidFill>
                   <a:srgbClr val="2B343F"/>
                 </a:solidFill>
@@ -29709,7 +30066,7 @@
               <a:t> Send a message that triggers the Part 5 skill; confirm the </a:t>
             </a:r>
             <a:r>
-              <a:rPr sz="1600" b="1" i="0">
+              <a:rPr sz="1800" b="1" i="0">
                 <a:solidFill>
                   <a:srgbClr val="2B343F"/>
                 </a:solidFill>
@@ -29718,7 +30075,7 @@
               <a:t>reply round-trips</a:t>
             </a:r>
             <a:r>
-              <a:rPr sz="1600" b="0" i="0">
+              <a:rPr sz="1800" b="0" i="0">
                 <a:solidFill>
                   <a:srgbClr val="2B343F"/>
                 </a:solidFill>
@@ -29740,9 +30097,10 @@
               </a:buClr>
               <a:buFont typeface="Arial"/>
               <a:buChar char="▪"/>
-            </a:pPr>
-            <a:r>
-              <a:rPr sz="1600" b="1" i="0">
+              <a:defRPr/>
+            </a:pPr>
+            <a:r>
+              <a:rPr sz="1800" b="1" i="0">
                 <a:solidFill>
                   <a:srgbClr val="2B343F"/>
                 </a:solidFill>
@@ -29751,7 +30109,7 @@
               <a:t>3.</a:t>
             </a:r>
             <a:r>
-              <a:rPr sz="1600" b="0" i="0">
+              <a:rPr sz="1800" b="0" i="0">
                 <a:solidFill>
                   <a:srgbClr val="2B343F"/>
                 </a:solidFill>
@@ -29760,7 +30118,7 @@
               <a:t> Discuss: what would need to change to add a </a:t>
             </a:r>
             <a:r>
-              <a:rPr sz="1600" b="1" i="0">
+              <a:rPr sz="1800" b="1" i="0">
                 <a:solidFill>
                   <a:srgbClr val="2B343F"/>
                 </a:solidFill>
@@ -29769,7 +30127,7 @@
               <a:t>second channel</a:t>
             </a:r>
             <a:r>
-              <a:rPr sz="1600" b="0" i="0">
+              <a:rPr sz="1800" b="0" i="0">
                 <a:solidFill>
                   <a:srgbClr val="2B343F"/>
                 </a:solidFill>
@@ -29810,6 +30168,7 @@
                 <a:spcPts val="600"/>
               </a:spcAft>
               <a:buNone/>
+              <a:defRPr/>
             </a:pPr>
             <a:r>
               <a:rPr sz="1200" b="1" i="0">
@@ -29853,6 +30212,7 @@
                 <a:spcPts val="600"/>
               </a:spcAft>
               <a:buNone/>
+              <a:defRPr/>
             </a:pPr>
             <a:r>
               <a:rPr sz="900" b="0" i="0">
@@ -29896,6 +30256,7 @@
                 <a:spcPts val="600"/>
               </a:spcAft>
               <a:buNone/>
+              <a:defRPr/>
             </a:pPr>
             <a:r>
               <a:rPr sz="900" b="0" i="0">
@@ -29950,6 +30311,7 @@
                 <a:spcPts val="600"/>
               </a:spcAft>
               <a:buNone/>
+              <a:defRPr/>
             </a:pPr>
             <a:r>
               <a:rPr sz="4000" b="1" i="0">
@@ -29986,9 +30348,10 @@
                 <a:spcPts val="600"/>
               </a:spcAft>
               <a:buNone/>
-            </a:pPr>
-            <a:r>
-              <a:rPr sz="1700" b="0" i="0">
+              <a:defRPr/>
+            </a:pPr>
+            <a:r>
+              <a:rPr sz="1800" b="0" i="0">
                 <a:solidFill>
                   <a:srgbClr val="E8EEF5"/>
                 </a:solidFill>
@@ -30029,9 +30392,10 @@
                 <a:spcPts val="600"/>
               </a:spcAft>
               <a:buNone/>
-            </a:pPr>
-            <a:r>
-              <a:rPr sz="1500" b="1" i="0">
+              <a:defRPr/>
+            </a:pPr>
+            <a:r>
+              <a:rPr sz="1800" b="1" i="0">
                 <a:solidFill>
                   <a:srgbClr val="FFFFFF"/>
                 </a:solidFill>
@@ -30088,6 +30452,7 @@
                 <a:spcPts val="600"/>
               </a:spcAft>
               <a:buNone/>
+              <a:defRPr/>
             </a:pPr>
             <a:r>
               <a:rPr sz="3000" b="1" i="0">
@@ -30133,9 +30498,10 @@
               </a:buClr>
               <a:buFont typeface="Arial"/>
               <a:buChar char="▪"/>
-            </a:pPr>
-            <a:r>
-              <a:rPr sz="1550" b="1" i="0">
+              <a:defRPr/>
+            </a:pPr>
+            <a:r>
+              <a:rPr sz="1800" b="1" i="0">
                 <a:solidFill>
                   <a:srgbClr val="2B343F"/>
                 </a:solidFill>
@@ -30144,7 +30510,7 @@
               <a:t>The emerging A2A landscape:</a:t>
             </a:r>
             <a:r>
-              <a:rPr sz="1550" b="0" i="0">
+              <a:rPr sz="1800" b="0" i="0">
                 <a:solidFill>
                   <a:srgbClr val="2B343F"/>
                 </a:solidFill>
@@ -30166,9 +30532,10 @@
               </a:buClr>
               <a:buFont typeface="Arial"/>
               <a:buChar char="▪"/>
-            </a:pPr>
-            <a:r>
-              <a:rPr sz="1550" b="0" i="0">
+              <a:defRPr/>
+            </a:pPr>
+            <a:r>
+              <a:rPr sz="1800" b="0" i="0">
                 <a:solidFill>
                   <a:srgbClr val="2B343F"/>
                 </a:solidFill>
@@ -30177,7 +30544,7 @@
               <a:t>They assume infrastructure OpenClaw doesn't need: </a:t>
             </a:r>
             <a:r>
-              <a:rPr sz="1550" b="1" i="0">
+              <a:rPr sz="1800" b="1" i="0">
                 <a:solidFill>
                   <a:srgbClr val="2B343F"/>
                 </a:solidFill>
@@ -30202,9 +30569,10 @@
               </a:buClr>
               <a:buFont typeface="Arial"/>
               <a:buChar char="▪"/>
-            </a:pPr>
-            <a:r>
-              <a:rPr sz="1650" b="1" i="0">
+              <a:defRPr/>
+            </a:pPr>
+            <a:r>
+              <a:rPr sz="1800" b="1" i="0">
                 <a:solidFill>
                   <a:srgbClr val="004282"/>
                 </a:solidFill>
@@ -30226,9 +30594,10 @@
               </a:buClr>
               <a:buFont typeface="Arial"/>
               <a:buChar char="–"/>
-            </a:pPr>
-            <a:r>
-              <a:rPr sz="1550" b="0" i="0">
+              <a:defRPr/>
+            </a:pPr>
+            <a:r>
+              <a:rPr sz="1800" b="0" i="0">
                 <a:solidFill>
                   <a:srgbClr val="2B343F"/>
                 </a:solidFill>
@@ -30237,7 +30606,7 @@
               <a:t>Durable, replayable, multi-consumer messaging </a:t>
             </a:r>
             <a:r>
-              <a:rPr sz="1550" b="1" i="0">
+              <a:rPr sz="1800" b="1" i="0">
                 <a:solidFill>
                   <a:srgbClr val="2B343F"/>
                 </a:solidFill>
@@ -30246,7 +30615,7 @@
               <a:t>for free</a:t>
             </a:r>
             <a:r>
-              <a:rPr sz="1550" b="0" i="0">
+              <a:rPr sz="1800" b="0" i="0">
                 <a:solidFill>
                   <a:srgbClr val="2B343F"/>
                 </a:solidFill>
@@ -30271,9 +30640,10 @@
               </a:buClr>
               <a:buFont typeface="Arial"/>
               <a:buChar char="▪"/>
-            </a:pPr>
-            <a:r>
-              <a:rPr sz="1550" b="1" i="0">
+              <a:defRPr/>
+            </a:pPr>
+            <a:r>
+              <a:rPr sz="1800" b="1" i="0">
                 <a:solidFill>
                   <a:srgbClr val="2B343F"/>
                 </a:solidFill>
@@ -30282,7 +30652,7 @@
               <a:t>Design goal:</a:t>
             </a:r>
             <a:r>
-              <a:rPr sz="1550" b="0" i="0">
+              <a:rPr sz="1800" b="0" i="0">
                 <a:solidFill>
                   <a:srgbClr val="2B343F"/>
                 </a:solidFill>
@@ -30291,7 +30661,7 @@
               <a:t> an A2A layer that is natively </a:t>
             </a:r>
             <a:r>
-              <a:rPr sz="1550" b="1" i="0">
+              <a:rPr sz="1800" b="1" i="0">
                 <a:solidFill>
                   <a:srgbClr val="2B343F"/>
                 </a:solidFill>
@@ -30300,7 +30670,7 @@
               <a:t>stream-based</a:t>
             </a:r>
             <a:r>
-              <a:rPr sz="1550" b="0" i="0">
+              <a:rPr sz="1800" b="0" i="0">
                 <a:solidFill>
                   <a:srgbClr val="2B343F"/>
                 </a:solidFill>
@@ -30309,7 +30679,7 @@
               <a:t>, </a:t>
             </a:r>
             <a:r>
-              <a:rPr sz="1550" b="1" i="0">
+              <a:rPr sz="1800" b="1" i="0">
                 <a:solidFill>
                   <a:srgbClr val="2B343F"/>
                 </a:solidFill>
@@ -30318,7 +30688,7 @@
               <a:t>heartbeat-aware</a:t>
             </a:r>
             <a:r>
-              <a:rPr sz="1550" b="0" i="0">
+              <a:rPr sz="1800" b="0" i="0">
                 <a:solidFill>
                   <a:srgbClr val="2B343F"/>
                 </a:solidFill>
@@ -30327,7 +30697,7 @@
               <a:t> (Part 4) and </a:t>
             </a:r>
             <a:r>
-              <a:rPr sz="1550" b="1" i="0">
+              <a:rPr sz="1800" b="1" i="0">
                 <a:solidFill>
                   <a:srgbClr val="2B343F"/>
                 </a:solidFill>
@@ -30336,7 +30706,7 @@
               <a:t>channel-agnostic</a:t>
             </a:r>
             <a:r>
-              <a:rPr sz="1550" b="0" i="0">
+              <a:rPr sz="1800" b="0" i="0">
                 <a:solidFill>
                   <a:srgbClr val="2B343F"/>
                 </a:solidFill>
@@ -30377,6 +30747,7 @@
                 <a:spcPts val="600"/>
               </a:spcAft>
               <a:buNone/>
+              <a:defRPr/>
             </a:pPr>
             <a:r>
               <a:rPr sz="1200" b="1" i="0">
@@ -30420,6 +30791,7 @@
                 <a:spcPts val="600"/>
               </a:spcAft>
               <a:buNone/>
+              <a:defRPr/>
             </a:pPr>
             <a:r>
               <a:rPr sz="900" b="0" i="0">
@@ -30463,6 +30835,7 @@
                 <a:spcPts val="600"/>
               </a:spcAft>
               <a:buNone/>
+              <a:defRPr/>
             </a:pPr>
             <a:r>
               <a:rPr sz="900" b="0" i="0">
@@ -30522,6 +30895,7 @@
                 <a:spcPts val="600"/>
               </a:spcAft>
               <a:buNone/>
+              <a:defRPr/>
             </a:pPr>
             <a:r>
               <a:rPr sz="3000" b="1" i="0">
@@ -30567,9 +30941,10 @@
               </a:buClr>
               <a:buFont typeface="Arial"/>
               <a:buChar char="▪"/>
-            </a:pPr>
-            <a:r>
-              <a:rPr sz="1500" b="1" i="0">
+              <a:defRPr/>
+            </a:pPr>
+            <a:r>
+              <a:rPr sz="1800" b="1" i="0">
                 <a:solidFill>
                   <a:srgbClr val="2B343F"/>
                 </a:solidFill>
@@ -30578,7 +30953,7 @@
               <a:t>Message envelope:</a:t>
             </a:r>
             <a:r>
-              <a:rPr sz="1500" b="0" i="0">
+              <a:rPr sz="1800" b="0" i="0">
                 <a:solidFill>
                   <a:srgbClr val="2B343F"/>
                 </a:solidFill>
@@ -30587,7 +30962,7 @@
               <a:t> sender agent ID · recipient agent ID (or broadcast topic) · task ID · payload · </a:t>
             </a:r>
             <a:r>
-              <a:rPr sz="1500" b="1" i="0">
+              <a:rPr sz="1800" b="1" i="0">
                 <a:solidFill>
                   <a:srgbClr val="2B343F"/>
                 </a:solidFill>
@@ -30596,7 +30971,7 @@
               <a:t>correlation ID</a:t>
             </a:r>
             <a:r>
-              <a:rPr sz="1500" b="0" i="0">
+              <a:rPr sz="1800" b="0" i="0">
                 <a:solidFill>
                   <a:srgbClr val="2B343F"/>
                 </a:solidFill>
@@ -30618,9 +30993,10 @@
               </a:buClr>
               <a:buFont typeface="Arial"/>
               <a:buChar char="▪"/>
-            </a:pPr>
-            <a:r>
-              <a:rPr sz="1500" b="1" i="0">
+              <a:defRPr/>
+            </a:pPr>
+            <a:r>
+              <a:rPr sz="1800" b="1" i="0">
                 <a:solidFill>
                   <a:srgbClr val="2B343F"/>
                 </a:solidFill>
@@ -30629,7 +31005,7 @@
               <a:t>Stream topology:</a:t>
             </a:r>
             <a:r>
-              <a:rPr sz="1500" b="0" i="0">
+              <a:rPr sz="1800" b="0" i="0">
                 <a:solidFill>
                   <a:srgbClr val="2B343F"/>
                 </a:solidFill>
@@ -30638,7 +31014,7 @@
               <a:t> one stream per agent inbox </a:t>
             </a:r>
             <a:r>
-              <a:rPr sz="1500" b="1" i="0">
+              <a:rPr sz="1800" b="1" i="0">
                 <a:solidFill>
                   <a:srgbClr val="2B343F"/>
                 </a:solidFill>
@@ -30647,7 +31023,7 @@
               <a:t>vs</a:t>
             </a:r>
             <a:r>
-              <a:rPr sz="1500" b="0" i="0">
+              <a:rPr sz="1800" b="0" i="0">
                 <a:solidFill>
                   <a:srgbClr val="2B343F"/>
                 </a:solidFill>
@@ -30669,9 +31045,10 @@
               </a:buClr>
               <a:buFont typeface="Arial"/>
               <a:buChar char="–"/>
-            </a:pPr>
-            <a:r>
-              <a:rPr sz="1500" b="1" i="0">
+              <a:defRPr/>
+            </a:pPr>
+            <a:r>
+              <a:rPr sz="1800" b="1" i="0">
                 <a:solidFill>
                   <a:srgbClr val="2B343F"/>
                 </a:solidFill>
@@ -30680,7 +31057,7 @@
               <a:t>Fan-out</a:t>
             </a:r>
             <a:r>
-              <a:rPr sz="1500" b="0" i="0">
+              <a:rPr sz="1800" b="0" i="0">
                 <a:solidFill>
                   <a:srgbClr val="2B343F"/>
                 </a:solidFill>
@@ -30689,7 +31066,7 @@
               <a:t> (broadcast to many agents) vs </a:t>
             </a:r>
             <a:r>
-              <a:rPr sz="1500" b="1" i="0">
+              <a:rPr sz="1800" b="1" i="0">
                 <a:solidFill>
                   <a:srgbClr val="2B343F"/>
                 </a:solidFill>
@@ -30698,7 +31075,7 @@
               <a:t>fan-in</a:t>
             </a:r>
             <a:r>
-              <a:rPr sz="1500" b="0" i="0">
+              <a:rPr sz="1800" b="0" i="0">
                 <a:solidFill>
                   <a:srgbClr val="2B343F"/>
                 </a:solidFill>
@@ -30723,9 +31100,10 @@
               </a:buClr>
               <a:buFont typeface="Arial"/>
               <a:buChar char="▪"/>
-            </a:pPr>
-            <a:r>
-              <a:rPr sz="1500" b="1" i="0">
+              <a:defRPr/>
+            </a:pPr>
+            <a:r>
+              <a:rPr sz="1800" b="1" i="0">
                 <a:solidFill>
                   <a:srgbClr val="2B343F"/>
                 </a:solidFill>
@@ -30734,7 +31112,7 @@
               <a:t>Task lifecycle states:</a:t>
             </a:r>
             <a:r>
-              <a:rPr sz="1500" b="0" i="0">
+              <a:rPr sz="1800" b="0" i="0">
                 <a:solidFill>
                   <a:srgbClr val="2B343F"/>
                 </a:solidFill>
@@ -30756,9 +31134,10 @@
               </a:buClr>
               <a:buFont typeface="Arial"/>
               <a:buChar char="–"/>
-            </a:pPr>
-            <a:r>
-              <a:rPr sz="1500" b="0" i="0">
+              <a:defRPr/>
+            </a:pPr>
+            <a:r>
+              <a:rPr sz="1800" b="0" i="0">
                 <a:solidFill>
                   <a:srgbClr val="2B343F"/>
                 </a:solidFill>
@@ -30767,7 +31146,7 @@
               <a:t>Mirrored as stream entries — any consumer can </a:t>
             </a:r>
             <a:r>
-              <a:rPr sz="1500" b="1" i="0">
+              <a:rPr sz="1800" b="1" i="0">
                 <a:solidFill>
                   <a:srgbClr val="2B343F"/>
                 </a:solidFill>
@@ -30776,7 +31155,7 @@
               <a:t>reconstruct task history from the stream itself</a:t>
             </a:r>
             <a:r>
-              <a:rPr sz="1500" b="0" i="0">
+              <a:rPr sz="1800" b="0" i="0">
                 <a:solidFill>
                   <a:srgbClr val="2B343F"/>
                 </a:solidFill>
@@ -30801,9 +31180,10 @@
               </a:buClr>
               <a:buFont typeface="Arial"/>
               <a:buChar char="▪"/>
-            </a:pPr>
-            <a:r>
-              <a:rPr sz="1500" b="1" i="0">
+              <a:defRPr/>
+            </a:pPr>
+            <a:r>
+              <a:rPr sz="1800" b="1" i="0">
                 <a:solidFill>
                   <a:srgbClr val="004282"/>
                 </a:solidFill>
@@ -30812,7 +31192,7 @@
               <a:t>Key difference:</a:t>
             </a:r>
             <a:r>
-              <a:rPr sz="1500" b="0" i="0">
+              <a:rPr sz="1800" b="0" i="0">
                 <a:solidFill>
                   <a:srgbClr val="004282"/>
                 </a:solidFill>
@@ -30821,7 +31201,7 @@
               <a:t> typical A2A treats discovery &amp; negotiation as separate from transport; here they're </a:t>
             </a:r>
             <a:r>
-              <a:rPr sz="1500" b="1" i="0">
+              <a:rPr sz="1800" b="1" i="0">
                 <a:solidFill>
                   <a:srgbClr val="004282"/>
                 </a:solidFill>
@@ -30862,6 +31242,7 @@
                 <a:spcPts val="600"/>
               </a:spcAft>
               <a:buNone/>
+              <a:defRPr/>
             </a:pPr>
             <a:r>
               <a:rPr sz="1200" b="1" i="0">
@@ -30905,6 +31286,7 @@
                 <a:spcPts val="600"/>
               </a:spcAft>
               <a:buNone/>
+              <a:defRPr/>
             </a:pPr>
             <a:r>
               <a:rPr sz="900" b="0" i="0">
@@ -30948,6 +31330,7 @@
                 <a:spcPts val="600"/>
               </a:spcAft>
               <a:buNone/>
+              <a:defRPr/>
             </a:pPr>
             <a:r>
               <a:rPr sz="900" b="0" i="0">
@@ -31007,6 +31390,7 @@
                 <a:spcPts val="600"/>
               </a:spcAft>
               <a:buNone/>
+              <a:defRPr/>
             </a:pPr>
             <a:r>
               <a:rPr sz="3000" b="1" i="0">
@@ -31052,9 +31436,10 @@
               </a:buClr>
               <a:buFont typeface="Arial"/>
               <a:buChar char="▪"/>
-            </a:pPr>
-            <a:r>
-              <a:rPr sz="1600" b="1" i="0">
+              <a:defRPr/>
+            </a:pPr>
+            <a:r>
+              <a:rPr sz="1800" b="1" i="0">
                 <a:solidFill>
                   <a:srgbClr val="2B343F"/>
                 </a:solidFill>
@@ -31076,9 +31461,10 @@
               </a:buClr>
               <a:buFont typeface="Arial"/>
               <a:buChar char="–"/>
-            </a:pPr>
-            <a:r>
-              <a:rPr sz="1600" b="0" i="0">
+              <a:defRPr/>
+            </a:pPr>
+            <a:r>
+              <a:rPr sz="1800" b="0" i="0">
                 <a:solidFill>
                   <a:srgbClr val="2B343F"/>
                 </a:solidFill>
@@ -31087,7 +31473,7 @@
               <a:t>The heartbeat payload includes which </a:t>
             </a:r>
             <a:r>
-              <a:rPr sz="1600" b="1" i="0">
+              <a:rPr sz="1800" b="1" i="0">
                 <a:solidFill>
                   <a:srgbClr val="2B343F"/>
                 </a:solidFill>
@@ -31096,7 +31482,7 @@
               <a:t>skills (Part 5)</a:t>
             </a:r>
             <a:r>
-              <a:rPr sz="1600" b="0" i="0">
+              <a:rPr sz="1800" b="0" i="0">
                 <a:solidFill>
                   <a:srgbClr val="2B343F"/>
                 </a:solidFill>
@@ -31105,7 +31491,7 @@
               <a:t> the agent currently has registered → the orchestrator's routing decision uses </a:t>
             </a:r>
             <a:r>
-              <a:rPr sz="1600" b="1" i="0">
+              <a:rPr sz="1800" b="1" i="0">
                 <a:solidFill>
                   <a:srgbClr val="2B343F"/>
                 </a:solidFill>
@@ -31130,9 +31516,10 @@
               </a:buClr>
               <a:buFont typeface="Arial"/>
               <a:buChar char="▪"/>
-            </a:pPr>
-            <a:r>
-              <a:rPr sz="1600" b="1" i="0">
+              <a:defRPr/>
+            </a:pPr>
+            <a:r>
+              <a:rPr sz="1800" b="1" i="0">
                 <a:solidFill>
                   <a:srgbClr val="2B343F"/>
                 </a:solidFill>
@@ -31154,9 +31541,10 @@
               </a:buClr>
               <a:buFont typeface="Arial"/>
               <a:buChar char="–"/>
-            </a:pPr>
-            <a:r>
-              <a:rPr sz="1600" b="0" i="0">
+              <a:defRPr/>
+            </a:pPr>
+            <a:r>
+              <a:rPr sz="1800" b="0" i="0">
                 <a:solidFill>
                   <a:srgbClr val="2B343F"/>
                 </a:solidFill>
@@ -31165,7 +31553,7 @@
               <a:t>Incoming task → match required skill → find agents advertising that skill → filter to agents with a </a:t>
             </a:r>
             <a:r>
-              <a:rPr sz="1600" b="1" i="0">
+              <a:rPr sz="1800" b="1" i="0">
                 <a:solidFill>
                   <a:srgbClr val="2B343F"/>
                 </a:solidFill>
@@ -31174,7 +31562,7 @@
               <a:t>live heartbeat</a:t>
             </a:r>
             <a:r>
-              <a:rPr sz="1600" b="0" i="0">
+              <a:rPr sz="1800" b="0" i="0">
                 <a:solidFill>
                   <a:srgbClr val="2B343F"/>
                 </a:solidFill>
@@ -31199,9 +31587,10 @@
               </a:buClr>
               <a:buFont typeface="Arial"/>
               <a:buChar char="▪"/>
-            </a:pPr>
-            <a:r>
-              <a:rPr sz="1600" b="1" i="0">
+              <a:defRPr/>
+            </a:pPr>
+            <a:r>
+              <a:rPr sz="1800" b="1" i="0">
                 <a:solidFill>
                   <a:srgbClr val="2B343F"/>
                 </a:solidFill>
@@ -31210,7 +31599,7 @@
               <a:t>Failure handling unique to this design:</a:t>
             </a:r>
             <a:r>
-              <a:rPr sz="1600" b="0" i="0">
+              <a:rPr sz="1800" b="0" i="0">
                 <a:solidFill>
                   <a:srgbClr val="2B343F"/>
                 </a:solidFill>
@@ -31219,7 +31608,7 @@
               <a:t> tasks live on a replayable stream, so a newly-spun-up agent (or a recovering NanoClaw device) </a:t>
             </a:r>
             <a:r>
-              <a:rPr sz="1600" b="1" i="0">
+              <a:rPr sz="1800" b="1" i="0">
                 <a:solidFill>
                   <a:srgbClr val="2B343F"/>
                 </a:solidFill>
@@ -31260,6 +31649,7 @@
                 <a:spcPts val="600"/>
               </a:spcAft>
               <a:buNone/>
+              <a:defRPr/>
             </a:pPr>
             <a:r>
               <a:rPr sz="1200" b="1" i="0">
@@ -31303,6 +31693,7 @@
                 <a:spcPts val="600"/>
               </a:spcAft>
               <a:buNone/>
+              <a:defRPr/>
             </a:pPr>
             <a:r>
               <a:rPr sz="900" b="0" i="0">
@@ -31346,6 +31737,7 @@
                 <a:spcPts val="600"/>
               </a:spcAft>
               <a:buNone/>
+              <a:defRPr/>
             </a:pPr>
             <a:r>
               <a:rPr sz="900" b="0" i="0">
@@ -31405,6 +31797,7 @@
                 <a:spcPts val="600"/>
               </a:spcAft>
               <a:buNone/>
+              <a:defRPr/>
             </a:pPr>
             <a:r>
               <a:rPr sz="3000" b="1" i="0">
@@ -31446,9 +31839,10 @@
                 <a:spcPts val="1000"/>
               </a:spcAft>
               <a:buNone/>
-            </a:pPr>
-            <a:r>
-              <a:rPr sz="1600" b="1" i="0">
+              <a:defRPr/>
+            </a:pPr>
+            <a:r>
+              <a:rPr sz="1800" b="1" i="0">
                 <a:solidFill>
                   <a:srgbClr val="004282"/>
                 </a:solidFill>
@@ -31470,9 +31864,10 @@
               </a:buClr>
               <a:buFont typeface="Arial"/>
               <a:buChar char="▪"/>
-            </a:pPr>
-            <a:r>
-              <a:rPr sz="1550" b="1" i="0">
+              <a:defRPr/>
+            </a:pPr>
+            <a:r>
+              <a:rPr sz="1800" b="1" i="0">
                 <a:solidFill>
                   <a:srgbClr val="2B343F"/>
                 </a:solidFill>
@@ -31481,7 +31876,7 @@
               <a:t>Explain</a:t>
             </a:r>
             <a:r>
-              <a:rPr sz="1550" b="0" i="0">
+              <a:rPr sz="1800" b="0" i="0">
                 <a:solidFill>
                   <a:srgbClr val="2B343F"/>
                 </a:solidFill>
@@ -31503,9 +31898,10 @@
               </a:buClr>
               <a:buFont typeface="Arial"/>
               <a:buChar char="▪"/>
-            </a:pPr>
-            <a:r>
-              <a:rPr sz="1550" b="1" i="0">
+              <a:defRPr/>
+            </a:pPr>
+            <a:r>
+              <a:rPr sz="1800" b="1" i="0">
                 <a:solidFill>
                   <a:srgbClr val="2B343F"/>
                 </a:solidFill>
@@ -31514,7 +31910,7 @@
               <a:t>Design a heartbeat / liveness mechanism</a:t>
             </a:r>
             <a:r>
-              <a:rPr sz="1550" b="0" i="0">
+              <a:rPr sz="1800" b="0" i="0">
                 <a:solidFill>
                   <a:srgbClr val="2B343F"/>
                 </a:solidFill>
@@ -31536,9 +31932,10 @@
               </a:buClr>
               <a:buFont typeface="Arial"/>
               <a:buChar char="▪"/>
-            </a:pPr>
-            <a:r>
-              <a:rPr sz="1550" b="1" i="0">
+              <a:defRPr/>
+            </a:pPr>
+            <a:r>
+              <a:rPr sz="1800" b="1" i="0">
                 <a:solidFill>
                   <a:srgbClr val="2B343F"/>
                 </a:solidFill>
@@ -31547,7 +31944,7 @@
               <a:t>Write agent skills</a:t>
             </a:r>
             <a:r>
-              <a:rPr sz="1550" b="0" i="0">
+              <a:rPr sz="1800" b="0" i="0">
                 <a:solidFill>
                   <a:srgbClr val="2B343F"/>
                 </a:solidFill>
@@ -31569,9 +31966,10 @@
               </a:buClr>
               <a:buFont typeface="Arial"/>
               <a:buChar char="▪"/>
-            </a:pPr>
-            <a:r>
-              <a:rPr sz="1550" b="1" i="0">
+              <a:defRPr/>
+            </a:pPr>
+            <a:r>
+              <a:rPr sz="1800" b="1" i="0">
                 <a:solidFill>
                   <a:srgbClr val="2B343F"/>
                 </a:solidFill>
@@ -31580,7 +31978,7 @@
               <a:t>Wire an agent to real-world channels</a:t>
             </a:r>
             <a:r>
-              <a:rPr sz="1550" b="0" i="0">
+              <a:rPr sz="1800" b="0" i="0">
                 <a:solidFill>
                   <a:srgbClr val="2B343F"/>
                 </a:solidFill>
@@ -31602,9 +32000,10 @@
               </a:buClr>
               <a:buFont typeface="Arial"/>
               <a:buChar char="▪"/>
-            </a:pPr>
-            <a:r>
-              <a:rPr sz="1550" b="1" i="0">
+              <a:defRPr/>
+            </a:pPr>
+            <a:r>
+              <a:rPr sz="1800" b="1" i="0">
                 <a:solidFill>
                   <a:srgbClr val="2B343F"/>
                 </a:solidFill>
@@ -31613,7 +32012,7 @@
               <a:t>Design a custom agent-to-agent (A2A) protocol</a:t>
             </a:r>
             <a:r>
-              <a:rPr sz="1550" b="0" i="0">
+              <a:rPr sz="1800" b="0" i="0">
                 <a:solidFill>
                   <a:srgbClr val="2B343F"/>
                 </a:solidFill>
@@ -31635,9 +32034,10 @@
               </a:buClr>
               <a:buFont typeface="Arial"/>
               <a:buChar char="▪"/>
-            </a:pPr>
-            <a:r>
-              <a:rPr sz="1550" b="1" i="0">
+              <a:defRPr/>
+            </a:pPr>
+            <a:r>
+              <a:rPr sz="1800" b="1" i="0">
                 <a:solidFill>
                   <a:srgbClr val="2B343F"/>
                 </a:solidFill>
@@ -31646,7 +32046,7 @@
               <a:t>Build an end-to-end flow:</a:t>
             </a:r>
             <a:r>
-              <a:rPr sz="1550" b="0" i="0">
+              <a:rPr sz="1800" b="0" i="0">
                 <a:solidFill>
                   <a:srgbClr val="2B343F"/>
                 </a:solidFill>
@@ -31687,6 +32087,7 @@
                 <a:spcPts val="600"/>
               </a:spcAft>
               <a:buNone/>
+              <a:defRPr/>
             </a:pPr>
             <a:r>
               <a:rPr sz="1200" b="1" i="0">
@@ -31730,6 +32131,7 @@
                 <a:spcPts val="600"/>
               </a:spcAft>
               <a:buNone/>
+              <a:defRPr/>
             </a:pPr>
             <a:r>
               <a:rPr sz="900" b="0" i="0">
@@ -31773,6 +32175,7 @@
                 <a:spcPts val="600"/>
               </a:spcAft>
               <a:buNone/>
+              <a:defRPr/>
             </a:pPr>
             <a:r>
               <a:rPr sz="900" b="0" i="0">
@@ -31832,6 +32235,7 @@
                 <a:spcPts val="600"/>
               </a:spcAft>
               <a:buNone/>
+              <a:defRPr/>
             </a:pPr>
             <a:r>
               <a:rPr sz="3000" b="1" i="0">
@@ -31877,9 +32281,10 @@
               </a:buClr>
               <a:buFont typeface="Arial"/>
               <a:buChar char="▪"/>
-            </a:pPr>
-            <a:r>
-              <a:rPr sz="1600" b="1" i="0">
+              <a:defRPr/>
+            </a:pPr>
+            <a:r>
+              <a:rPr sz="1800" b="1" i="0">
                 <a:solidFill>
                   <a:srgbClr val="2B343F"/>
                 </a:solidFill>
@@ -31888,7 +32293,7 @@
               <a:t>1.</a:t>
             </a:r>
             <a:r>
-              <a:rPr sz="1600" b="0" i="0">
+              <a:rPr sz="1800" b="0" i="0">
                 <a:solidFill>
                   <a:srgbClr val="2B343F"/>
                 </a:solidFill>
@@ -31897,7 +32302,7 @@
               <a:t> Define the </a:t>
             </a:r>
             <a:r>
-              <a:rPr sz="1600" b="1" i="0">
+              <a:rPr sz="1800" b="1" i="0">
                 <a:solidFill>
                   <a:srgbClr val="2B343F"/>
                 </a:solidFill>
@@ -31906,7 +32311,7 @@
               <a:t>message envelope schema</a:t>
             </a:r>
             <a:r>
-              <a:rPr sz="1600" b="0" i="0">
+              <a:rPr sz="1800" b="0" i="0">
                 <a:solidFill>
                   <a:srgbClr val="2B343F"/>
                 </a:solidFill>
@@ -31928,9 +32333,10 @@
               </a:buClr>
               <a:buFont typeface="Arial"/>
               <a:buChar char="▪"/>
-            </a:pPr>
-            <a:r>
-              <a:rPr sz="1600" b="1" i="0">
+              <a:defRPr/>
+            </a:pPr>
+            <a:r>
+              <a:rPr sz="1800" b="1" i="0">
                 <a:solidFill>
                   <a:srgbClr val="2B343F"/>
                 </a:solidFill>
@@ -31939,7 +32345,7 @@
               <a:t>2.</a:t>
             </a:r>
             <a:r>
-              <a:rPr sz="1600" b="0" i="0">
+              <a:rPr sz="1800" b="0" i="0">
                 <a:solidFill>
                   <a:srgbClr val="2B343F"/>
                 </a:solidFill>
@@ -31961,9 +32367,10 @@
               </a:buClr>
               <a:buFont typeface="Arial"/>
               <a:buChar char="▪"/>
-            </a:pPr>
-            <a:r>
-              <a:rPr sz="1600" b="1" i="0">
+              <a:defRPr/>
+            </a:pPr>
+            <a:r>
+              <a:rPr sz="1800" b="1" i="0">
                 <a:solidFill>
                   <a:srgbClr val="2B343F"/>
                 </a:solidFill>
@@ -31972,7 +32379,7 @@
               <a:t>3.</a:t>
             </a:r>
             <a:r>
-              <a:rPr sz="1600" b="0" i="0">
+              <a:rPr sz="1800" b="0" i="0">
                 <a:solidFill>
                   <a:srgbClr val="2B343F"/>
                 </a:solidFill>
@@ -31981,7 +32388,7 @@
               <a:t> Kill and restart Agent B </a:t>
             </a:r>
             <a:r>
-              <a:rPr sz="1600" b="1" i="0">
+              <a:rPr sz="1800" b="1" i="0">
                 <a:solidFill>
                   <a:srgbClr val="2B343F"/>
                 </a:solidFill>
@@ -31990,7 +32397,7 @@
               <a:t>mid-task</a:t>
             </a:r>
             <a:r>
-              <a:rPr sz="1600" b="0" i="0">
+              <a:rPr sz="1800" b="0" i="0">
                 <a:solidFill>
                   <a:srgbClr val="2B343F"/>
                 </a:solidFill>
@@ -32012,9 +32419,10 @@
               </a:buClr>
               <a:buFont typeface="Arial"/>
               <a:buChar char="▪"/>
-            </a:pPr>
-            <a:r>
-              <a:rPr sz="1600" b="1" i="0">
+              <a:defRPr/>
+            </a:pPr>
+            <a:r>
+              <a:rPr sz="1800" b="1" i="0">
                 <a:solidFill>
                   <a:srgbClr val="2B343F"/>
                 </a:solidFill>
@@ -32023,7 +32431,7 @@
               <a:t>4.</a:t>
             </a:r>
             <a:r>
-              <a:rPr sz="1600" b="0" i="0">
+              <a:rPr sz="1800" b="0" i="0">
                 <a:solidFill>
                   <a:srgbClr val="2B343F"/>
                 </a:solidFill>
@@ -32032,7 +32440,7 @@
               <a:t> Discuss: what would break if you swapped this for a standard </a:t>
             </a:r>
             <a:r>
-              <a:rPr sz="1600" b="1" i="0">
+              <a:rPr sz="1800" b="1" i="0">
                 <a:solidFill>
                   <a:srgbClr val="2B343F"/>
                 </a:solidFill>
@@ -32041,7 +32449,7 @@
               <a:t>synchronous</a:t>
             </a:r>
             <a:r>
-              <a:rPr sz="1600" b="0" i="0">
+              <a:rPr sz="1800" b="0" i="0">
                 <a:solidFill>
                   <a:srgbClr val="2B343F"/>
                 </a:solidFill>
@@ -32082,6 +32490,7 @@
                 <a:spcPts val="600"/>
               </a:spcAft>
               <a:buNone/>
+              <a:defRPr/>
             </a:pPr>
             <a:r>
               <a:rPr sz="1200" b="1" i="0">
@@ -32125,6 +32534,7 @@
                 <a:spcPts val="600"/>
               </a:spcAft>
               <a:buNone/>
+              <a:defRPr/>
             </a:pPr>
             <a:r>
               <a:rPr sz="900" b="0" i="0">
@@ -32168,6 +32578,7 @@
                 <a:spcPts val="600"/>
               </a:spcAft>
               <a:buNone/>
+              <a:defRPr/>
             </a:pPr>
             <a:r>
               <a:rPr sz="900" b="0" i="0">
@@ -32227,6 +32638,7 @@
                 <a:spcPts val="600"/>
               </a:spcAft>
               <a:buNone/>
+              <a:defRPr/>
             </a:pPr>
             <a:r>
               <a:rPr sz="3000" b="1" i="0">
@@ -32270,6 +32682,7 @@
                 <a:spcPts val="600"/>
               </a:spcAft>
               <a:buNone/>
+              <a:defRPr/>
             </a:pPr>
             <a:r>
               <a:rPr sz="1200" b="1" i="0">
@@ -32313,6 +32726,7 @@
                 <a:spcPts val="600"/>
               </a:spcAft>
               <a:buNone/>
+              <a:defRPr/>
             </a:pPr>
             <a:r>
               <a:rPr sz="900" b="0" i="0">
@@ -32356,6 +32770,7 @@
                 <a:spcPts val="600"/>
               </a:spcAft>
               <a:buNone/>
+              <a:defRPr/>
             </a:pPr>
             <a:r>
               <a:rPr sz="900" b="0" i="0">
@@ -32377,8 +32792,8 @@
         </p:nvSpPr>
         <p:spPr>
           <a:xfrm>
-            <a:off x="841248" y="1371600"/>
-            <a:ext cx="10607040" cy="868680"/>
+            <a:off x="841248" y="1380744"/>
+            <a:ext cx="10607040" cy="1091522"/>
           </a:xfrm>
           <a:prstGeom prst="rect">
             <a:avLst/>
@@ -32399,9 +32814,10 @@
                 <a:spcPts val="600"/>
               </a:spcAft>
               <a:buNone/>
-            </a:pPr>
-            <a:r>
-              <a:rPr sz="1400" b="1" i="0">
+              <a:defRPr/>
+            </a:pPr>
+            <a:r>
+              <a:rPr sz="1800" b="1" i="0">
                 <a:solidFill>
                   <a:srgbClr val="2B343F"/>
                 </a:solidFill>
@@ -32410,7 +32826,7 @@
               <a:t>Goal:</a:t>
             </a:r>
             <a:r>
-              <a:rPr sz="1400" b="0" i="0">
+              <a:rPr sz="1800" b="0" i="0">
                 <a:solidFill>
                   <a:srgbClr val="2B343F"/>
                 </a:solidFill>
@@ -32419,7 +32835,7 @@
               <a:t> a message (or voice input) arrives over a real channel → routed via the custom A2A protocol to a NanoClaw edge agent running Hermes → invokes a registered skill — while the OpenClaw orchestrator only dispatches to agents with </a:t>
             </a:r>
             <a:r>
-              <a:rPr sz="1400" b="1" i="0">
+              <a:rPr sz="1800" b="1" i="0">
                 <a:solidFill>
                   <a:srgbClr val="2B343F"/>
                 </a:solidFill>
@@ -32428,7 +32844,7 @@
               <a:t>healthy heartbeats</a:t>
             </a:r>
             <a:r>
-              <a:rPr sz="1400" b="0" i="0">
+              <a:rPr sz="1800" b="0" i="0">
                 <a:solidFill>
                   <a:srgbClr val="2B343F"/>
                 </a:solidFill>
@@ -32437,7 +32853,7 @@
               <a:t> advertising the </a:t>
             </a:r>
             <a:r>
-              <a:rPr sz="1400" b="1" i="0">
+              <a:rPr sz="1800" b="1" i="0">
                 <a:solidFill>
                   <a:srgbClr val="2B343F"/>
                 </a:solidFill>
@@ -32446,7 +32862,7 @@
               <a:t>right capability</a:t>
             </a:r>
             <a:r>
-              <a:rPr sz="1400" b="0" i="0">
+              <a:rPr sz="1800" b="0" i="0">
                 <a:solidFill>
                   <a:srgbClr val="2B343F"/>
                 </a:solidFill>
@@ -32465,7 +32881,7 @@
         </p:nvSpPr>
         <p:spPr>
           <a:xfrm>
-            <a:off x="841248" y="2377440"/>
+            <a:off x="841248" y="2536274"/>
             <a:ext cx="1874519" cy="731520"/>
           </a:xfrm>
           <a:prstGeom prst="roundRect">
@@ -32507,6 +32923,7 @@
                 <a:spcPts val="0"/>
               </a:spcAft>
               <a:buNone/>
+              <a:defRPr/>
             </a:pPr>
             <a:r>
               <a:rPr sz="1200" b="1" i="0">
@@ -32528,7 +32945,7 @@
         </p:nvSpPr>
         <p:spPr>
           <a:xfrm>
-            <a:off x="2752343" y="2587752"/>
+            <a:off x="2752343" y="2746586"/>
             <a:ext cx="274320" cy="274320"/>
           </a:xfrm>
           <a:prstGeom prst="rightArrow">
@@ -32560,7 +32977,9 @@
           <a:bodyPr rtlCol="0" anchor="ctr"/>
           <a:lstStyle/>
           <a:p>
-            <a:pPr algn="ctr"/>
+            <a:pPr algn="ctr">
+              <a:defRPr/>
+            </a:pPr>
           </a:p>
         </p:txBody>
       </p:sp>
@@ -32572,7 +32991,7 @@
         </p:nvSpPr>
         <p:spPr>
           <a:xfrm>
-            <a:off x="3054096" y="2377440"/>
+            <a:off x="3054096" y="2536274"/>
             <a:ext cx="1874519" cy="731520"/>
           </a:xfrm>
           <a:prstGeom prst="roundRect">
@@ -32614,6 +33033,7 @@
                 <a:spcPts val="0"/>
               </a:spcAft>
               <a:buNone/>
+              <a:defRPr/>
             </a:pPr>
             <a:r>
               <a:rPr sz="1200" b="1" i="0">
@@ -32635,7 +33055,7 @@
         </p:nvSpPr>
         <p:spPr>
           <a:xfrm>
-            <a:off x="4965191" y="2587752"/>
+            <a:off x="4965191" y="2746586"/>
             <a:ext cx="274320" cy="274320"/>
           </a:xfrm>
           <a:prstGeom prst="rightArrow">
@@ -32667,7 +33087,9 @@
           <a:bodyPr rtlCol="0" anchor="ctr"/>
           <a:lstStyle/>
           <a:p>
-            <a:pPr algn="ctr"/>
+            <a:pPr algn="ctr">
+              <a:defRPr/>
+            </a:pPr>
           </a:p>
         </p:txBody>
       </p:sp>
@@ -32679,7 +33101,7 @@
         </p:nvSpPr>
         <p:spPr>
           <a:xfrm>
-            <a:off x="5266944" y="2377440"/>
+            <a:off x="5266944" y="2536274"/>
             <a:ext cx="1874519" cy="731520"/>
           </a:xfrm>
           <a:prstGeom prst="roundRect">
@@ -32721,6 +33143,7 @@
                 <a:spcPts val="0"/>
               </a:spcAft>
               <a:buNone/>
+              <a:defRPr/>
             </a:pPr>
             <a:r>
               <a:rPr sz="1200" b="1" i="0">
@@ -32742,7 +33165,7 @@
         </p:nvSpPr>
         <p:spPr>
           <a:xfrm>
-            <a:off x="7178039" y="2587752"/>
+            <a:off x="7178039" y="2746586"/>
             <a:ext cx="274320" cy="274320"/>
           </a:xfrm>
           <a:prstGeom prst="rightArrow">
@@ -32774,7 +33197,9 @@
           <a:bodyPr rtlCol="0" anchor="ctr"/>
           <a:lstStyle/>
           <a:p>
-            <a:pPr algn="ctr"/>
+            <a:pPr algn="ctr">
+              <a:defRPr/>
+            </a:pPr>
           </a:p>
         </p:txBody>
       </p:sp>
@@ -32786,7 +33211,7 @@
         </p:nvSpPr>
         <p:spPr>
           <a:xfrm>
-            <a:off x="7479792" y="2377440"/>
+            <a:off x="7479792" y="2536274"/>
             <a:ext cx="1874519" cy="731520"/>
           </a:xfrm>
           <a:prstGeom prst="roundRect">
@@ -32828,6 +33253,7 @@
                 <a:spcPts val="0"/>
               </a:spcAft>
               <a:buNone/>
+              <a:defRPr/>
             </a:pPr>
             <a:r>
               <a:rPr sz="1200" b="1" i="0">
@@ -32849,7 +33275,7 @@
         </p:nvSpPr>
         <p:spPr>
           <a:xfrm>
-            <a:off x="9390887" y="2587752"/>
+            <a:off x="9390887" y="2746586"/>
             <a:ext cx="274320" cy="274320"/>
           </a:xfrm>
           <a:prstGeom prst="rightArrow">
@@ -32881,7 +33307,9 @@
           <a:bodyPr rtlCol="0" anchor="ctr"/>
           <a:lstStyle/>
           <a:p>
-            <a:pPr algn="ctr"/>
+            <a:pPr algn="ctr">
+              <a:defRPr/>
+            </a:pPr>
           </a:p>
         </p:txBody>
       </p:sp>
@@ -32893,7 +33321,7 @@
         </p:nvSpPr>
         <p:spPr>
           <a:xfrm>
-            <a:off x="9692640" y="2377440"/>
+            <a:off x="9692640" y="2536274"/>
             <a:ext cx="1874519" cy="731520"/>
           </a:xfrm>
           <a:prstGeom prst="roundRect">
@@ -32935,6 +33363,7 @@
                 <a:spcPts val="0"/>
               </a:spcAft>
               <a:buNone/>
+              <a:defRPr/>
             </a:pPr>
             <a:r>
               <a:rPr sz="1200" b="1" i="0">
@@ -32957,7 +33386,7 @@
         <p:spPr>
           <a:xfrm>
             <a:off x="841248" y="3474720"/>
-            <a:ext cx="10607040" cy="2743200"/>
+            <a:ext cx="10607040" cy="2779888"/>
           </a:xfrm>
           <a:prstGeom prst="rect">
             <a:avLst/>
@@ -32982,9 +33411,10 @@
               </a:buClr>
               <a:buFont typeface="Arial"/>
               <a:buChar char="▪"/>
-            </a:pPr>
-            <a:r>
-              <a:rPr sz="1400" b="1" i="0">
+              <a:defRPr/>
+            </a:pPr>
+            <a:r>
+              <a:rPr sz="1800" b="1" i="0">
                 <a:solidFill>
                   <a:srgbClr val="2B343F"/>
                 </a:solidFill>
@@ -32993,7 +33423,7 @@
               <a:t>1.</a:t>
             </a:r>
             <a:r>
-              <a:rPr sz="1400" b="0" i="0">
+              <a:rPr sz="1800" b="0" i="0">
                 <a:solidFill>
                   <a:srgbClr val="2B343F"/>
                 </a:solidFill>
@@ -33015,9 +33445,10 @@
               </a:buClr>
               <a:buFont typeface="Arial"/>
               <a:buChar char="▪"/>
-            </a:pPr>
-            <a:r>
-              <a:rPr sz="1400" b="1" i="0">
+              <a:defRPr/>
+            </a:pPr>
+            <a:r>
+              <a:rPr sz="1800" b="1" i="0">
                 <a:solidFill>
                   <a:srgbClr val="2B343F"/>
                 </a:solidFill>
@@ -33026,7 +33457,7 @@
               <a:t>2.</a:t>
             </a:r>
             <a:r>
-              <a:rPr sz="1400" b="0" i="0">
+              <a:rPr sz="1800" b="0" i="0">
                 <a:solidFill>
                   <a:srgbClr val="2B343F"/>
                 </a:solidFill>
@@ -33048,9 +33479,10 @@
               </a:buClr>
               <a:buFont typeface="Arial"/>
               <a:buChar char="▪"/>
-            </a:pPr>
-            <a:r>
-              <a:rPr sz="1400" b="1" i="0">
+              <a:defRPr/>
+            </a:pPr>
+            <a:r>
+              <a:rPr sz="1800" b="1" i="0">
                 <a:solidFill>
                   <a:srgbClr val="2B343F"/>
                 </a:solidFill>
@@ -33059,7 +33491,7 @@
               <a:t>3.</a:t>
             </a:r>
             <a:r>
-              <a:rPr sz="1400" b="0" i="0">
+              <a:rPr sz="1800" b="0" i="0">
                 <a:solidFill>
                   <a:srgbClr val="2B343F"/>
                 </a:solidFill>
@@ -33081,9 +33513,10 @@
               </a:buClr>
               <a:buFont typeface="Arial"/>
               <a:buChar char="▪"/>
-            </a:pPr>
-            <a:r>
-              <a:rPr sz="1400" b="1" i="0">
+              <a:defRPr/>
+            </a:pPr>
+            <a:r>
+              <a:rPr sz="1800" b="1" i="0">
                 <a:solidFill>
                   <a:srgbClr val="2B343F"/>
                 </a:solidFill>
@@ -33092,7 +33525,7 @@
               <a:t>4.</a:t>
             </a:r>
             <a:r>
-              <a:rPr sz="1400" b="0" i="0">
+              <a:rPr sz="1800" b="0" i="0">
                 <a:solidFill>
                   <a:srgbClr val="2B343F"/>
                 </a:solidFill>
@@ -33114,9 +33547,10 @@
               </a:buClr>
               <a:buFont typeface="Arial"/>
               <a:buChar char="▪"/>
-            </a:pPr>
-            <a:r>
-              <a:rPr sz="1400" b="1" i="0">
+              <a:defRPr/>
+            </a:pPr>
+            <a:r>
+              <a:rPr sz="1800" b="1" i="0">
                 <a:solidFill>
                   <a:srgbClr val="2B343F"/>
                 </a:solidFill>
@@ -33125,7 +33559,7 @@
               <a:t>5.</a:t>
             </a:r>
             <a:r>
-              <a:rPr sz="1400" b="0" i="0">
+              <a:rPr sz="1800" b="0" i="0">
                 <a:solidFill>
                   <a:srgbClr val="2B343F"/>
                 </a:solidFill>
@@ -33134,7 +33568,7 @@
               <a:t> Discuss: how does replayability change “what happens to an in-flight task” — and how does that surface to the user over </a:t>
             </a:r>
             <a:r>
-              <a:rPr sz="1400" b="1" i="0">
+              <a:rPr sz="1800" b="1" i="0">
                 <a:solidFill>
                   <a:srgbClr val="2B343F"/>
                 </a:solidFill>
@@ -33143,7 +33577,7 @@
               <a:t>messaging vs voice</a:t>
             </a:r>
             <a:r>
-              <a:rPr sz="1400" b="0" i="0">
+              <a:rPr sz="1800" b="0" i="0">
                 <a:solidFill>
                   <a:srgbClr val="2B343F"/>
                 </a:solidFill>
@@ -33200,6 +33634,7 @@
                 <a:spcPts val="600"/>
               </a:spcAft>
               <a:buNone/>
+              <a:defRPr/>
             </a:pPr>
             <a:r>
               <a:rPr sz="3000" b="1" i="0">
@@ -33243,6 +33678,7 @@
                 <a:spcPts val="600"/>
               </a:spcAft>
               <a:buNone/>
+              <a:defRPr/>
             </a:pPr>
             <a:r>
               <a:rPr sz="1200" b="1" i="0">
@@ -33286,6 +33722,7 @@
                 <a:spcPts val="600"/>
               </a:spcAft>
               <a:buNone/>
+              <a:defRPr/>
             </a:pPr>
             <a:r>
               <a:rPr sz="900" b="0" i="0">
@@ -33329,6 +33766,7 @@
                 <a:spcPts val="600"/>
               </a:spcAft>
               <a:buNone/>
+              <a:defRPr/>
             </a:pPr>
             <a:r>
               <a:rPr sz="900" b="0" i="0">
@@ -33392,6 +33830,7 @@
                 <a:spcPts val="0"/>
               </a:spcAft>
               <a:buNone/>
+              <a:defRPr/>
             </a:pPr>
             <a:r>
               <a:rPr sz="1150" b="1" i="0">
@@ -33412,6 +33851,7 @@
                 <a:spcPts val="0"/>
               </a:spcAft>
               <a:buNone/>
+              <a:defRPr/>
             </a:pPr>
             <a:r>
               <a:rPr sz="800" b="0" i="0">
@@ -33465,7 +33905,9 @@
           <a:bodyPr rtlCol="0" anchor="ctr"/>
           <a:lstStyle/>
           <a:p>
-            <a:pPr algn="ctr"/>
+            <a:pPr algn="ctr">
+              <a:defRPr/>
+            </a:pPr>
           </a:p>
         </p:txBody>
       </p:sp>
@@ -33519,6 +33961,7 @@
                 <a:spcPts val="0"/>
               </a:spcAft>
               <a:buNone/>
+              <a:defRPr/>
             </a:pPr>
             <a:r>
               <a:rPr sz="1150" b="1" i="0">
@@ -33539,6 +33982,7 @@
                 <a:spcPts val="0"/>
               </a:spcAft>
               <a:buNone/>
+              <a:defRPr/>
             </a:pPr>
             <a:r>
               <a:rPr sz="800" b="0" i="0">
@@ -33592,7 +34036,9 @@
           <a:bodyPr rtlCol="0" anchor="ctr"/>
           <a:lstStyle/>
           <a:p>
-            <a:pPr algn="ctr"/>
+            <a:pPr algn="ctr">
+              <a:defRPr/>
+            </a:pPr>
           </a:p>
         </p:txBody>
       </p:sp>
@@ -33646,6 +34092,7 @@
                 <a:spcPts val="0"/>
               </a:spcAft>
               <a:buNone/>
+              <a:defRPr/>
             </a:pPr>
             <a:r>
               <a:rPr sz="1150" b="1" i="0">
@@ -33666,6 +34113,7 @@
                 <a:spcPts val="0"/>
               </a:spcAft>
               <a:buNone/>
+              <a:defRPr/>
             </a:pPr>
             <a:r>
               <a:rPr sz="800" b="0" i="0">
@@ -33719,7 +34167,9 @@
           <a:bodyPr rtlCol="0" anchor="ctr"/>
           <a:lstStyle/>
           <a:p>
-            <a:pPr algn="ctr"/>
+            <a:pPr algn="ctr">
+              <a:defRPr/>
+            </a:pPr>
           </a:p>
         </p:txBody>
       </p:sp>
@@ -33773,6 +34223,7 @@
                 <a:spcPts val="0"/>
               </a:spcAft>
               <a:buNone/>
+              <a:defRPr/>
             </a:pPr>
             <a:r>
               <a:rPr sz="1150" b="1" i="0">
@@ -33793,6 +34244,7 @@
                 <a:spcPts val="0"/>
               </a:spcAft>
               <a:buNone/>
+              <a:defRPr/>
             </a:pPr>
             <a:r>
               <a:rPr sz="800" b="0" i="0">
@@ -33846,7 +34298,9 @@
           <a:bodyPr rtlCol="0" anchor="ctr"/>
           <a:lstStyle/>
           <a:p>
-            <a:pPr algn="ctr"/>
+            <a:pPr algn="ctr">
+              <a:defRPr/>
+            </a:pPr>
           </a:p>
         </p:txBody>
       </p:sp>
@@ -33900,6 +34354,7 @@
                 <a:spcPts val="0"/>
               </a:spcAft>
               <a:buNone/>
+              <a:defRPr/>
             </a:pPr>
             <a:r>
               <a:rPr sz="1150" b="1" i="0">
@@ -33920,6 +34375,7 @@
                 <a:spcPts val="0"/>
               </a:spcAft>
               <a:buNone/>
+              <a:defRPr/>
             </a:pPr>
             <a:r>
               <a:rPr sz="800" b="0" i="0">
@@ -33973,7 +34429,9 @@
           <a:bodyPr rtlCol="0" anchor="ctr"/>
           <a:lstStyle/>
           <a:p>
-            <a:pPr algn="ctr"/>
+            <a:pPr algn="ctr">
+              <a:defRPr/>
+            </a:pPr>
           </a:p>
         </p:txBody>
       </p:sp>
@@ -34027,6 +34485,7 @@
                 <a:spcPts val="0"/>
               </a:spcAft>
               <a:buNone/>
+              <a:defRPr/>
             </a:pPr>
             <a:r>
               <a:rPr sz="1150" b="1" i="0">
@@ -34047,6 +34506,7 @@
                 <a:spcPts val="0"/>
               </a:spcAft>
               <a:buNone/>
+              <a:defRPr/>
             </a:pPr>
             <a:r>
               <a:rPr sz="800" b="0" i="0">
@@ -34100,7 +34560,9 @@
           <a:bodyPr rtlCol="0" anchor="ctr"/>
           <a:lstStyle/>
           <a:p>
-            <a:pPr algn="ctr"/>
+            <a:pPr algn="ctr">
+              <a:defRPr/>
+            </a:pPr>
           </a:p>
         </p:txBody>
       </p:sp>
@@ -34154,6 +34616,7 @@
                 <a:spcPts val="0"/>
               </a:spcAft>
               <a:buNone/>
+              <a:defRPr/>
             </a:pPr>
             <a:r>
               <a:rPr sz="1150" b="1" i="0">
@@ -34174,6 +34637,7 @@
                 <a:spcPts val="0"/>
               </a:spcAft>
               <a:buNone/>
+              <a:defRPr/>
             </a:pPr>
             <a:r>
               <a:rPr sz="800" b="0" i="0">
@@ -34221,9 +34685,10 @@
               </a:buClr>
               <a:buFont typeface="Arial"/>
               <a:buChar char="▪"/>
-            </a:pPr>
-            <a:r>
-              <a:rPr sz="1650" b="1" i="0">
+              <a:defRPr/>
+            </a:pPr>
+            <a:r>
+              <a:rPr sz="1800" b="1" i="0">
                 <a:solidFill>
                   <a:srgbClr val="2B343F"/>
                 </a:solidFill>
@@ -34248,9 +34713,10 @@
               </a:buClr>
               <a:buFont typeface="Arial"/>
               <a:buChar char="▪"/>
-            </a:pPr>
-            <a:r>
-              <a:rPr sz="1650" b="1" i="0">
+              <a:defRPr/>
+            </a:pPr>
+            <a:r>
+              <a:rPr sz="1800" b="1" i="0">
                 <a:solidFill>
                   <a:srgbClr val="2B343F"/>
                 </a:solidFill>
@@ -34272,9 +34738,10 @@
               </a:buClr>
               <a:buFont typeface="Arial"/>
               <a:buChar char="–"/>
-            </a:pPr>
-            <a:r>
-              <a:rPr sz="1600" b="0" i="0">
+              <a:defRPr/>
+            </a:pPr>
+            <a:r>
+              <a:rPr sz="1800" b="0" i="0">
                 <a:solidFill>
                   <a:srgbClr val="2B343F"/>
                 </a:solidFill>
@@ -34283,7 +34750,7 @@
               <a:t>A combined </a:t>
             </a:r>
             <a:r>
-              <a:rPr sz="1600" b="1" i="0">
+              <a:rPr sz="1800" b="1" i="0">
                 <a:solidFill>
                   <a:srgbClr val="2B343F"/>
                 </a:solidFill>
@@ -34292,7 +34759,7 @@
               <a:t>health + capability registry</a:t>
             </a:r>
             <a:r>
-              <a:rPr sz="1600" b="0" i="0">
+              <a:rPr sz="1800" b="0" i="0">
                 <a:solidFill>
                   <a:srgbClr val="2B343F"/>
                 </a:solidFill>
@@ -34314,9 +34781,10 @@
               </a:buClr>
               <a:buFont typeface="Arial"/>
               <a:buChar char="–"/>
-            </a:pPr>
-            <a:r>
-              <a:rPr sz="1600" b="1" i="0">
+              <a:defRPr/>
+            </a:pPr>
+            <a:r>
+              <a:rPr sz="1800" b="1" i="0">
                 <a:solidFill>
                   <a:srgbClr val="2B343F"/>
                 </a:solidFill>
@@ -34325,7 +34793,7 @@
               <a:t>Streaming voice with barge-in</a:t>
             </a:r>
             <a:r>
-              <a:rPr sz="1600" b="0" i="0">
+              <a:rPr sz="1800" b="0" i="0">
                 <a:solidFill>
                   <a:srgbClr val="2B343F"/>
                 </a:solidFill>
@@ -34347,9 +34815,10 @@
               </a:buClr>
               <a:buFont typeface="Arial"/>
               <a:buChar char="–"/>
-            </a:pPr>
-            <a:r>
-              <a:rPr sz="1600" b="1" i="0">
+              <a:defRPr/>
+            </a:pPr>
+            <a:r>
+              <a:rPr sz="1800" b="1" i="0">
                 <a:solidFill>
                   <a:srgbClr val="2B343F"/>
                 </a:solidFill>
@@ -34358,7 +34827,7 @@
               <a:t>Benchmarking the custom A2A protocol</a:t>
             </a:r>
             <a:r>
-              <a:rPr sz="1600" b="0" i="0">
+              <a:rPr sz="1800" b="0" i="0">
                 <a:solidFill>
                   <a:srgbClr val="2B343F"/>
                 </a:solidFill>
@@ -34415,6 +34884,7 @@
                 <a:spcPts val="600"/>
               </a:spcAft>
               <a:buNone/>
+              <a:defRPr/>
             </a:pPr>
             <a:r>
               <a:rPr sz="3000" b="1" i="0">
@@ -34460,9 +34930,10 @@
               </a:buClr>
               <a:buFont typeface="Arial"/>
               <a:buChar char="▪"/>
-            </a:pPr>
-            <a:r>
-              <a:rPr sz="1550" b="1" i="0">
+              <a:defRPr/>
+            </a:pPr>
+            <a:r>
+              <a:rPr sz="1800" b="1" i="0">
                 <a:solidFill>
                   <a:srgbClr val="2B343F"/>
                 </a:solidFill>
@@ -34471,7 +34942,7 @@
               <a:t>Redis instance</a:t>
             </a:r>
             <a:r>
-              <a:rPr sz="1550" b="0" i="0">
+              <a:rPr sz="1800" b="0" i="0">
                 <a:solidFill>
                   <a:srgbClr val="2B343F"/>
                 </a:solidFill>
@@ -34493,9 +34964,10 @@
               </a:buClr>
               <a:buFont typeface="Arial"/>
               <a:buChar char="▪"/>
-            </a:pPr>
-            <a:r>
-              <a:rPr sz="1550" b="1" i="0">
+              <a:defRPr/>
+            </a:pPr>
+            <a:r>
+              <a:rPr sz="1800" b="1" i="0">
                 <a:solidFill>
                   <a:srgbClr val="2B343F"/>
                 </a:solidFill>
@@ -34504,7 +34976,7 @@
               <a:t>NanoClaw device</a:t>
             </a:r>
             <a:r>
-              <a:rPr sz="1550" b="0" i="0">
+              <a:rPr sz="1800" b="0" i="0">
                 <a:solidFill>
                   <a:srgbClr val="2B343F"/>
                 </a:solidFill>
@@ -34526,9 +34998,10 @@
               </a:buClr>
               <a:buFont typeface="Arial"/>
               <a:buChar char="▪"/>
-            </a:pPr>
-            <a:r>
-              <a:rPr sz="1550" b="1" i="0">
+              <a:defRPr/>
+            </a:pPr>
+            <a:r>
+              <a:rPr sz="1800" b="1" i="0">
                 <a:solidFill>
                   <a:srgbClr val="2B343F"/>
                 </a:solidFill>
@@ -34537,7 +35010,7 @@
               <a:t>Hermes model weights</a:t>
             </a:r>
             <a:r>
-              <a:rPr sz="1550" b="0" i="0">
+              <a:rPr sz="1800" b="0" i="0">
                 <a:solidFill>
                   <a:srgbClr val="2B343F"/>
                 </a:solidFill>
@@ -34559,9 +35032,10 @@
               </a:buClr>
               <a:buFont typeface="Arial"/>
               <a:buChar char="▪"/>
-            </a:pPr>
-            <a:r>
-              <a:rPr sz="1550" b="1" i="0">
+              <a:defRPr/>
+            </a:pPr>
+            <a:r>
+              <a:rPr sz="1800" b="1" i="0">
                 <a:solidFill>
                   <a:srgbClr val="2B343F"/>
                 </a:solidFill>
@@ -34570,7 +35044,7 @@
               <a:t>Starter OpenClaw agent scaffold</a:t>
             </a:r>
             <a:r>
-              <a:rPr sz="1550" b="0" i="0">
+              <a:rPr sz="1800" b="0" i="0">
                 <a:solidFill>
                   <a:srgbClr val="2B343F"/>
                 </a:solidFill>
@@ -34592,9 +35066,10 @@
               </a:buClr>
               <a:buFont typeface="Arial"/>
               <a:buChar char="▪"/>
-            </a:pPr>
-            <a:r>
-              <a:rPr sz="1550" b="1" i="0">
+              <a:defRPr/>
+            </a:pPr>
+            <a:r>
+              <a:rPr sz="1800" b="1" i="0">
                 <a:solidFill>
                   <a:srgbClr val="2B343F"/>
                 </a:solidFill>
@@ -34603,7 +35078,7 @@
               <a:t>3–4 deliberately weak skill descriptions</a:t>
             </a:r>
             <a:r>
-              <a:rPr sz="1550" b="0" i="0">
+              <a:rPr sz="1800" b="0" i="0">
                 <a:solidFill>
                   <a:srgbClr val="2B343F"/>
                 </a:solidFill>
@@ -34625,9 +35100,10 @@
               </a:buClr>
               <a:buFont typeface="Arial"/>
               <a:buChar char="▪"/>
-            </a:pPr>
-            <a:r>
-              <a:rPr sz="1550" b="1" i="0">
+              <a:defRPr/>
+            </a:pPr>
+            <a:r>
+              <a:rPr sz="1800" b="1" i="0">
                 <a:solidFill>
                   <a:srgbClr val="2B343F"/>
                 </a:solidFill>
@@ -34636,7 +35112,7 @@
               <a:t>Telegram and/or WhatsApp sandbox / test account</a:t>
             </a:r>
             <a:r>
-              <a:rPr sz="1550" b="0" i="0">
+              <a:rPr sz="1800" b="0" i="0">
                 <a:solidFill>
                   <a:srgbClr val="2B343F"/>
                 </a:solidFill>
@@ -34658,9 +35134,10 @@
               </a:buClr>
               <a:buFont typeface="Arial"/>
               <a:buChar char="▪"/>
-            </a:pPr>
-            <a:r>
-              <a:rPr sz="1550" b="1" i="0">
+              <a:defRPr/>
+            </a:pPr>
+            <a:r>
+              <a:rPr sz="1800" b="1" i="0">
                 <a:solidFill>
                   <a:srgbClr val="2B343F"/>
                 </a:solidFill>
@@ -34669,7 +35146,7 @@
               <a:t>Basic ASR / TTS setup</a:t>
             </a:r>
             <a:r>
-              <a:rPr sz="1550" b="0" i="0">
+              <a:rPr sz="1800" b="0" i="0">
                 <a:solidFill>
                   <a:srgbClr val="2B343F"/>
                 </a:solidFill>
@@ -34691,9 +35168,10 @@
               </a:buClr>
               <a:buFont typeface="Arial"/>
               <a:buChar char="▪"/>
-            </a:pPr>
-            <a:r>
-              <a:rPr sz="1550" b="0" i="0">
+              <a:defRPr/>
+            </a:pPr>
+            <a:r>
+              <a:rPr sz="1800" b="0" i="0">
                 <a:solidFill>
                   <a:srgbClr val="2B343F"/>
                 </a:solidFill>
@@ -34702,7 +35180,7 @@
               <a:t>Reference: </a:t>
             </a:r>
             <a:r>
-              <a:rPr sz="1550" b="1" i="0">
+              <a:rPr sz="1800" b="1" i="0">
                 <a:solidFill>
                   <a:srgbClr val="2B343F"/>
                 </a:solidFill>
@@ -34724,9 +35202,10 @@
               </a:buClr>
               <a:buFont typeface="Arial"/>
               <a:buChar char="▪"/>
-            </a:pPr>
-            <a:r>
-              <a:rPr sz="1550" b="0" i="0">
+              <a:defRPr/>
+            </a:pPr>
+            <a:r>
+              <a:rPr sz="1800" b="0" i="0">
                 <a:solidFill>
                   <a:srgbClr val="2B343F"/>
                 </a:solidFill>
@@ -34735,7 +35214,7 @@
               <a:t>Reference: </a:t>
             </a:r>
             <a:r>
-              <a:rPr sz="1550" b="1" i="0">
+              <a:rPr sz="1800" b="1" i="0">
                 <a:solidFill>
                   <a:srgbClr val="2B343F"/>
                 </a:solidFill>
@@ -34744,7 +35223,7 @@
               <a:t>overview of at least one standard A2A protocol spec</a:t>
             </a:r>
             <a:r>
-              <a:rPr sz="1550" b="0" i="0">
+              <a:rPr sz="1800" b="0" i="0">
                 <a:solidFill>
                   <a:srgbClr val="2B343F"/>
                 </a:solidFill>
@@ -34785,6 +35264,7 @@
                 <a:spcPts val="600"/>
               </a:spcAft>
               <a:buNone/>
+              <a:defRPr/>
             </a:pPr>
             <a:r>
               <a:rPr sz="1200" b="1" i="0">
@@ -34828,6 +35308,7 @@
                 <a:spcPts val="600"/>
               </a:spcAft>
               <a:buNone/>
+              <a:defRPr/>
             </a:pPr>
             <a:r>
               <a:rPr sz="900" b="0" i="0">
@@ -34871,6 +35352,7 @@
                 <a:spcPts val="600"/>
               </a:spcAft>
               <a:buNone/>
+              <a:defRPr/>
             </a:pPr>
             <a:r>
               <a:rPr sz="900" b="0" i="0">
@@ -34925,6 +35407,7 @@
                 <a:spcPts val="600"/>
               </a:spcAft>
               <a:buNone/>
+              <a:defRPr/>
             </a:pPr>
             <a:r>
               <a:rPr sz="4000" b="1" i="0">
@@ -34961,9 +35444,10 @@
                 <a:spcPts val="600"/>
               </a:spcAft>
               <a:buNone/>
-            </a:pPr>
-            <a:r>
-              <a:rPr sz="1700" b="0" i="0">
+              <a:defRPr/>
+            </a:pPr>
+            <a:r>
+              <a:rPr sz="1800" b="0" i="0">
                 <a:solidFill>
                   <a:srgbClr val="E8EEF5"/>
                 </a:solidFill>
@@ -35004,9 +35488,10 @@
                 <a:spcPts val="600"/>
               </a:spcAft>
               <a:buNone/>
-            </a:pPr>
-            <a:r>
-              <a:rPr sz="1500" b="1" i="0">
+              <a:defRPr/>
+            </a:pPr>
+            <a:r>
+              <a:rPr sz="1800" b="1" i="0">
                 <a:solidFill>
                   <a:srgbClr val="FFFFFF"/>
                 </a:solidFill>
@@ -35063,6 +35548,7 @@
                 <a:spcPts val="600"/>
               </a:spcAft>
               <a:buNone/>
+              <a:defRPr/>
             </a:pPr>
             <a:r>
               <a:rPr sz="3000" b="1" i="0">
@@ -35108,9 +35594,10 @@
               </a:buClr>
               <a:buFont typeface="Arial"/>
               <a:buChar char="▪"/>
-            </a:pPr>
-            <a:r>
-              <a:rPr sz="1500" b="0" i="0">
+              <a:defRPr/>
+            </a:pPr>
+            <a:r>
+              <a:rPr sz="1800" b="0" i="0">
                 <a:solidFill>
                   <a:srgbClr val="2B343F"/>
                 </a:solidFill>
@@ -35119,7 +35606,7 @@
               <a:t>Each OpenClaw agent's internal reasoning loop — </a:t>
             </a:r>
             <a:r>
-              <a:rPr sz="1500" b="1" i="0">
+              <a:rPr sz="1800" b="1" i="0">
                 <a:solidFill>
                   <a:srgbClr val="2B343F"/>
                 </a:solidFill>
@@ -35128,7 +35615,7 @@
               <a:t>receive task → call Hermes → optionally invoke a skill / tool → respond</a:t>
             </a:r>
             <a:r>
-              <a:rPr sz="1500" b="0" i="0">
+              <a:rPr sz="1800" b="0" i="0">
                 <a:solidFill>
                   <a:srgbClr val="2B343F"/>
                 </a:solidFill>
@@ -35137,7 +35624,7 @@
               <a:t> — maps naturally onto a LangGraph </a:t>
             </a:r>
             <a:r>
-              <a:rPr sz="1500" b="1" i="0">
+              <a:rPr sz="1800" b="1" i="0">
                 <a:solidFill>
                   <a:srgbClr val="2B343F"/>
                 </a:solidFill>
@@ -35159,9 +35646,10 @@
               </a:buClr>
               <a:buFont typeface="Arial"/>
               <a:buChar char="–"/>
-            </a:pPr>
-            <a:r>
-              <a:rPr sz="1600" b="0" i="0">
+              <a:defRPr/>
+            </a:pPr>
+            <a:r>
+              <a:rPr sz="1800" b="0" i="0">
                 <a:solidFill>
                   <a:srgbClr val="2B343F"/>
                 </a:solidFill>
@@ -35183,9 +35671,10 @@
               </a:buClr>
               <a:buFont typeface="Arial"/>
               <a:buChar char="–"/>
-            </a:pPr>
-            <a:r>
-              <a:rPr sz="1600" b="0" i="0">
+              <a:defRPr/>
+            </a:pPr>
+            <a:r>
+              <a:rPr sz="1800" b="0" i="0">
                 <a:solidFill>
                   <a:srgbClr val="2B343F"/>
                 </a:solidFill>
@@ -35210,9 +35699,10 @@
               </a:buClr>
               <a:buFont typeface="Arial"/>
               <a:buChar char="▪"/>
-            </a:pPr>
-            <a:r>
-              <a:rPr sz="1500" b="0" i="0">
+              <a:defRPr/>
+            </a:pPr>
+            <a:r>
+              <a:rPr sz="1800" b="0" i="0">
                 <a:solidFill>
                   <a:srgbClr val="2B343F"/>
                 </a:solidFill>
@@ -35221,7 +35711,7 @@
               <a:t>LangGraph's built-in </a:t>
             </a:r>
             <a:r>
-              <a:rPr sz="1500" b="1" i="0">
+              <a:rPr sz="1800" b="1" i="0">
                 <a:solidFill>
                   <a:srgbClr val="2B343F"/>
                 </a:solidFill>
@@ -35230,7 +35720,7 @@
               <a:t>checkpointer</a:t>
             </a:r>
             <a:r>
-              <a:rPr sz="1500" b="0" i="0">
+              <a:rPr sz="1800" b="0" i="0">
                 <a:solidFill>
                   <a:srgbClr val="2B343F"/>
                 </a:solidFill>
@@ -35252,9 +35742,10 @@
               </a:buClr>
               <a:buFont typeface="Arial"/>
               <a:buChar char="–"/>
-            </a:pPr>
-            <a:r>
-              <a:rPr sz="1600" b="0" i="0">
+              <a:defRPr/>
+            </a:pPr>
+            <a:r>
+              <a:rPr sz="1800" b="0" i="0">
                 <a:solidFill>
                   <a:srgbClr val="2B343F"/>
                 </a:solidFill>
@@ -35263,7 +35754,7 @@
               <a:t>A checkpoint after each node execution gives the same </a:t>
             </a:r>
             <a:r>
-              <a:rPr sz="1600" b="1" i="0">
+              <a:rPr sz="1800" b="1" i="0">
                 <a:solidFill>
                   <a:srgbClr val="2B343F"/>
                 </a:solidFill>
@@ -35272,7 +35763,7 @@
               <a:t>replayability</a:t>
             </a:r>
             <a:r>
-              <a:rPr sz="1600" b="0" i="0">
+              <a:rPr sz="1800" b="0" i="0">
                 <a:solidFill>
                   <a:srgbClr val="2B343F"/>
                 </a:solidFill>
@@ -35313,6 +35804,7 @@
                 <a:spcPts val="600"/>
               </a:spcAft>
               <a:buNone/>
+              <a:defRPr/>
             </a:pPr>
             <a:r>
               <a:rPr sz="1200" b="1" i="0">
@@ -35356,6 +35848,7 @@
                 <a:spcPts val="600"/>
               </a:spcAft>
               <a:buNone/>
+              <a:defRPr/>
             </a:pPr>
             <a:r>
               <a:rPr sz="900" b="0" i="0">
@@ -35399,6 +35892,7 @@
                 <a:spcPts val="600"/>
               </a:spcAft>
               <a:buNone/>
+              <a:defRPr/>
             </a:pPr>
             <a:r>
               <a:rPr sz="900" b="0" i="0">
@@ -35458,6 +35952,7 @@
                 <a:spcPts val="600"/>
               </a:spcAft>
               <a:buNone/>
+              <a:defRPr/>
             </a:pPr>
             <a:r>
               <a:rPr sz="3000" b="1" i="0">
@@ -35503,9 +35998,10 @@
               </a:buClr>
               <a:buFont typeface="Arial"/>
               <a:buChar char="▪"/>
-            </a:pPr>
-            <a:r>
-              <a:rPr sz="1500" b="0" i="0">
+              <a:defRPr/>
+            </a:pPr>
+            <a:r>
+              <a:rPr sz="1800" b="0" i="0">
                 <a:solidFill>
                   <a:srgbClr val="2B343F"/>
                 </a:solidFill>
@@ -35514,7 +36010,7 @@
               <a:t>Hermes isn't a first-party LangChain / LangGraph integration → serve it behind an </a:t>
             </a:r>
             <a:r>
-              <a:rPr sz="1500" b="1" i="0">
+              <a:rPr sz="1800" b="1" i="0">
                 <a:solidFill>
                   <a:srgbClr val="2B343F"/>
                 </a:solidFill>
@@ -35523,7 +36019,7 @@
               <a:t>OpenAI-compatible endpoint</a:t>
             </a:r>
             <a:r>
-              <a:rPr sz="1500" b="0" i="0">
+              <a:rPr sz="1800" b="0" i="0">
                 <a:solidFill>
                   <a:srgbClr val="2B343F"/>
                 </a:solidFill>
@@ -35545,9 +36041,10 @@
               </a:buClr>
               <a:buFont typeface="Arial"/>
               <a:buChar char="▪"/>
-            </a:pPr>
-            <a:r>
-              <a:rPr sz="1500" b="0" i="0">
+              <a:defRPr/>
+            </a:pPr>
+            <a:r>
+              <a:rPr sz="1800" b="0" i="0">
                 <a:solidFill>
                   <a:srgbClr val="2B343F"/>
                 </a:solidFill>
@@ -35556,7 +36053,7 @@
               <a:t>Bind it via </a:t>
             </a:r>
             <a:r>
-              <a:rPr sz="1500" b="1" i="0">
+              <a:rPr sz="1800" b="1" i="0">
                 <a:solidFill>
                   <a:srgbClr val="2B343F"/>
                 </a:solidFill>
@@ -35565,7 +36062,7 @@
               <a:t>ChatOpenAI-style config</a:t>
             </a:r>
             <a:r>
-              <a:rPr sz="1500" b="0" i="0">
+              <a:rPr sz="1800" b="0" i="0">
                 <a:solidFill>
                   <a:srgbClr val="2B343F"/>
                 </a:solidFill>
@@ -35587,9 +36084,10 @@
               </a:buClr>
               <a:buFont typeface="Arial"/>
               <a:buChar char="▪"/>
-            </a:pPr>
-            <a:r>
-              <a:rPr sz="1500" b="0" i="0">
+              <a:defRPr/>
+            </a:pPr>
+            <a:r>
+              <a:rPr sz="1800" b="0" i="0">
                 <a:solidFill>
                   <a:srgbClr val="2B343F"/>
                 </a:solidFill>
@@ -35598,7 +36096,7 @@
               <a:t>Confirm Hermes' tool-calling output matches what LangGraph expects (</a:t>
             </a:r>
             <a:r>
-              <a:rPr sz="1500" b="1" i="0">
+              <a:rPr sz="1800" b="1" i="0">
                 <a:solidFill>
                   <a:srgbClr val="2B343F"/>
                 </a:solidFill>
@@ -35607,7 +36105,7 @@
               <a:t>OpenAI-style `tool_calls`</a:t>
             </a:r>
             <a:r>
-              <a:rPr sz="1500" b="0" i="0">
+              <a:rPr sz="1800" b="0" i="0">
                 <a:solidFill>
                   <a:srgbClr val="2B343F"/>
                 </a:solidFill>
@@ -35616,7 +36114,7 @@
               <a:t>) — this is the thing </a:t>
             </a:r>
             <a:r>
-              <a:rPr sz="1500" b="1" i="0">
+              <a:rPr sz="1800" b="1" i="0">
                 <a:solidFill>
                   <a:srgbClr val="2B343F"/>
                 </a:solidFill>
@@ -35638,9 +36136,10 @@
               </a:buClr>
               <a:buFont typeface="Arial"/>
               <a:buChar char="▪"/>
-            </a:pPr>
-            <a:r>
-              <a:rPr sz="1500" b="0" i="0">
+              <a:defRPr/>
+            </a:pPr>
+            <a:r>
+              <a:rPr sz="1800" b="0" i="0">
                 <a:solidFill>
                   <a:srgbClr val="2B343F"/>
                 </a:solidFill>
@@ -35649,7 +36148,7 @@
               <a:t>Bind Part 5 skills to the graph as </a:t>
             </a:r>
             <a:r>
-              <a:rPr sz="1500" b="1" i="0">
+              <a:rPr sz="1800" b="1" i="0">
                 <a:solidFill>
                   <a:srgbClr val="2B343F"/>
                 </a:solidFill>
@@ -35658,7 +36157,7 @@
               <a:t>LangGraph tools</a:t>
             </a:r>
             <a:r>
-              <a:rPr sz="1500" b="0" i="0">
+              <a:rPr sz="1800" b="0" i="0">
                 <a:solidFill>
                   <a:srgbClr val="2B343F"/>
                 </a:solidFill>
@@ -35667,7 +36166,7 @@
               <a:t> — the tool's `description` field is exactly the skill description from 5.2; </a:t>
             </a:r>
             <a:r>
-              <a:rPr sz="1500" b="1" i="0">
+              <a:rPr sz="1800" b="1" i="0">
                 <a:solidFill>
                   <a:srgbClr val="2B343F"/>
                 </a:solidFill>
@@ -35708,6 +36207,7 @@
                 <a:spcPts val="600"/>
               </a:spcAft>
               <a:buNone/>
+              <a:defRPr/>
             </a:pPr>
             <a:r>
               <a:rPr sz="1200" b="1" i="0">
@@ -35751,6 +36251,7 @@
                 <a:spcPts val="600"/>
               </a:spcAft>
               <a:buNone/>
+              <a:defRPr/>
             </a:pPr>
             <a:r>
               <a:rPr sz="900" b="0" i="0">
@@ -35794,6 +36295,7 @@
                 <a:spcPts val="600"/>
               </a:spcAft>
               <a:buNone/>
+              <a:defRPr/>
             </a:pPr>
             <a:r>
               <a:rPr sz="900" b="0" i="0">
@@ -35837,8 +36339,8 @@
         </p:nvSpPr>
         <p:spPr>
           <a:xfrm>
-            <a:off x="841248" y="502920"/>
-            <a:ext cx="10607040" cy="822960"/>
+            <a:off x="841248" y="548640"/>
+            <a:ext cx="10607040" cy="977053"/>
           </a:xfrm>
         </p:spPr>
         <p:txBody>
@@ -35853,6 +36355,7 @@
                 <a:spcPts val="600"/>
               </a:spcAft>
               <a:buNone/>
+              <a:defRPr/>
             </a:pPr>
             <a:r>
               <a:rPr sz="3000" b="1" i="0">
@@ -35878,8 +36381,8 @@
         </p:nvSpPr>
         <p:spPr>
           <a:xfrm>
-            <a:off x="841248" y="1481328"/>
-            <a:ext cx="10607040" cy="4846320"/>
+            <a:off x="841248" y="1626277"/>
+            <a:ext cx="10607040" cy="4765379"/>
           </a:xfrm>
         </p:spPr>
         <p:txBody>
@@ -35898,9 +36401,10 @@
               </a:buClr>
               <a:buFont typeface="Arial"/>
               <a:buChar char="▪"/>
-            </a:pPr>
-            <a:r>
-              <a:rPr sz="1450" b="0" i="0">
+              <a:defRPr/>
+            </a:pPr>
+            <a:r>
+              <a:rPr sz="1800" b="0" i="0">
                 <a:solidFill>
                   <a:srgbClr val="2B343F"/>
                 </a:solidFill>
@@ -35909,7 +36413,7 @@
               <a:t>The graph handles </a:t>
             </a:r>
             <a:r>
-              <a:rPr sz="1450" b="1" i="0">
+              <a:rPr sz="1800" b="1" i="0">
                 <a:solidFill>
                   <a:srgbClr val="2B343F"/>
                 </a:solidFill>
@@ -35918,7 +36422,7 @@
               <a:t>a single agent's internal turn</a:t>
             </a:r>
             <a:r>
-              <a:rPr sz="1450" b="0" i="0">
+              <a:rPr sz="1800" b="0" i="0">
                 <a:solidFill>
                   <a:srgbClr val="2B343F"/>
                 </a:solidFill>
@@ -35927,7 +36431,7 @@
               <a:t>; the Part 7.2 envelope (sender, recipient, task ID, payload, correlation ID) becomes the </a:t>
             </a:r>
             <a:r>
-              <a:rPr sz="1450" b="1" i="0">
+              <a:rPr sz="1800" b="1" i="0">
                 <a:solidFill>
                   <a:srgbClr val="2B343F"/>
                 </a:solidFill>
@@ -35936,7 +36440,7 @@
               <a:t>input state</a:t>
             </a:r>
             <a:r>
-              <a:rPr sz="1450" b="0" i="0">
+              <a:rPr sz="1800" b="0" i="0">
                 <a:solidFill>
                   <a:srgbClr val="2B343F"/>
                 </a:solidFill>
@@ -35945,7 +36449,7 @@
               <a:t> that triggers a graph invocation, and the </a:t>
             </a:r>
             <a:r>
-              <a:rPr sz="1450" b="1" i="0">
+              <a:rPr sz="1800" b="1" i="0">
                 <a:solidFill>
                   <a:srgbClr val="2B343F"/>
                 </a:solidFill>
@@ -35954,7 +36458,7 @@
               <a:t>output state</a:t>
             </a:r>
             <a:r>
-              <a:rPr sz="1450" b="0" i="0">
+              <a:rPr sz="1800" b="0" i="0">
                 <a:solidFill>
                   <a:srgbClr val="2B343F"/>
                 </a:solidFill>
@@ -35976,9 +36480,10 @@
               </a:buClr>
               <a:buFont typeface="Arial"/>
               <a:buChar char="▪"/>
-            </a:pPr>
-            <a:r>
-              <a:rPr sz="1450" b="1" i="0">
+              <a:defRPr/>
+            </a:pPr>
+            <a:r>
+              <a:rPr sz="1800" b="1" i="0">
                 <a:solidFill>
                   <a:srgbClr val="2B343F"/>
                 </a:solidFill>
@@ -35987,7 +36492,7 @@
               <a:t>Pattern:</a:t>
             </a:r>
             <a:r>
-              <a:rPr sz="1450" b="0" i="0">
+              <a:rPr sz="1800" b="0" i="0">
                 <a:solidFill>
                   <a:srgbClr val="2B343F"/>
                 </a:solidFill>
@@ -36009,9 +36514,10 @@
               </a:buClr>
               <a:buFont typeface="Arial"/>
               <a:buChar char="▪"/>
-            </a:pPr>
-            <a:r>
-              <a:rPr sz="1450" b="0" i="0">
+              <a:defRPr/>
+            </a:pPr>
+            <a:r>
+              <a:rPr sz="1800" b="0" i="0">
                 <a:solidFill>
                   <a:srgbClr val="2B343F"/>
                 </a:solidFill>
@@ -36020,7 +36526,7 @@
               <a:t>The graph </a:t>
             </a:r>
             <a:r>
-              <a:rPr sz="1450" b="1" i="0">
+              <a:rPr sz="1800" b="1" i="0">
                 <a:solidFill>
                   <a:srgbClr val="2B343F"/>
                 </a:solidFill>
@@ -36029,7 +36535,7 @@
               <a:t>doesn't need to know about Redis at all</a:t>
             </a:r>
             <a:r>
-              <a:rPr sz="1450" b="0" i="0">
+              <a:rPr sz="1800" b="0" i="0">
                 <a:solidFill>
                   <a:srgbClr val="2B343F"/>
                 </a:solidFill>
@@ -36051,9 +36557,10 @@
               </a:buClr>
               <a:buFont typeface="Arial"/>
               <a:buChar char="▪"/>
-            </a:pPr>
-            <a:r>
-              <a:rPr sz="1450" b="0" i="0">
+              <a:defRPr/>
+            </a:pPr>
+            <a:r>
+              <a:rPr sz="1800" b="0" i="0">
                 <a:solidFill>
                   <a:srgbClr val="2B343F"/>
                 </a:solidFill>
@@ -36062,7 +36569,7 @@
               <a:t>Use the checkpointer with a </a:t>
             </a:r>
             <a:r>
-              <a:rPr sz="1450" b="1" i="0">
+              <a:rPr sz="1800" b="1" i="0">
                 <a:solidFill>
                   <a:srgbClr val="2B343F"/>
                 </a:solidFill>
@@ -36071,7 +36578,7 @@
               <a:t>Redis-backed implementation</a:t>
             </a:r>
             <a:r>
-              <a:rPr sz="1450" b="0" i="0">
+              <a:rPr sz="1800" b="0" i="0">
                 <a:solidFill>
                   <a:srgbClr val="2B343F"/>
                 </a:solidFill>
@@ -36080,7 +36587,7 @@
               <a:t> so an in-progress task's graph state survives an agent restart — the 7.3 “recovering agent resumes from stream offset” behaviour now also resumes </a:t>
             </a:r>
             <a:r>
-              <a:rPr sz="1450" b="1" i="0">
+              <a:rPr sz="1800" b="1" i="0">
                 <a:solidFill>
                   <a:srgbClr val="2B343F"/>
                 </a:solidFill>
@@ -36089,7 +36596,7 @@
               <a:t>mid-graph-execution</a:t>
             </a:r>
             <a:r>
-              <a:rPr sz="1450" b="0" i="0">
+              <a:rPr sz="1800" b="0" i="0">
                 <a:solidFill>
                   <a:srgbClr val="2B343F"/>
                 </a:solidFill>
@@ -36130,6 +36637,7 @@
                 <a:spcPts val="600"/>
               </a:spcAft>
               <a:buNone/>
+              <a:defRPr/>
             </a:pPr>
             <a:r>
               <a:rPr sz="1200" b="1" i="0">
@@ -36173,6 +36681,7 @@
                 <a:spcPts val="600"/>
               </a:spcAft>
               <a:buNone/>
+              <a:defRPr/>
             </a:pPr>
             <a:r>
               <a:rPr sz="900" b="0" i="0">
@@ -36216,6 +36725,7 @@
                 <a:spcPts val="600"/>
               </a:spcAft>
               <a:buNone/>
+              <a:defRPr/>
             </a:pPr>
             <a:r>
               <a:rPr sz="900" b="0" i="0">
@@ -36259,8 +36769,8 @@
         </p:nvSpPr>
         <p:spPr>
           <a:xfrm>
-            <a:off x="841248" y="502920"/>
-            <a:ext cx="10607040" cy="822960"/>
+            <a:off x="841248" y="548640"/>
+            <a:ext cx="10607040" cy="977053"/>
           </a:xfrm>
         </p:spPr>
         <p:txBody>
@@ -36275,6 +36785,7 @@
                 <a:spcPts val="600"/>
               </a:spcAft>
               <a:buNone/>
+              <a:defRPr/>
             </a:pPr>
             <a:r>
               <a:rPr sz="3000" b="1" i="0">
@@ -36300,8 +36811,8 @@
         </p:nvSpPr>
         <p:spPr>
           <a:xfrm>
-            <a:off x="841248" y="1481328"/>
-            <a:ext cx="10607040" cy="4846320"/>
+            <a:off x="841248" y="1626277"/>
+            <a:ext cx="10607040" cy="4765379"/>
           </a:xfrm>
         </p:spPr>
         <p:txBody>
@@ -36320,9 +36831,10 @@
               </a:buClr>
               <a:buFont typeface="Arial"/>
               <a:buChar char="▪"/>
-            </a:pPr>
-            <a:r>
-              <a:rPr sz="1500" b="0" i="0">
+              <a:defRPr/>
+            </a:pPr>
+            <a:r>
+              <a:rPr sz="1800" b="0" i="0">
                 <a:solidFill>
                   <a:srgbClr val="2B343F"/>
                 </a:solidFill>
@@ -36331,7 +36843,7 @@
               <a:t>The graph </a:t>
             </a:r>
             <a:r>
-              <a:rPr sz="1500" b="1" i="0">
+              <a:rPr sz="1800" b="1" i="0">
                 <a:solidFill>
                   <a:srgbClr val="2B343F"/>
                 </a:solidFill>
@@ -36340,7 +36852,7 @@
               <a:t>doesn't own the heartbeat loop</a:t>
             </a:r>
             <a:r>
-              <a:rPr sz="1500" b="0" i="0">
+              <a:rPr sz="1800" b="0" i="0">
                 <a:solidFill>
                   <a:srgbClr val="2B343F"/>
                 </a:solidFill>
@@ -36349,7 +36861,7 @@
               <a:t> — keep heartbeat emission (Part 4) as a </a:t>
             </a:r>
             <a:r>
-              <a:rPr sz="1500" b="1" i="0">
+              <a:rPr sz="1800" b="1" i="0">
                 <a:solidFill>
                   <a:srgbClr val="2B343F"/>
                 </a:solidFill>
@@ -36358,7 +36870,7 @@
               <a:t>separate lightweight process</a:t>
             </a:r>
             <a:r>
-              <a:rPr sz="1500" b="0" i="0">
+              <a:rPr sz="1800" b="0" i="0">
                 <a:solidFill>
                   <a:srgbClr val="2B343F"/>
                 </a:solidFill>
@@ -36380,9 +36892,10 @@
               </a:buClr>
               <a:buFont typeface="Arial"/>
               <a:buChar char="–"/>
-            </a:pPr>
-            <a:r>
-              <a:rPr sz="1600" b="0" i="0">
+              <a:defRPr/>
+            </a:pPr>
+            <a:r>
+              <a:rPr sz="1800" b="0" i="0">
                 <a:solidFill>
                   <a:srgbClr val="2B343F"/>
                 </a:solidFill>
@@ -36407,9 +36920,10 @@
               </a:buClr>
               <a:buFont typeface="Arial"/>
               <a:buChar char="▪"/>
-            </a:pPr>
-            <a:r>
-              <a:rPr sz="1500" b="0" i="0">
+              <a:defRPr/>
+            </a:pPr>
+            <a:r>
+              <a:rPr sz="1800" b="0" i="0">
                 <a:solidFill>
                   <a:srgbClr val="2B343F"/>
                 </a:solidFill>
@@ -36418,7 +36932,7 @@
               <a:t>The heartbeat process can </a:t>
             </a:r>
             <a:r>
-              <a:rPr sz="1500" b="1" i="0">
+              <a:rPr sz="1800" b="1" i="0">
                 <a:solidFill>
                   <a:srgbClr val="2B343F"/>
                 </a:solidFill>
@@ -36427,7 +36941,7 @@
               <a:t>introspect the graph's currently-bound tools</a:t>
             </a:r>
             <a:r>
-              <a:rPr sz="1500" b="0" i="0">
+              <a:rPr sz="1800" b="0" i="0">
                 <a:solidFill>
                   <a:srgbClr val="2B343F"/>
                 </a:solidFill>
@@ -36449,9 +36963,10 @@
               </a:buClr>
               <a:buFont typeface="Arial"/>
               <a:buChar char="–"/>
-            </a:pPr>
-            <a:r>
-              <a:rPr sz="1600" b="0" i="0">
+              <a:defRPr/>
+            </a:pPr>
+            <a:r>
+              <a:rPr sz="1800" b="0" i="0">
                 <a:solidFill>
                   <a:srgbClr val="2B343F"/>
                 </a:solidFill>
@@ -36460,7 +36975,7 @@
               <a:t>Skill registration stays a </a:t>
             </a:r>
             <a:r>
-              <a:rPr sz="1600" b="1" i="0">
+              <a:rPr sz="1800" b="1" i="0">
                 <a:solidFill>
                   <a:srgbClr val="2B343F"/>
                 </a:solidFill>
@@ -36469,7 +36984,7 @@
               <a:t>single source of truth</a:t>
             </a:r>
             <a:r>
-              <a:rPr sz="1600" b="0" i="0">
+              <a:rPr sz="1800" b="0" i="0">
                 <a:solidFill>
                   <a:srgbClr val="2B343F"/>
                 </a:solidFill>
@@ -36510,6 +37025,7 @@
                 <a:spcPts val="600"/>
               </a:spcAft>
               <a:buNone/>
+              <a:defRPr/>
             </a:pPr>
             <a:r>
               <a:rPr sz="1200" b="1" i="0">
@@ -36553,6 +37069,7 @@
                 <a:spcPts val="600"/>
               </a:spcAft>
               <a:buNone/>
+              <a:defRPr/>
             </a:pPr>
             <a:r>
               <a:rPr sz="900" b="0" i="0">
@@ -36596,6 +37113,7 @@
                 <a:spcPts val="600"/>
               </a:spcAft>
               <a:buNone/>
+              <a:defRPr/>
             </a:pPr>
             <a:r>
               <a:rPr sz="900" b="0" i="0">
@@ -36655,6 +37173,7 @@
                 <a:spcPts val="600"/>
               </a:spcAft>
               <a:buNone/>
+              <a:defRPr/>
             </a:pPr>
             <a:r>
               <a:rPr sz="3000" b="1" i="0">
@@ -36700,9 +37219,10 @@
               </a:buClr>
               <a:buFont typeface="Arial"/>
               <a:buChar char="▪"/>
-            </a:pPr>
-            <a:r>
-              <a:rPr sz="1550" b="1" i="0">
+              <a:defRPr/>
+            </a:pPr>
+            <a:r>
+              <a:rPr sz="1800" b="1" i="0">
                 <a:solidFill>
                   <a:srgbClr val="2B343F"/>
                 </a:solidFill>
@@ -36711,7 +37231,7 @@
               <a:t>1.</a:t>
             </a:r>
             <a:r>
-              <a:rPr sz="1550" b="0" i="0">
+              <a:rPr sz="1800" b="0" i="0">
                 <a:solidFill>
                   <a:srgbClr val="2B343F"/>
                 </a:solidFill>
@@ -36733,9 +37253,10 @@
               </a:buClr>
               <a:buFont typeface="Arial"/>
               <a:buChar char="▪"/>
-            </a:pPr>
-            <a:r>
-              <a:rPr sz="1550" b="1" i="0">
+              <a:defRPr/>
+            </a:pPr>
+            <a:r>
+              <a:rPr sz="1800" b="1" i="0">
                 <a:solidFill>
                   <a:srgbClr val="2B343F"/>
                 </a:solidFill>
@@ -36744,7 +37265,7 @@
               <a:t>2.</a:t>
             </a:r>
             <a:r>
-              <a:rPr sz="1550" b="0" i="0">
+              <a:rPr sz="1800" b="0" i="0">
                 <a:solidFill>
                   <a:srgbClr val="2B343F"/>
                 </a:solidFill>
@@ -36766,9 +37287,10 @@
               </a:buClr>
               <a:buFont typeface="Arial"/>
               <a:buChar char="▪"/>
-            </a:pPr>
-            <a:r>
-              <a:rPr sz="1550" b="1" i="0">
+              <a:defRPr/>
+            </a:pPr>
+            <a:r>
+              <a:rPr sz="1800" b="1" i="0">
                 <a:solidFill>
                   <a:srgbClr val="2B343F"/>
                 </a:solidFill>
@@ -36777,7 +37299,7 @@
               <a:t>3.</a:t>
             </a:r>
             <a:r>
-              <a:rPr sz="1550" b="0" i="0">
+              <a:rPr sz="1800" b="0" i="0">
                 <a:solidFill>
                   <a:srgbClr val="2B343F"/>
                 </a:solidFill>
@@ -36799,9 +37321,10 @@
               </a:buClr>
               <a:buFont typeface="Arial"/>
               <a:buChar char="▪"/>
-            </a:pPr>
-            <a:r>
-              <a:rPr sz="1550" b="1" i="0">
+              <a:defRPr/>
+            </a:pPr>
+            <a:r>
+              <a:rPr sz="1800" b="1" i="0">
                 <a:solidFill>
                   <a:srgbClr val="2B343F"/>
                 </a:solidFill>
@@ -36810,7 +37333,7 @@
               <a:t>4.</a:t>
             </a:r>
             <a:r>
-              <a:rPr sz="1550" b="0" i="0">
+              <a:rPr sz="1800" b="0" i="0">
                 <a:solidFill>
                   <a:srgbClr val="2B343F"/>
                 </a:solidFill>
@@ -36819,7 +37342,7 @@
               <a:t> Re-run the Part 7.4 kill-and-resume test — confirm the </a:t>
             </a:r>
             <a:r>
-              <a:rPr sz="1550" b="1" i="0">
+              <a:rPr sz="1800" b="1" i="0">
                 <a:solidFill>
                   <a:srgbClr val="2B343F"/>
                 </a:solidFill>
@@ -36828,7 +37351,7 @@
               <a:t>LangGraph checkpoint</a:t>
             </a:r>
             <a:r>
-              <a:rPr sz="1550" b="0" i="0">
+              <a:rPr sz="1800" b="0" i="0">
                 <a:solidFill>
                   <a:srgbClr val="2B343F"/>
                 </a:solidFill>
@@ -36850,9 +37373,10 @@
               </a:buClr>
               <a:buFont typeface="Arial"/>
               <a:buChar char="▪"/>
-            </a:pPr>
-            <a:r>
-              <a:rPr sz="1550" b="1" i="0">
+              <a:defRPr/>
+            </a:pPr>
+            <a:r>
+              <a:rPr sz="1800" b="1" i="0">
                 <a:solidFill>
                   <a:srgbClr val="2B343F"/>
                 </a:solidFill>
@@ -36861,7 +37385,7 @@
               <a:t>5.</a:t>
             </a:r>
             <a:r>
-              <a:rPr sz="1550" b="0" i="0">
+              <a:rPr sz="1800" b="0" i="0">
                 <a:solidFill>
                   <a:srgbClr val="2B343F"/>
                 </a:solidFill>
@@ -36870,7 +37394,7 @@
               <a:t> Compare latency / complexity against the </a:t>
             </a:r>
             <a:r>
-              <a:rPr sz="1550" b="1" i="0">
+              <a:rPr sz="1800" b="1" i="0">
                 <a:solidFill>
                   <a:srgbClr val="2B343F"/>
                 </a:solidFill>
@@ -36879,7 +37403,7 @@
               <a:t>framework-free</a:t>
             </a:r>
             <a:r>
-              <a:rPr sz="1550" b="0" i="0">
+              <a:rPr sz="1800" b="0" i="0">
                 <a:solidFill>
                   <a:srgbClr val="2B343F"/>
                 </a:solidFill>
@@ -36920,6 +37444,7 @@
                 <a:spcPts val="600"/>
               </a:spcAft>
               <a:buNone/>
+              <a:defRPr/>
             </a:pPr>
             <a:r>
               <a:rPr sz="1200" b="1" i="0">
@@ -36963,6 +37488,7 @@
                 <a:spcPts val="600"/>
               </a:spcAft>
               <a:buNone/>
+              <a:defRPr/>
             </a:pPr>
             <a:r>
               <a:rPr sz="900" b="0" i="0">
@@ -37006,6 +37532,7 @@
                 <a:spcPts val="600"/>
               </a:spcAft>
               <a:buNone/>
+              <a:defRPr/>
             </a:pPr>
             <a:r>
               <a:rPr sz="900" b="0" i="0">
@@ -37065,6 +37592,7 @@
                 <a:spcPts val="600"/>
               </a:spcAft>
               <a:buNone/>
+              <a:defRPr/>
             </a:pPr>
             <a:r>
               <a:rPr sz="3000" b="1" i="0">
@@ -37108,6 +37636,7 @@
                 <a:spcPts val="600"/>
               </a:spcAft>
               <a:buNone/>
+              <a:defRPr/>
             </a:pPr>
             <a:r>
               <a:rPr sz="1200" b="1" i="0">
@@ -37151,6 +37680,7 @@
                 <a:spcPts val="600"/>
               </a:spcAft>
               <a:buNone/>
+              <a:defRPr/>
             </a:pPr>
             <a:r>
               <a:rPr sz="900" b="0" i="0">
@@ -37194,6 +37724,7 @@
                 <a:spcPts val="600"/>
               </a:spcAft>
               <a:buNone/>
+              <a:defRPr/>
             </a:pPr>
             <a:r>
               <a:rPr sz="900" b="0" i="0">
@@ -37257,6 +37788,7 @@
                 <a:spcPts val="0"/>
               </a:spcAft>
               <a:buNone/>
+              <a:defRPr/>
             </a:pPr>
             <a:r>
               <a:rPr sz="1900" b="1" i="0">
@@ -37277,9 +37809,10 @@
                 <a:spcPts val="0"/>
               </a:spcAft>
               <a:buNone/>
-            </a:pPr>
-            <a:r>
-              <a:rPr sz="1550" b="0" i="0">
+              <a:defRPr/>
+            </a:pPr>
+            <a:r>
+              <a:rPr sz="1800" b="0" i="0">
                 <a:solidFill>
                   <a:srgbClr val="FFFFFF"/>
                 </a:solidFill>
@@ -37320,6 +37853,7 @@
                 <a:spcPts val="600"/>
               </a:spcAft>
               <a:buNone/>
+              <a:defRPr/>
             </a:pPr>
             <a:r>
               <a:rPr sz="1200" b="0" i="0">
@@ -37373,7 +37907,9 @@
           <a:bodyPr rtlCol="0" anchor="ctr"/>
           <a:lstStyle/>
           <a:p>
-            <a:pPr algn="ctr"/>
+            <a:pPr algn="ctr">
+              <a:defRPr/>
+            </a:pPr>
           </a:p>
         </p:txBody>
       </p:sp>
@@ -37427,6 +37963,7 @@
                 <a:spcPts val="0"/>
               </a:spcAft>
               <a:buNone/>
+              <a:defRPr/>
             </a:pPr>
             <a:r>
               <a:rPr sz="1900" b="1" i="0">
@@ -37447,9 +37984,10 @@
                 <a:spcPts val="0"/>
               </a:spcAft>
               <a:buNone/>
-            </a:pPr>
-            <a:r>
-              <a:rPr sz="1550" b="0" i="0">
+              <a:defRPr/>
+            </a:pPr>
+            <a:r>
+              <a:rPr sz="1800" b="0" i="0">
                 <a:solidFill>
                   <a:srgbClr val="1F2A36"/>
                 </a:solidFill>
@@ -37490,6 +38028,7 @@
                 <a:spcPts val="600"/>
               </a:spcAft>
               <a:buNone/>
+              <a:defRPr/>
             </a:pPr>
             <a:r>
               <a:rPr sz="1200" b="0" i="0">
@@ -37543,7 +38082,9 @@
           <a:bodyPr rtlCol="0" anchor="ctr"/>
           <a:lstStyle/>
           <a:p>
-            <a:pPr algn="ctr"/>
+            <a:pPr algn="ctr">
+              <a:defRPr/>
+            </a:pPr>
           </a:p>
         </p:txBody>
       </p:sp>
@@ -37597,6 +38138,7 @@
                 <a:spcPts val="0"/>
               </a:spcAft>
               <a:buNone/>
+              <a:defRPr/>
             </a:pPr>
             <a:r>
               <a:rPr sz="1900" b="1" i="0">
@@ -37617,9 +38159,10 @@
                 <a:spcPts val="0"/>
               </a:spcAft>
               <a:buNone/>
-            </a:pPr>
-            <a:r>
-              <a:rPr sz="1550" b="0" i="0">
+              <a:defRPr/>
+            </a:pPr>
+            <a:r>
+              <a:rPr sz="1800" b="0" i="0">
                 <a:solidFill>
                   <a:srgbClr val="1F2A36"/>
                 </a:solidFill>
@@ -37660,6 +38203,7 @@
                 <a:spcPts val="600"/>
               </a:spcAft>
               <a:buNone/>
+              <a:defRPr/>
             </a:pPr>
             <a:r>
               <a:rPr sz="1200" b="0" i="0">
@@ -37703,9 +38247,10 @@
                 <a:spcPts val="600"/>
               </a:spcAft>
               <a:buNone/>
-            </a:pPr>
-            <a:r>
-              <a:rPr sz="1500" b="1" i="0">
+              <a:defRPr/>
+            </a:pPr>
+            <a:r>
+              <a:rPr sz="1800" b="1" i="0">
                 <a:solidFill>
                   <a:srgbClr val="004282"/>
                 </a:solidFill>
@@ -37766,9 +38311,10 @@
                 <a:spcPts val="0"/>
               </a:spcAft>
               <a:buNone/>
-            </a:pPr>
-            <a:r>
-              <a:rPr sz="1450" b="1" i="0">
+              <a:defRPr/>
+            </a:pPr>
+            <a:r>
+              <a:rPr sz="1800" b="1" i="0">
                 <a:solidFill>
                   <a:srgbClr val="004282"/>
                 </a:solidFill>
@@ -37786,6 +38332,7 @@
                 <a:spcPts val="0"/>
               </a:spcAft>
               <a:buNone/>
+              <a:defRPr/>
             </a:pPr>
             <a:r>
               <a:rPr sz="1100" b="0" i="0">
@@ -37849,9 +38396,10 @@
                 <a:spcPts val="0"/>
               </a:spcAft>
               <a:buNone/>
-            </a:pPr>
-            <a:r>
-              <a:rPr sz="1450" b="1" i="0">
+              <a:defRPr/>
+            </a:pPr>
+            <a:r>
+              <a:rPr sz="1800" b="1" i="0">
                 <a:solidFill>
                   <a:srgbClr val="004282"/>
                 </a:solidFill>
@@ -37869,6 +38417,7 @@
                 <a:spcPts val="0"/>
               </a:spcAft>
               <a:buNone/>
+              <a:defRPr/>
             </a:pPr>
             <a:r>
               <a:rPr sz="1100" b="0" i="0">
@@ -37932,9 +38481,10 @@
                 <a:spcPts val="0"/>
               </a:spcAft>
               <a:buNone/>
-            </a:pPr>
-            <a:r>
-              <a:rPr sz="1450" b="1" i="0">
+              <a:defRPr/>
+            </a:pPr>
+            <a:r>
+              <a:rPr sz="1800" b="1" i="0">
                 <a:solidFill>
                   <a:srgbClr val="004282"/>
                 </a:solidFill>
@@ -37952,6 +38502,7 @@
                 <a:spcPts val="0"/>
               </a:spcAft>
               <a:buNone/>
+              <a:defRPr/>
             </a:pPr>
             <a:r>
               <a:rPr sz="1100" b="0" i="0">
@@ -38015,9 +38566,10 @@
                 <a:spcPts val="0"/>
               </a:spcAft>
               <a:buNone/>
-            </a:pPr>
-            <a:r>
-              <a:rPr sz="1450" b="1" i="0">
+              <a:defRPr/>
+            </a:pPr>
+            <a:r>
+              <a:rPr sz="1800" b="1" i="0">
                 <a:solidFill>
                   <a:srgbClr val="004282"/>
                 </a:solidFill>
@@ -38035,6 +38587,7 @@
                 <a:spcPts val="0"/>
               </a:spcAft>
               <a:buNone/>
+              <a:defRPr/>
             </a:pPr>
             <a:r>
               <a:rPr sz="1100" b="0" i="0">
@@ -38078,9 +38631,10 @@
                 <a:spcPts val="600"/>
               </a:spcAft>
               <a:buNone/>
-            </a:pPr>
-            <a:r>
-              <a:rPr sz="1400" b="0" i="1">
+              <a:defRPr/>
+            </a:pPr>
+            <a:r>
+              <a:rPr sz="1800" b="0" i="1">
                 <a:solidFill>
                   <a:srgbClr val="7B8898"/>
                 </a:solidFill>
@@ -38139,6 +38693,7 @@
                 <a:spcPts val="600"/>
               </a:spcAft>
               <a:buNone/>
+              <a:defRPr/>
             </a:pPr>
             <a:r>
               <a:rPr sz="4000" b="1" i="0">
@@ -38182,9 +38737,10 @@
                 <a:spcPts val="600"/>
               </a:spcAft>
               <a:buNone/>
-            </a:pPr>
-            <a:r>
-              <a:rPr sz="1400" b="0" i="0">
+              <a:defRPr/>
+            </a:pPr>
+            <a:r>
+              <a:rPr sz="1800" b="0" i="0">
                 <a:solidFill>
                   <a:srgbClr val="7B8898"/>
                 </a:solidFill>
@@ -38241,6 +38797,7 @@
                 <a:spcPts val="600"/>
               </a:spcAft>
               <a:buNone/>
+              <a:defRPr/>
             </a:pPr>
             <a:r>
               <a:rPr sz="3000" b="1" i="0">
@@ -38284,6 +38841,7 @@
                 <a:spcPts val="600"/>
               </a:spcAft>
               <a:buNone/>
+              <a:defRPr/>
             </a:pPr>
             <a:r>
               <a:rPr sz="1200" b="1" i="0">
@@ -38327,6 +38885,7 @@
                 <a:spcPts val="600"/>
               </a:spcAft>
               <a:buNone/>
+              <a:defRPr/>
             </a:pPr>
             <a:r>
               <a:rPr sz="900" b="0" i="0">
@@ -38370,6 +38929,7 @@
                 <a:spcPts val="600"/>
               </a:spcAft>
               <a:buNone/>
+              <a:defRPr/>
             </a:pPr>
             <a:r>
               <a:rPr sz="900" b="0" i="0">
@@ -38393,7 +38953,7 @@
         </p:nvGraphicFramePr>
         <p:xfrm>
           <a:off x="841248" y="1481328"/>
-          <a:ext cx="10515600" cy="3931920"/>
+          <a:ext cx="10515600" cy="4590287"/>
         </p:xfrm>
         <a:graphic>
           <a:graphicData uri="http://schemas.openxmlformats.org/drawingml/2006/table">
@@ -38412,7 +38972,11 @@
                   <a:txBody>
                     <a:bodyPr/>
                     <a:lstStyle/>
-                    <a:p/>
+                    <a:p>
+                      <a:pPr>
+                        <a:defRPr/>
+                      </a:pPr>
+                    </a:p>
                   </a:txBody>
                   <a:tcPr>
                     <a:solidFill>
@@ -38425,8 +38989,11 @@
                     <a:bodyPr/>
                     <a:lstStyle/>
                     <a:p>
+                      <a:pPr>
+                        <a:defRPr/>
+                      </a:pPr>
                       <a:r>
-                        <a:rPr b="1" sz="1500">
+                        <a:rPr b="1" sz="1800">
                           <a:solidFill>
                             <a:srgbClr val="FFFFFF"/>
                           </a:solidFill>
@@ -38447,8 +39014,11 @@
                     <a:bodyPr/>
                     <a:lstStyle/>
                     <a:p>
+                      <a:pPr>
+                        <a:defRPr/>
+                      </a:pPr>
                       <a:r>
-                        <a:rPr b="1" sz="1500">
+                        <a:rPr b="1" sz="1800">
                           <a:solidFill>
                             <a:srgbClr val="1F2A36"/>
                           </a:solidFill>
@@ -38469,8 +39039,11 @@
                     <a:bodyPr/>
                     <a:lstStyle/>
                     <a:p>
+                      <a:pPr>
+                        <a:defRPr/>
+                      </a:pPr>
                       <a:r>
-                        <a:rPr b="1" sz="1500">
+                        <a:rPr b="1" sz="1800">
                           <a:solidFill>
                             <a:srgbClr val="1F2A36"/>
                           </a:solidFill>
@@ -38493,8 +39066,11 @@
                     <a:bodyPr/>
                     <a:lstStyle/>
                     <a:p>
+                      <a:pPr>
+                        <a:defRPr/>
+                      </a:pPr>
                       <a:r>
-                        <a:rPr sz="1250" b="1">
+                        <a:rPr sz="1800" b="1">
                           <a:solidFill>
                             <a:srgbClr val="004282"/>
                           </a:solidFill>
@@ -38515,8 +39091,11 @@
                     <a:bodyPr/>
                     <a:lstStyle/>
                     <a:p>
+                      <a:pPr>
+                        <a:defRPr/>
+                      </a:pPr>
                       <a:r>
-                        <a:rPr sz="1250" b="0">
+                        <a:rPr sz="1800" b="0">
                           <a:solidFill>
                             <a:srgbClr val="2B343F"/>
                           </a:solidFill>
@@ -38537,8 +39116,11 @@
                     <a:bodyPr/>
                     <a:lstStyle/>
                     <a:p>
+                      <a:pPr>
+                        <a:defRPr/>
+                      </a:pPr>
                       <a:r>
-                        <a:rPr sz="1250" b="0">
+                        <a:rPr sz="1800" b="0">
                           <a:solidFill>
                             <a:srgbClr val="2B343F"/>
                           </a:solidFill>
@@ -38559,8 +39141,11 @@
                     <a:bodyPr/>
                     <a:lstStyle/>
                     <a:p>
+                      <a:pPr>
+                        <a:defRPr/>
+                      </a:pPr>
                       <a:r>
-                        <a:rPr sz="1250" b="0">
+                        <a:rPr sz="1800" b="0">
                           <a:solidFill>
                             <a:srgbClr val="2B343F"/>
                           </a:solidFill>
@@ -38577,14 +39162,17 @@
                   </a:tcPr>
                 </a:tc>
               </a:tr>
-              <a:tr h="786384">
+              <a:tr h="914400">
                 <a:tc>
                   <a:txBody>
                     <a:bodyPr/>
                     <a:lstStyle/>
                     <a:p>
+                      <a:pPr>
+                        <a:defRPr/>
+                      </a:pPr>
                       <a:r>
-                        <a:rPr sz="1250" b="1">
+                        <a:rPr sz="1800" b="1">
                           <a:solidFill>
                             <a:srgbClr val="004282"/>
                           </a:solidFill>
@@ -38605,8 +39193,11 @@
                     <a:bodyPr/>
                     <a:lstStyle/>
                     <a:p>
+                      <a:pPr>
+                        <a:defRPr/>
+                      </a:pPr>
                       <a:r>
-                        <a:rPr sz="1250" b="0">
+                        <a:rPr sz="1800" b="0">
                           <a:solidFill>
                             <a:srgbClr val="2B343F"/>
                           </a:solidFill>
@@ -38627,8 +39218,11 @@
                     <a:bodyPr/>
                     <a:lstStyle/>
                     <a:p>
+                      <a:pPr>
+                        <a:defRPr/>
+                      </a:pPr>
                       <a:r>
-                        <a:rPr sz="1250" b="0">
+                        <a:rPr sz="1800" b="0">
                           <a:solidFill>
                             <a:srgbClr val="2B343F"/>
                           </a:solidFill>
@@ -38649,8 +39243,11 @@
                     <a:bodyPr/>
                     <a:lstStyle/>
                     <a:p>
+                      <a:pPr>
+                        <a:defRPr/>
+                      </a:pPr>
                       <a:r>
-                        <a:rPr sz="1250" b="0">
+                        <a:rPr sz="1800" b="0">
                           <a:solidFill>
                             <a:srgbClr val="2B343F"/>
                           </a:solidFill>
@@ -38667,14 +39264,17 @@
                   </a:tcPr>
                 </a:tc>
               </a:tr>
-              <a:tr h="786384">
+              <a:tr h="1188719">
                 <a:tc>
                   <a:txBody>
                     <a:bodyPr/>
                     <a:lstStyle/>
                     <a:p>
+                      <a:pPr>
+                        <a:defRPr/>
+                      </a:pPr>
                       <a:r>
-                        <a:rPr sz="1250" b="1">
+                        <a:rPr sz="1800" b="1">
                           <a:solidFill>
                             <a:srgbClr val="004282"/>
                           </a:solidFill>
@@ -38695,8 +39295,11 @@
                     <a:bodyPr/>
                     <a:lstStyle/>
                     <a:p>
+                      <a:pPr>
+                        <a:defRPr/>
+                      </a:pPr>
                       <a:r>
-                        <a:rPr sz="1250" b="0">
+                        <a:rPr sz="1800" b="0">
                           <a:solidFill>
                             <a:srgbClr val="2B343F"/>
                           </a:solidFill>
@@ -38717,8 +39320,11 @@
                     <a:bodyPr/>
                     <a:lstStyle/>
                     <a:p>
+                      <a:pPr>
+                        <a:defRPr/>
+                      </a:pPr>
                       <a:r>
-                        <a:rPr sz="1250" b="0">
+                        <a:rPr sz="1800" b="0">
                           <a:solidFill>
                             <a:srgbClr val="2B343F"/>
                           </a:solidFill>
@@ -38739,8 +39345,11 @@
                     <a:bodyPr/>
                     <a:lstStyle/>
                     <a:p>
+                      <a:pPr>
+                        <a:defRPr/>
+                      </a:pPr>
                       <a:r>
-                        <a:rPr sz="1250" b="0">
+                        <a:rPr sz="1800" b="0">
                           <a:solidFill>
                             <a:srgbClr val="2B343F"/>
                           </a:solidFill>
@@ -38757,14 +39366,17 @@
                   </a:tcPr>
                 </a:tc>
               </a:tr>
-              <a:tr h="786384">
+              <a:tr h="914400">
                 <a:tc>
                   <a:txBody>
                     <a:bodyPr/>
                     <a:lstStyle/>
                     <a:p>
+                      <a:pPr>
+                        <a:defRPr/>
+                      </a:pPr>
                       <a:r>
-                        <a:rPr sz="1250" b="1">
+                        <a:rPr sz="1800" b="1">
                           <a:solidFill>
                             <a:srgbClr val="004282"/>
                           </a:solidFill>
@@ -38785,8 +39397,11 @@
                     <a:bodyPr/>
                     <a:lstStyle/>
                     <a:p>
+                      <a:pPr>
+                        <a:defRPr/>
+                      </a:pPr>
                       <a:r>
-                        <a:rPr sz="1250" b="0">
+                        <a:rPr sz="1800" b="0">
                           <a:solidFill>
                             <a:srgbClr val="2B343F"/>
                           </a:solidFill>
@@ -38807,8 +39422,11 @@
                     <a:bodyPr/>
                     <a:lstStyle/>
                     <a:p>
+                      <a:pPr>
+                        <a:defRPr/>
+                      </a:pPr>
                       <a:r>
-                        <a:rPr sz="1250" b="0">
+                        <a:rPr sz="1800" b="0">
                           <a:solidFill>
                             <a:srgbClr val="2B343F"/>
                           </a:solidFill>
@@ -38829,8 +39447,11 @@
                     <a:bodyPr/>
                     <a:lstStyle/>
                     <a:p>
+                      <a:pPr>
+                        <a:defRPr/>
+                      </a:pPr>
                       <a:r>
-                        <a:rPr sz="1250" b="0">
+                        <a:rPr sz="1800" b="0">
                           <a:solidFill>
                             <a:srgbClr val="2B343F"/>
                           </a:solidFill>
@@ -38859,8 +39480,8 @@
         </p:nvSpPr>
         <p:spPr>
           <a:xfrm>
-            <a:off x="841248" y="5577840"/>
-            <a:ext cx="10607040" cy="457200"/>
+            <a:off x="841248" y="5405798"/>
+            <a:ext cx="10607040" cy="592666"/>
           </a:xfrm>
           <a:prstGeom prst="rect">
             <a:avLst/>
@@ -38881,9 +39502,10 @@
                 <a:spcPts val="600"/>
               </a:spcAft>
               <a:buNone/>
-            </a:pPr>
-            <a:r>
-              <a:rPr sz="1300" b="0" i="1">
+              <a:defRPr/>
+            </a:pPr>
+            <a:r>
+              <a:rPr sz="1800" b="0" i="1">
                 <a:solidFill>
                   <a:srgbClr val="7B8898"/>
                 </a:solidFill>
@@ -38920,6 +39542,7 @@
               <a:spcAft>
                 <a:spcPts val="200"/>
               </a:spcAft>
+              <a:defRPr/>
             </a:pPr>
             <a:r>
               <a:rPr sz="1100">
@@ -38932,6 +39555,9 @@
             </a:r>
           </a:p>
           <a:p>
+            <a:pPr>
+              <a:defRPr/>
+            </a:pPr>
             <a:r>
               <a:rPr sz="1000">
                 <a:solidFill>
@@ -38986,6 +39612,7 @@
                 <a:spcPts val="600"/>
               </a:spcAft>
               <a:buNone/>
+              <a:defRPr/>
             </a:pPr>
             <a:r>
               <a:rPr sz="4000" b="1" i="0">
@@ -39022,9 +39649,10 @@
                 <a:spcPts val="600"/>
               </a:spcAft>
               <a:buNone/>
-            </a:pPr>
-            <a:r>
-              <a:rPr sz="1700" b="0" i="0">
+              <a:defRPr/>
+            </a:pPr>
+            <a:r>
+              <a:rPr sz="1800" b="0" i="0">
                 <a:solidFill>
                   <a:srgbClr val="E8EEF5"/>
                 </a:solidFill>
@@ -39065,9 +39693,10 @@
                 <a:spcPts val="600"/>
               </a:spcAft>
               <a:buNone/>
-            </a:pPr>
-            <a:r>
-              <a:rPr sz="1500" b="1" i="0">
+              <a:defRPr/>
+            </a:pPr>
+            <a:r>
+              <a:rPr sz="1800" b="1" i="0">
                 <a:solidFill>
                   <a:srgbClr val="FFFFFF"/>
                 </a:solidFill>
@@ -39124,6 +39753,7 @@
                 <a:spcPts val="600"/>
               </a:spcAft>
               <a:buNone/>
+              <a:defRPr/>
             </a:pPr>
             <a:r>
               <a:rPr sz="3000" b="1" i="0">
@@ -39169,9 +39799,10 @@
               </a:buClr>
               <a:buFont typeface="Arial"/>
               <a:buChar char="▪"/>
-            </a:pPr>
-            <a:r>
-              <a:rPr sz="1650" b="1" i="0">
+              <a:defRPr/>
+            </a:pPr>
+            <a:r>
+              <a:rPr sz="1800" b="1" i="0">
                 <a:solidFill>
                   <a:srgbClr val="2B343F"/>
                 </a:solidFill>
@@ -39180,7 +39811,7 @@
               <a:t>Redis Streams + MCP</a:t>
             </a:r>
             <a:r>
-              <a:rPr sz="1650" b="0" i="0">
+              <a:rPr sz="1800" b="0" i="0">
                 <a:solidFill>
                   <a:srgbClr val="2B343F"/>
                 </a:solidFill>
@@ -39202,9 +39833,10 @@
               </a:buClr>
               <a:buFont typeface="Arial"/>
               <a:buChar char="–"/>
-            </a:pPr>
-            <a:r>
-              <a:rPr sz="1600" b="0" i="0">
+              <a:defRPr/>
+            </a:pPr>
+            <a:r>
+              <a:rPr sz="1800" b="0" i="0">
                 <a:solidFill>
                   <a:srgbClr val="2B343F"/>
                 </a:solidFill>
@@ -39213,7 +39845,7 @@
               <a:t>Redis Streams give </a:t>
             </a:r>
             <a:r>
-              <a:rPr sz="1600" b="1" i="0">
+              <a:rPr sz="1800" b="1" i="0">
                 <a:solidFill>
                   <a:srgbClr val="2B343F"/>
                 </a:solidFill>
@@ -39222,7 +39854,7 @@
               <a:t>durable, replayable, multi-consumer</a:t>
             </a:r>
             <a:r>
-              <a:rPr sz="1600" b="0" i="0">
+              <a:rPr sz="1800" b="0" i="0">
                 <a:solidFill>
                   <a:srgbClr val="2B343F"/>
                 </a:solidFill>
@@ -39244,9 +39876,10 @@
               </a:buClr>
               <a:buFont typeface="Arial"/>
               <a:buChar char="–"/>
-            </a:pPr>
-            <a:r>
-              <a:rPr sz="1600" b="0" i="0">
+              <a:defRPr/>
+            </a:pPr>
+            <a:r>
+              <a:rPr sz="1800" b="0" i="0">
                 <a:solidFill>
                   <a:srgbClr val="2B343F"/>
                 </a:solidFill>
@@ -39271,9 +39904,10 @@
               </a:buClr>
               <a:buFont typeface="Arial"/>
               <a:buChar char="▪"/>
-            </a:pPr>
-            <a:r>
-              <a:rPr sz="1650" b="1" i="0">
+              <a:defRPr/>
+            </a:pPr>
+            <a:r>
+              <a:rPr sz="1800" b="1" i="0">
                 <a:solidFill>
                   <a:srgbClr val="2B343F"/>
                 </a:solidFill>
@@ -39282,7 +39916,7 @@
               <a:t>Live demo:</a:t>
             </a:r>
             <a:r>
-              <a:rPr sz="1650" b="0" i="0">
+              <a:rPr sz="1800" b="0" i="0">
                 <a:solidFill>
                   <a:srgbClr val="2B343F"/>
                 </a:solidFill>
@@ -39304,9 +39938,10 @@
               </a:buClr>
               <a:buFont typeface="Arial"/>
               <a:buChar char="–"/>
-            </a:pPr>
-            <a:r>
-              <a:rPr sz="1600" b="0" i="0">
+              <a:defRPr/>
+            </a:pPr>
+            <a:r>
+              <a:rPr sz="1800" b="0" i="0">
                 <a:solidFill>
                   <a:srgbClr val="2B343F"/>
                 </a:solidFill>
@@ -39331,9 +39966,10 @@
               </a:buClr>
               <a:buFont typeface="Arial"/>
               <a:buChar char="▪"/>
-            </a:pPr>
-            <a:r>
-              <a:rPr sz="1650" b="1" i="0">
+              <a:defRPr/>
+            </a:pPr>
+            <a:r>
+              <a:rPr sz="1800" b="1" i="0">
                 <a:solidFill>
                   <a:srgbClr val="2B343F"/>
                 </a:solidFill>
@@ -39355,9 +39991,10 @@
               </a:buClr>
               <a:buFont typeface="Arial"/>
               <a:buChar char="–"/>
-            </a:pPr>
-            <a:r>
-              <a:rPr sz="1600" b="1" i="0">
+              <a:defRPr/>
+            </a:pPr>
+            <a:r>
+              <a:rPr sz="1800" b="1" i="0">
                 <a:solidFill>
                   <a:srgbClr val="2B343F"/>
                 </a:solidFill>
@@ -39366,7 +40003,7 @@
               <a:t>ClawHub</a:t>
             </a:r>
             <a:r>
-              <a:rPr sz="1600" b="0" i="0">
+              <a:rPr sz="1800" b="0" i="0">
                 <a:solidFill>
                   <a:srgbClr val="2B343F"/>
                 </a:solidFill>
@@ -39388,9 +40025,10 @@
               </a:buClr>
               <a:buFont typeface="Arial"/>
               <a:buChar char="–"/>
-            </a:pPr>
-            <a:r>
-              <a:rPr sz="1600" b="1" i="0">
+              <a:defRPr/>
+            </a:pPr>
+            <a:r>
+              <a:rPr sz="1800" b="1" i="0">
                 <a:solidFill>
                   <a:srgbClr val="2B343F"/>
                 </a:solidFill>
@@ -39399,7 +40037,7 @@
               <a:t>MoltGuard</a:t>
             </a:r>
             <a:r>
-              <a:rPr sz="1600" b="0" i="0">
+              <a:rPr sz="1800" b="0" i="0">
                 <a:solidFill>
                   <a:srgbClr val="2B343F"/>
                 </a:solidFill>
@@ -39440,6 +40078,7 @@
                 <a:spcPts val="600"/>
               </a:spcAft>
               <a:buNone/>
+              <a:defRPr/>
             </a:pPr>
             <a:r>
               <a:rPr sz="1200" b="1" i="0">
@@ -39483,6 +40122,7 @@
                 <a:spcPts val="600"/>
               </a:spcAft>
               <a:buNone/>
+              <a:defRPr/>
             </a:pPr>
             <a:r>
               <a:rPr sz="900" b="0" i="0">
@@ -39526,6 +40166,7 @@
                 <a:spcPts val="600"/>
               </a:spcAft>
               <a:buNone/>
+              <a:defRPr/>
             </a:pPr>
             <a:r>
               <a:rPr sz="900" b="0" i="0">
@@ -39580,6 +40221,7 @@
                 <a:spcPts val="600"/>
               </a:spcAft>
               <a:buNone/>
+              <a:defRPr/>
             </a:pPr>
             <a:r>
               <a:rPr sz="4000" b="1" i="0">
@@ -39616,9 +40258,10 @@
                 <a:spcPts val="600"/>
               </a:spcAft>
               <a:buNone/>
-            </a:pPr>
-            <a:r>
-              <a:rPr sz="1700" b="0" i="0">
+              <a:defRPr/>
+            </a:pPr>
+            <a:r>
+              <a:rPr sz="1800" b="0" i="0">
                 <a:solidFill>
                   <a:srgbClr val="E8EEF5"/>
                 </a:solidFill>
@@ -39659,9 +40302,10 @@
                 <a:spcPts val="600"/>
               </a:spcAft>
               <a:buNone/>
-            </a:pPr>
-            <a:r>
-              <a:rPr sz="1500" b="1" i="0">
+              <a:defRPr/>
+            </a:pPr>
+            <a:r>
+              <a:rPr sz="1800" b="1" i="0">
                 <a:solidFill>
                   <a:srgbClr val="FFFFFF"/>
                 </a:solidFill>
